--- a/Summary/training_review.pptx
+++ b/Summary/training_review.pptx
@@ -5,7 +5,7 @@
     <p:sldMasterId id="2147483648" r:id="rId1"/>
   </p:sldMasterIdLst>
   <p:notesMasterIdLst>
-    <p:notesMasterId r:id="rId24"/>
+    <p:notesMasterId r:id="rId26"/>
   </p:notesMasterIdLst>
   <p:sldIdLst>
     <p:sldId id="256" r:id="rId2"/>
@@ -14,8 +14,8 @@
     <p:sldId id="259" r:id="rId5"/>
     <p:sldId id="260" r:id="rId6"/>
     <p:sldId id="261" r:id="rId7"/>
-    <p:sldId id="262" r:id="rId8"/>
-    <p:sldId id="263" r:id="rId9"/>
+    <p:sldId id="263" r:id="rId8"/>
+    <p:sldId id="262" r:id="rId9"/>
     <p:sldId id="264" r:id="rId10"/>
     <p:sldId id="265" r:id="rId11"/>
     <p:sldId id="266" r:id="rId12"/>
@@ -25,11 +25,13 @@
     <p:sldId id="270" r:id="rId16"/>
     <p:sldId id="271" r:id="rId17"/>
     <p:sldId id="272" r:id="rId18"/>
-    <p:sldId id="273" r:id="rId19"/>
-    <p:sldId id="274" r:id="rId20"/>
-    <p:sldId id="275" r:id="rId21"/>
-    <p:sldId id="276" r:id="rId22"/>
-    <p:sldId id="277" r:id="rId23"/>
+    <p:sldId id="278" r:id="rId19"/>
+    <p:sldId id="273" r:id="rId20"/>
+    <p:sldId id="274" r:id="rId21"/>
+    <p:sldId id="275" r:id="rId22"/>
+    <p:sldId id="276" r:id="rId23"/>
+    <p:sldId id="279" r:id="rId24"/>
+    <p:sldId id="277" r:id="rId25"/>
   </p:sldIdLst>
   <p:sldSz cx="9144000" cy="5143500" type="screen16x9"/>
   <p:notesSz cx="5143500" cy="9144000"/>
@@ -1019,7 +1021,13 @@
   <p:cSld>
     <p:spTree>
       <p:nvGrpSpPr>
-        <p:cNvPr id="1" name=""/>
+        <p:cNvPr id="1" name="">
+          <a:extLst>
+            <a:ext uri="{FF2B5EF4-FFF2-40B4-BE49-F238E27FC236}">
+              <a16:creationId xmlns:a16="http://schemas.microsoft.com/office/drawing/2014/main" id="{DB32D9CA-40DF-F261-3E9F-4861AFC23035}"/>
+            </a:ext>
+          </a:extLst>
+        </p:cNvPr>
         <p:cNvGrpSpPr/>
         <p:nvPr/>
       </p:nvGrpSpPr>
@@ -1033,7 +1041,13 @@
       </p:grpSpPr>
       <p:sp>
         <p:nvSpPr>
-          <p:cNvPr id="2" name="Slide Image Placeholder 1"/>
+          <p:cNvPr id="2" name="Slide Image Placeholder 1">
+            <a:extLst>
+              <a:ext uri="{FF2B5EF4-FFF2-40B4-BE49-F238E27FC236}">
+                <a16:creationId xmlns:a16="http://schemas.microsoft.com/office/drawing/2014/main" id="{326A1E3C-C26C-EB49-2C4A-9525F4C97166}"/>
+              </a:ext>
+            </a:extLst>
+          </p:cNvPr>
           <p:cNvSpPr>
             <a:spLocks noGrp="1" noRot="1" noChangeAspect="1"/>
           </p:cNvSpPr>
@@ -1045,7 +1059,13 @@
       </p:sp>
       <p:sp>
         <p:nvSpPr>
-          <p:cNvPr id="3" name="Notes Placeholder 2"/>
+          <p:cNvPr id="3" name="Notes Placeholder 2">
+            <a:extLst>
+              <a:ext uri="{FF2B5EF4-FFF2-40B4-BE49-F238E27FC236}">
+                <a16:creationId xmlns:a16="http://schemas.microsoft.com/office/drawing/2014/main" id="{BD92038E-4C91-FA44-1C74-DBD2EE3A738B}"/>
+              </a:ext>
+            </a:extLst>
+          </p:cNvPr>
           <p:cNvSpPr>
             <a:spLocks noGrp="1"/>
           </p:cNvSpPr>
@@ -1064,7 +1084,13 @@
       </p:sp>
       <p:sp>
         <p:nvSpPr>
-          <p:cNvPr id="4" name="Slide Number Placeholder 3"/>
+          <p:cNvPr id="4" name="Slide Number Placeholder 3">
+            <a:extLst>
+              <a:ext uri="{FF2B5EF4-FFF2-40B4-BE49-F238E27FC236}">
+                <a16:creationId xmlns:a16="http://schemas.microsoft.com/office/drawing/2014/main" id="{A3564158-ACAE-0B98-AAD7-46DA467E3386}"/>
+              </a:ext>
+            </a:extLst>
+          </p:cNvPr>
           <p:cNvSpPr>
             <a:spLocks noGrp="1"/>
           </p:cNvSpPr>
@@ -1088,7 +1114,7 @@
     </p:spTree>
     <p:extLst>
       <p:ext uri="{BB962C8B-B14F-4D97-AF65-F5344CB8AC3E}">
-        <p14:creationId xmlns:p14="http://schemas.microsoft.com/office/powerpoint/2010/main" val="1024086991"/>
+        <p14:creationId xmlns:p14="http://schemas.microsoft.com/office/powerpoint/2010/main" val="3817811676"/>
       </p:ext>
     </p:extLst>
   </p:cSld>
@@ -1500,6 +1526,198 @@
             <a:fld id="{F7021451-1387-4CA6-816F-3879F97B5CBC}" type="slidenum">
               <a:rPr lang="en-US"/>
               <a:t>22</a:t>
+            </a:fld>
+            <a:endParaRPr lang="en-US"/>
+          </a:p>
+        </p:txBody>
+      </p:sp>
+    </p:spTree>
+    <p:extLst>
+      <p:ext uri="{BB962C8B-B14F-4D97-AF65-F5344CB8AC3E}">
+        <p14:creationId xmlns:p14="http://schemas.microsoft.com/office/powerpoint/2010/main" val="1024086991"/>
+      </p:ext>
+    </p:extLst>
+  </p:cSld>
+  <p:clrMapOvr>
+    <a:masterClrMapping/>
+  </p:clrMapOvr>
+</p:notes>
+</file>
+
+<file path=ppt/notesSlides/notesSlide23.xml><?xml version="1.0" encoding="utf-8"?>
+<p:notes xmlns:a="http://schemas.openxmlformats.org/drawingml/2006/main" xmlns:r="http://schemas.openxmlformats.org/officeDocument/2006/relationships" xmlns:p="http://schemas.openxmlformats.org/presentationml/2006/main">
+  <p:cSld>
+    <p:spTree>
+      <p:nvGrpSpPr>
+        <p:cNvPr id="1" name="">
+          <a:extLst>
+            <a:ext uri="{FF2B5EF4-FFF2-40B4-BE49-F238E27FC236}">
+              <a16:creationId xmlns:a16="http://schemas.microsoft.com/office/drawing/2014/main" id="{2A63E05A-E461-BD06-FB4F-3703B03A41DF}"/>
+            </a:ext>
+          </a:extLst>
+        </p:cNvPr>
+        <p:cNvGrpSpPr/>
+        <p:nvPr/>
+      </p:nvGrpSpPr>
+      <p:grpSpPr>
+        <a:xfrm>
+          <a:off x="0" y="0"/>
+          <a:ext cx="0" cy="0"/>
+          <a:chOff x="0" y="0"/>
+          <a:chExt cx="0" cy="0"/>
+        </a:xfrm>
+      </p:grpSpPr>
+      <p:sp>
+        <p:nvSpPr>
+          <p:cNvPr id="2" name="Slide Image Placeholder 1">
+            <a:extLst>
+              <a:ext uri="{FF2B5EF4-FFF2-40B4-BE49-F238E27FC236}">
+                <a16:creationId xmlns:a16="http://schemas.microsoft.com/office/drawing/2014/main" id="{7B8BC76B-D652-0216-8AA7-8EE1407167BC}"/>
+              </a:ext>
+            </a:extLst>
+          </p:cNvPr>
+          <p:cNvSpPr>
+            <a:spLocks noGrp="1" noRot="1" noChangeAspect="1"/>
+          </p:cNvSpPr>
+          <p:nvPr>
+            <p:ph type="sldImg"/>
+          </p:nvPr>
+        </p:nvSpPr>
+        <p:spPr/>
+      </p:sp>
+      <p:sp>
+        <p:nvSpPr>
+          <p:cNvPr id="3" name="Notes Placeholder 2">
+            <a:extLst>
+              <a:ext uri="{FF2B5EF4-FFF2-40B4-BE49-F238E27FC236}">
+                <a16:creationId xmlns:a16="http://schemas.microsoft.com/office/drawing/2014/main" id="{2CAFA616-A654-0598-8399-48B166DB5D56}"/>
+              </a:ext>
+            </a:extLst>
+          </p:cNvPr>
+          <p:cNvSpPr>
+            <a:spLocks noGrp="1"/>
+          </p:cNvSpPr>
+          <p:nvPr>
+            <p:ph type="body" idx="1"/>
+          </p:nvPr>
+        </p:nvSpPr>
+        <p:spPr/>
+        <p:txBody>
+          <a:bodyPr/>
+          <a:lstStyle/>
+          <a:p>
+            <a:endParaRPr lang="en-US" dirty="0"/>
+          </a:p>
+        </p:txBody>
+      </p:sp>
+      <p:sp>
+        <p:nvSpPr>
+          <p:cNvPr id="4" name="Slide Number Placeholder 3">
+            <a:extLst>
+              <a:ext uri="{FF2B5EF4-FFF2-40B4-BE49-F238E27FC236}">
+                <a16:creationId xmlns:a16="http://schemas.microsoft.com/office/drawing/2014/main" id="{6F5A217B-664E-758F-1061-B6768326DFEF}"/>
+              </a:ext>
+            </a:extLst>
+          </p:cNvPr>
+          <p:cNvSpPr>
+            <a:spLocks noGrp="1"/>
+          </p:cNvSpPr>
+          <p:nvPr>
+            <p:ph type="sldNum" sz="quarter" idx="10"/>
+          </p:nvPr>
+        </p:nvSpPr>
+        <p:spPr/>
+        <p:txBody>
+          <a:bodyPr/>
+          <a:lstStyle/>
+          <a:p>
+            <a:fld id="{F7021451-1387-4CA6-816F-3879F97B5CBC}" type="slidenum">
+              <a:rPr lang="en-US"/>
+              <a:t>23</a:t>
+            </a:fld>
+            <a:endParaRPr lang="en-US"/>
+          </a:p>
+        </p:txBody>
+      </p:sp>
+    </p:spTree>
+    <p:extLst>
+      <p:ext uri="{BB962C8B-B14F-4D97-AF65-F5344CB8AC3E}">
+        <p14:creationId xmlns:p14="http://schemas.microsoft.com/office/powerpoint/2010/main" val="3256163557"/>
+      </p:ext>
+    </p:extLst>
+  </p:cSld>
+  <p:clrMapOvr>
+    <a:masterClrMapping/>
+  </p:clrMapOvr>
+</p:notes>
+</file>
+
+<file path=ppt/notesSlides/notesSlide24.xml><?xml version="1.0" encoding="utf-8"?>
+<p:notes xmlns:a="http://schemas.openxmlformats.org/drawingml/2006/main" xmlns:r="http://schemas.openxmlformats.org/officeDocument/2006/relationships" xmlns:p="http://schemas.openxmlformats.org/presentationml/2006/main">
+  <p:cSld>
+    <p:spTree>
+      <p:nvGrpSpPr>
+        <p:cNvPr id="1" name=""/>
+        <p:cNvGrpSpPr/>
+        <p:nvPr/>
+      </p:nvGrpSpPr>
+      <p:grpSpPr>
+        <a:xfrm>
+          <a:off x="0" y="0"/>
+          <a:ext cx="0" cy="0"/>
+          <a:chOff x="0" y="0"/>
+          <a:chExt cx="0" cy="0"/>
+        </a:xfrm>
+      </p:grpSpPr>
+      <p:sp>
+        <p:nvSpPr>
+          <p:cNvPr id="2" name="Slide Image Placeholder 1"/>
+          <p:cNvSpPr>
+            <a:spLocks noGrp="1" noRot="1" noChangeAspect="1"/>
+          </p:cNvSpPr>
+          <p:nvPr>
+            <p:ph type="sldImg"/>
+          </p:nvPr>
+        </p:nvSpPr>
+        <p:spPr/>
+      </p:sp>
+      <p:sp>
+        <p:nvSpPr>
+          <p:cNvPr id="3" name="Notes Placeholder 2"/>
+          <p:cNvSpPr>
+            <a:spLocks noGrp="1"/>
+          </p:cNvSpPr>
+          <p:nvPr>
+            <p:ph type="body" idx="1"/>
+          </p:nvPr>
+        </p:nvSpPr>
+        <p:spPr/>
+        <p:txBody>
+          <a:bodyPr/>
+          <a:lstStyle/>
+          <a:p>
+            <a:endParaRPr lang="en-US" dirty="0"/>
+          </a:p>
+        </p:txBody>
+      </p:sp>
+      <p:sp>
+        <p:nvSpPr>
+          <p:cNvPr id="4" name="Slide Number Placeholder 3"/>
+          <p:cNvSpPr>
+            <a:spLocks noGrp="1"/>
+          </p:cNvSpPr>
+          <p:nvPr>
+            <p:ph type="sldNum" sz="quarter" idx="10"/>
+          </p:nvPr>
+        </p:nvSpPr>
+        <p:spPr/>
+        <p:txBody>
+          <a:bodyPr/>
+          <a:lstStyle/>
+          <a:p>
+            <a:fld id="{F7021451-1387-4CA6-816F-3879F97B5CBC}" type="slidenum">
+              <a:rPr lang="en-US"/>
+              <a:t>24</a:t>
             </a:fld>
             <a:endParaRPr lang="en-US"/>
           </a:p>
@@ -12257,6 +12475,304 @@
 
 <file path=ppt/slides/slide18.xml><?xml version="1.0" encoding="utf-8"?>
 <p:sld xmlns:a="http://schemas.openxmlformats.org/drawingml/2006/main" xmlns:r="http://schemas.openxmlformats.org/officeDocument/2006/relationships" xmlns:p="http://schemas.openxmlformats.org/presentationml/2006/main">
+  <p:cSld>
+    <p:bg>
+      <p:bgPr>
+        <a:solidFill>
+          <a:srgbClr val="FFFFFF"/>
+        </a:solidFill>
+        <a:effectLst/>
+      </p:bgPr>
+    </p:bg>
+    <p:spTree>
+      <p:nvGrpSpPr>
+        <p:cNvPr id="1" name="">
+          <a:extLst>
+            <a:ext uri="{FF2B5EF4-FFF2-40B4-BE49-F238E27FC236}">
+              <a16:creationId xmlns:a16="http://schemas.microsoft.com/office/drawing/2014/main" id="{A025A92B-A61F-29E5-9666-CE632C20E8A2}"/>
+            </a:ext>
+          </a:extLst>
+        </p:cNvPr>
+        <p:cNvGrpSpPr/>
+        <p:nvPr/>
+      </p:nvGrpSpPr>
+      <p:grpSpPr>
+        <a:xfrm>
+          <a:off x="0" y="0"/>
+          <a:ext cx="0" cy="0"/>
+          <a:chOff x="0" y="0"/>
+          <a:chExt cx="0" cy="0"/>
+        </a:xfrm>
+      </p:grpSpPr>
+      <p:sp>
+        <p:nvSpPr>
+          <p:cNvPr id="2" name="Shape 0">
+            <a:extLst>
+              <a:ext uri="{FF2B5EF4-FFF2-40B4-BE49-F238E27FC236}">
+                <a16:creationId xmlns:a16="http://schemas.microsoft.com/office/drawing/2014/main" id="{16F5E208-D206-5F60-AAF8-0A2E7275E5DE}"/>
+              </a:ext>
+            </a:extLst>
+          </p:cNvPr>
+          <p:cNvSpPr/>
+          <p:nvPr/>
+        </p:nvSpPr>
+        <p:spPr>
+          <a:xfrm>
+            <a:off x="0" y="0"/>
+            <a:ext cx="9144000" cy="64008"/>
+          </a:xfrm>
+          <a:prstGeom prst="rect">
+            <a:avLst/>
+          </a:prstGeom>
+          <a:solidFill>
+            <a:srgbClr val="0D9488"/>
+          </a:solidFill>
+          <a:ln w="12700">
+            <a:solidFill>
+              <a:srgbClr val="0D9488"/>
+            </a:solidFill>
+            <a:prstDash val="solid"/>
+          </a:ln>
+        </p:spPr>
+        <p:txBody>
+          <a:bodyPr/>
+          <a:lstStyle/>
+          <a:p>
+            <a:endParaRPr lang="en-US"/>
+          </a:p>
+        </p:txBody>
+      </p:sp>
+      <p:sp>
+        <p:nvSpPr>
+          <p:cNvPr id="3" name="Text 1">
+            <a:extLst>
+              <a:ext uri="{FF2B5EF4-FFF2-40B4-BE49-F238E27FC236}">
+                <a16:creationId xmlns:a16="http://schemas.microsoft.com/office/drawing/2014/main" id="{52B4E538-403C-82EA-EC87-4A8B33DE2E0E}"/>
+              </a:ext>
+            </a:extLst>
+          </p:cNvPr>
+          <p:cNvSpPr/>
+          <p:nvPr/>
+        </p:nvSpPr>
+        <p:spPr>
+          <a:xfrm>
+            <a:off x="457200" y="182880"/>
+            <a:ext cx="8229600" cy="548640"/>
+          </a:xfrm>
+          <a:prstGeom prst="rect">
+            <a:avLst/>
+          </a:prstGeom>
+          <a:noFill/>
+          <a:ln/>
+        </p:spPr>
+        <p:txBody>
+          <a:bodyPr wrap="square" rtlCol="0" anchor="ctr"/>
+          <a:lstStyle/>
+          <a:p>
+            <a:pPr marL="0" indent="0">
+              <a:buNone/>
+            </a:pPr>
+            <a:r>
+              <a:rPr lang="en-US" sz="2600" b="1" dirty="0">
+                <a:solidFill>
+                  <a:srgbClr val="1B2A4A"/>
+                </a:solidFill>
+                <a:latin typeface="Cambria" pitchFamily="34" charset="0"/>
+                <a:ea typeface="Cambria" pitchFamily="34" charset="-122"/>
+                <a:cs typeface="Cambria" pitchFamily="34" charset="-120"/>
+              </a:rPr>
+              <a:t>Exploratory Data Analysis — Three Key Findings</a:t>
+            </a:r>
+            <a:endParaRPr lang="en-US" sz="2600" dirty="0"/>
+          </a:p>
+        </p:txBody>
+      </p:sp>
+      <p:pic>
+        <p:nvPicPr>
+          <p:cNvPr id="1026" name="Picture 2">
+            <a:extLst>
+              <a:ext uri="{FF2B5EF4-FFF2-40B4-BE49-F238E27FC236}">
+                <a16:creationId xmlns:a16="http://schemas.microsoft.com/office/drawing/2014/main" id="{230694FC-4CF0-1463-A03E-ED113547BED1}"/>
+              </a:ext>
+            </a:extLst>
+          </p:cNvPr>
+          <p:cNvPicPr>
+            <a:picLocks noChangeAspect="1" noChangeArrowheads="1"/>
+          </p:cNvPicPr>
+          <p:nvPr/>
+        </p:nvPicPr>
+        <p:blipFill>
+          <a:blip r:embed="rId3">
+            <a:extLst>
+              <a:ext uri="{28A0092B-C50C-407E-A947-70E740481C1C}">
+                <a14:useLocalDpi xmlns:a14="http://schemas.microsoft.com/office/drawing/2010/main" val="0"/>
+              </a:ext>
+            </a:extLst>
+          </a:blip>
+          <a:srcRect/>
+          <a:stretch>
+            <a:fillRect/>
+          </a:stretch>
+        </p:blipFill>
+        <p:spPr bwMode="auto">
+          <a:xfrm>
+            <a:off x="525114" y="2700660"/>
+            <a:ext cx="3122266" cy="2346588"/>
+          </a:xfrm>
+          <a:prstGeom prst="rect">
+            <a:avLst/>
+          </a:prstGeom>
+          <a:noFill/>
+          <a:extLst>
+            <a:ext uri="{909E8E84-426E-40DD-AFC4-6F175D3DCCD1}">
+              <a14:hiddenFill xmlns:a14="http://schemas.microsoft.com/office/drawing/2010/main">
+                <a:solidFill>
+                  <a:srgbClr val="FFFFFF"/>
+                </a:solidFill>
+              </a14:hiddenFill>
+            </a:ext>
+          </a:extLst>
+        </p:spPr>
+      </p:pic>
+      <p:pic>
+        <p:nvPicPr>
+          <p:cNvPr id="1028" name="Picture 4">
+            <a:extLst>
+              <a:ext uri="{FF2B5EF4-FFF2-40B4-BE49-F238E27FC236}">
+                <a16:creationId xmlns:a16="http://schemas.microsoft.com/office/drawing/2014/main" id="{8E6B3DE9-AA59-2504-90B3-4D47F16BCFB2}"/>
+              </a:ext>
+            </a:extLst>
+          </p:cNvPr>
+          <p:cNvPicPr>
+            <a:picLocks noChangeAspect="1" noChangeArrowheads="1"/>
+          </p:cNvPicPr>
+          <p:nvPr/>
+        </p:nvPicPr>
+        <p:blipFill>
+          <a:blip r:embed="rId4">
+            <a:extLst>
+              <a:ext uri="{28A0092B-C50C-407E-A947-70E740481C1C}">
+                <a14:useLocalDpi xmlns:a14="http://schemas.microsoft.com/office/drawing/2010/main" val="0"/>
+              </a:ext>
+            </a:extLst>
+          </a:blip>
+          <a:srcRect/>
+          <a:stretch>
+            <a:fillRect/>
+          </a:stretch>
+        </p:blipFill>
+        <p:spPr bwMode="auto">
+          <a:xfrm>
+            <a:off x="4299486" y="2745442"/>
+            <a:ext cx="3094650" cy="2301806"/>
+          </a:xfrm>
+          <a:prstGeom prst="rect">
+            <a:avLst/>
+          </a:prstGeom>
+          <a:noFill/>
+          <a:extLst>
+            <a:ext uri="{909E8E84-426E-40DD-AFC4-6F175D3DCCD1}">
+              <a14:hiddenFill xmlns:a14="http://schemas.microsoft.com/office/drawing/2010/main">
+                <a:solidFill>
+                  <a:srgbClr val="FFFFFF"/>
+                </a:solidFill>
+              </a14:hiddenFill>
+            </a:ext>
+          </a:extLst>
+        </p:spPr>
+      </p:pic>
+      <p:pic>
+        <p:nvPicPr>
+          <p:cNvPr id="1030" name="Picture 6">
+            <a:extLst>
+              <a:ext uri="{FF2B5EF4-FFF2-40B4-BE49-F238E27FC236}">
+                <a16:creationId xmlns:a16="http://schemas.microsoft.com/office/drawing/2014/main" id="{1D6BA0EA-06BF-4530-65F7-82418EB56530}"/>
+              </a:ext>
+            </a:extLst>
+          </p:cNvPr>
+          <p:cNvPicPr>
+            <a:picLocks noChangeAspect="1" noChangeArrowheads="1"/>
+          </p:cNvPicPr>
+          <p:nvPr/>
+        </p:nvPicPr>
+        <p:blipFill>
+          <a:blip r:embed="rId5">
+            <a:extLst>
+              <a:ext uri="{28A0092B-C50C-407E-A947-70E740481C1C}">
+                <a14:useLocalDpi xmlns:a14="http://schemas.microsoft.com/office/drawing/2010/main" val="0"/>
+              </a:ext>
+            </a:extLst>
+          </a:blip>
+          <a:srcRect/>
+          <a:stretch>
+            <a:fillRect/>
+          </a:stretch>
+        </p:blipFill>
+        <p:spPr bwMode="auto">
+          <a:xfrm>
+            <a:off x="5992699" y="734238"/>
+            <a:ext cx="2694101" cy="1924358"/>
+          </a:xfrm>
+          <a:prstGeom prst="rect">
+            <a:avLst/>
+          </a:prstGeom>
+          <a:noFill/>
+          <a:extLst>
+            <a:ext uri="{909E8E84-426E-40DD-AFC4-6F175D3DCCD1}">
+              <a14:hiddenFill xmlns:a14="http://schemas.microsoft.com/office/drawing/2010/main">
+                <a:solidFill>
+                  <a:srgbClr val="FFFFFF"/>
+                </a:solidFill>
+              </a14:hiddenFill>
+            </a:ext>
+          </a:extLst>
+        </p:spPr>
+      </p:pic>
+      <p:pic>
+        <p:nvPicPr>
+          <p:cNvPr id="31" name="Picture 30">
+            <a:extLst>
+              <a:ext uri="{FF2B5EF4-FFF2-40B4-BE49-F238E27FC236}">
+                <a16:creationId xmlns:a16="http://schemas.microsoft.com/office/drawing/2014/main" id="{26DEFAC6-E8C2-F16F-A6A1-310BE8E4E2B7}"/>
+              </a:ext>
+            </a:extLst>
+          </p:cNvPr>
+          <p:cNvPicPr>
+            <a:picLocks noChangeAspect="1"/>
+          </p:cNvPicPr>
+          <p:nvPr/>
+        </p:nvPicPr>
+        <p:blipFill>
+          <a:blip r:embed="rId6"/>
+          <a:stretch>
+            <a:fillRect/>
+          </a:stretch>
+        </p:blipFill>
+        <p:spPr>
+          <a:xfrm>
+            <a:off x="26434" y="826261"/>
+            <a:ext cx="5165558" cy="1745489"/>
+          </a:xfrm>
+          <a:prstGeom prst="rect">
+            <a:avLst/>
+          </a:prstGeom>
+        </p:spPr>
+      </p:pic>
+    </p:spTree>
+    <p:extLst>
+      <p:ext uri="{BB962C8B-B14F-4D97-AF65-F5344CB8AC3E}">
+        <p14:creationId xmlns:p14="http://schemas.microsoft.com/office/powerpoint/2010/main" val="3142093288"/>
+      </p:ext>
+    </p:extLst>
+  </p:cSld>
+  <p:clrMapOvr>
+    <a:masterClrMapping/>
+  </p:clrMapOvr>
+</p:sld>
+</file>
+
+<file path=ppt/slides/slide19.xml><?xml version="1.0" encoding="utf-8"?>
+<p:sld xmlns:a="http://schemas.openxmlformats.org/drawingml/2006/main" xmlns:r="http://schemas.openxmlformats.org/officeDocument/2006/relationships" xmlns:p="http://schemas.openxmlformats.org/presentationml/2006/main">
   <p:cSld name="Slide 18">
     <p:bg>
       <p:bgPr>
@@ -13581,2421 +14097,6 @@
                 <a:cs typeface="Consolas" pitchFamily="34" charset="-120"/>
               </a:rPr>
               <a:t>Final input:   X = df[["time_index",  "billing_rate",  "efficiency",  "areas"]]</a:t>
-            </a:r>
-            <a:endParaRPr lang="en-US" sz="1150" dirty="0"/>
-          </a:p>
-        </p:txBody>
-      </p:sp>
-    </p:spTree>
-  </p:cSld>
-  <p:clrMapOvr>
-    <a:masterClrMapping/>
-  </p:clrMapOvr>
-</p:sld>
-</file>
-
-<file path=ppt/slides/slide19.xml><?xml version="1.0" encoding="utf-8"?>
-<p:sld xmlns:a="http://schemas.openxmlformats.org/drawingml/2006/main" xmlns:r="http://schemas.openxmlformats.org/officeDocument/2006/relationships" xmlns:p="http://schemas.openxmlformats.org/presentationml/2006/main">
-  <p:cSld name="Slide 19">
-    <p:bg>
-      <p:bgPr>
-        <a:solidFill>
-          <a:srgbClr val="FFFFFF"/>
-        </a:solidFill>
-        <a:effectLst/>
-      </p:bgPr>
-    </p:bg>
-    <p:spTree>
-      <p:nvGrpSpPr>
-        <p:cNvPr id="1" name=""/>
-        <p:cNvGrpSpPr/>
-        <p:nvPr/>
-      </p:nvGrpSpPr>
-      <p:grpSpPr>
-        <a:xfrm>
-          <a:off x="0" y="0"/>
-          <a:ext cx="0" cy="0"/>
-          <a:chOff x="0" y="0"/>
-          <a:chExt cx="0" cy="0"/>
-        </a:xfrm>
-      </p:grpSpPr>
-      <p:sp>
-        <p:nvSpPr>
-          <p:cNvPr id="2" name="Shape 0"/>
-          <p:cNvSpPr/>
-          <p:nvPr/>
-        </p:nvSpPr>
-        <p:spPr>
-          <a:xfrm>
-            <a:off x="0" y="0"/>
-            <a:ext cx="9144000" cy="64008"/>
-          </a:xfrm>
-          <a:prstGeom prst="rect">
-            <a:avLst/>
-          </a:prstGeom>
-          <a:solidFill>
-            <a:srgbClr val="0D9488"/>
-          </a:solidFill>
-          <a:ln w="12700">
-            <a:solidFill>
-              <a:srgbClr val="0D9488"/>
-            </a:solidFill>
-            <a:prstDash val="solid"/>
-          </a:ln>
-        </p:spPr>
-        <p:txBody>
-          <a:bodyPr/>
-          <a:lstStyle/>
-          <a:p>
-            <a:endParaRPr lang="en-US"/>
-          </a:p>
-        </p:txBody>
-      </p:sp>
-      <p:sp>
-        <p:nvSpPr>
-          <p:cNvPr id="3" name="Text 1"/>
-          <p:cNvSpPr/>
-          <p:nvPr/>
-        </p:nvSpPr>
-        <p:spPr>
-          <a:xfrm>
-            <a:off x="457200" y="182880"/>
-            <a:ext cx="8229600" cy="548640"/>
-          </a:xfrm>
-          <a:prstGeom prst="rect">
-            <a:avLst/>
-          </a:prstGeom>
-          <a:noFill/>
-          <a:ln/>
-        </p:spPr>
-        <p:txBody>
-          <a:bodyPr wrap="square" rtlCol="0" anchor="ctr"/>
-          <a:lstStyle/>
-          <a:p>
-            <a:pPr marL="0" indent="0">
-              <a:buNone/>
-            </a:pPr>
-            <a:r>
-              <a:rPr lang="en-US" sz="2400" b="1" dirty="0">
-                <a:solidFill>
-                  <a:srgbClr val="1B2A4A"/>
-                </a:solidFill>
-                <a:latin typeface="Cambria" pitchFamily="34" charset="0"/>
-                <a:ea typeface="Cambria" pitchFamily="34" charset="-122"/>
-                <a:cs typeface="Cambria" pitchFamily="34" charset="-120"/>
-              </a:rPr>
-              <a:t>Data Distribution — January 2019 Sample  (n = 7,105)</a:t>
-            </a:r>
-            <a:endParaRPr lang="en-US" sz="2400" dirty="0"/>
-          </a:p>
-        </p:txBody>
-      </p:sp>
-      <p:sp>
-        <p:nvSpPr>
-          <p:cNvPr id="4" name="Shape 2"/>
-          <p:cNvSpPr/>
-          <p:nvPr/>
-        </p:nvSpPr>
-        <p:spPr>
-          <a:xfrm>
-            <a:off x="365760" y="841248"/>
-            <a:ext cx="1417320" cy="347472"/>
-          </a:xfrm>
-          <a:prstGeom prst="rect">
-            <a:avLst/>
-          </a:prstGeom>
-          <a:solidFill>
-            <a:srgbClr val="1B2A4A"/>
-          </a:solidFill>
-          <a:ln w="12700">
-            <a:solidFill>
-              <a:srgbClr val="1B2A4A"/>
-            </a:solidFill>
-            <a:prstDash val="solid"/>
-          </a:ln>
-        </p:spPr>
-        <p:txBody>
-          <a:bodyPr/>
-          <a:lstStyle/>
-          <a:p>
-            <a:endParaRPr lang="en-US"/>
-          </a:p>
-        </p:txBody>
-      </p:sp>
-      <p:sp>
-        <p:nvSpPr>
-          <p:cNvPr id="5" name="Text 3"/>
-          <p:cNvSpPr/>
-          <p:nvPr/>
-        </p:nvSpPr>
-        <p:spPr>
-          <a:xfrm>
-            <a:off x="420624" y="859536"/>
-            <a:ext cx="1371600" cy="292608"/>
-          </a:xfrm>
-          <a:prstGeom prst="rect">
-            <a:avLst/>
-          </a:prstGeom>
-          <a:noFill/>
-          <a:ln/>
-        </p:spPr>
-        <p:txBody>
-          <a:bodyPr wrap="square" rtlCol="0" anchor="ctr"/>
-          <a:lstStyle/>
-          <a:p>
-            <a:pPr marL="0" indent="0">
-              <a:buNone/>
-            </a:pPr>
-            <a:r>
-              <a:rPr lang="en-US" sz="1150" b="1" dirty="0">
-                <a:solidFill>
-                  <a:srgbClr val="FFFFFF"/>
-                </a:solidFill>
-                <a:latin typeface="Calibri" pitchFamily="34" charset="0"/>
-                <a:ea typeface="Calibri" pitchFamily="34" charset="-122"/>
-                <a:cs typeface="Calibri" pitchFamily="34" charset="-120"/>
-              </a:rPr>
-              <a:t>Feature</a:t>
-            </a:r>
-            <a:endParaRPr lang="en-US" sz="1150" dirty="0"/>
-          </a:p>
-        </p:txBody>
-      </p:sp>
-      <p:sp>
-        <p:nvSpPr>
-          <p:cNvPr id="6" name="Shape 4"/>
-          <p:cNvSpPr/>
-          <p:nvPr/>
-        </p:nvSpPr>
-        <p:spPr>
-          <a:xfrm>
-            <a:off x="1874520" y="841248"/>
-            <a:ext cx="1051560" cy="347472"/>
-          </a:xfrm>
-          <a:prstGeom prst="rect">
-            <a:avLst/>
-          </a:prstGeom>
-          <a:solidFill>
-            <a:srgbClr val="1B2A4A"/>
-          </a:solidFill>
-          <a:ln w="12700">
-            <a:solidFill>
-              <a:srgbClr val="1B2A4A"/>
-            </a:solidFill>
-            <a:prstDash val="solid"/>
-          </a:ln>
-        </p:spPr>
-        <p:txBody>
-          <a:bodyPr/>
-          <a:lstStyle/>
-          <a:p>
-            <a:endParaRPr lang="en-US"/>
-          </a:p>
-        </p:txBody>
-      </p:sp>
-      <p:sp>
-        <p:nvSpPr>
-          <p:cNvPr id="7" name="Text 5"/>
-          <p:cNvSpPr/>
-          <p:nvPr/>
-        </p:nvSpPr>
-        <p:spPr>
-          <a:xfrm>
-            <a:off x="1929384" y="859536"/>
-            <a:ext cx="1005840" cy="292608"/>
-          </a:xfrm>
-          <a:prstGeom prst="rect">
-            <a:avLst/>
-          </a:prstGeom>
-          <a:noFill/>
-          <a:ln/>
-        </p:spPr>
-        <p:txBody>
-          <a:bodyPr wrap="square" rtlCol="0" anchor="ctr"/>
-          <a:lstStyle/>
-          <a:p>
-            <a:pPr marL="0" indent="0">
-              <a:buNone/>
-            </a:pPr>
-            <a:r>
-              <a:rPr lang="en-US" sz="1150" b="1" dirty="0">
-                <a:solidFill>
-                  <a:srgbClr val="FFFFFF"/>
-                </a:solidFill>
-                <a:latin typeface="Calibri" pitchFamily="34" charset="0"/>
-                <a:ea typeface="Calibri" pitchFamily="34" charset="-122"/>
-                <a:cs typeface="Calibri" pitchFamily="34" charset="-120"/>
-              </a:rPr>
-              <a:t>Mean</a:t>
-            </a:r>
-            <a:endParaRPr lang="en-US" sz="1150" dirty="0"/>
-          </a:p>
-        </p:txBody>
-      </p:sp>
-      <p:sp>
-        <p:nvSpPr>
-          <p:cNvPr id="8" name="Shape 6"/>
-          <p:cNvSpPr/>
-          <p:nvPr/>
-        </p:nvSpPr>
-        <p:spPr>
-          <a:xfrm>
-            <a:off x="3017520" y="841248"/>
-            <a:ext cx="868680" cy="347472"/>
-          </a:xfrm>
-          <a:prstGeom prst="rect">
-            <a:avLst/>
-          </a:prstGeom>
-          <a:solidFill>
-            <a:srgbClr val="1B2A4A"/>
-          </a:solidFill>
-          <a:ln w="12700">
-            <a:solidFill>
-              <a:srgbClr val="1B2A4A"/>
-            </a:solidFill>
-            <a:prstDash val="solid"/>
-          </a:ln>
-        </p:spPr>
-        <p:txBody>
-          <a:bodyPr/>
-          <a:lstStyle/>
-          <a:p>
-            <a:endParaRPr lang="en-US"/>
-          </a:p>
-        </p:txBody>
-      </p:sp>
-      <p:sp>
-        <p:nvSpPr>
-          <p:cNvPr id="9" name="Text 7"/>
-          <p:cNvSpPr/>
-          <p:nvPr/>
-        </p:nvSpPr>
-        <p:spPr>
-          <a:xfrm>
-            <a:off x="3072384" y="859536"/>
-            <a:ext cx="822960" cy="292608"/>
-          </a:xfrm>
-          <a:prstGeom prst="rect">
-            <a:avLst/>
-          </a:prstGeom>
-          <a:noFill/>
-          <a:ln/>
-        </p:spPr>
-        <p:txBody>
-          <a:bodyPr wrap="square" rtlCol="0" anchor="ctr"/>
-          <a:lstStyle/>
-          <a:p>
-            <a:pPr marL="0" indent="0">
-              <a:buNone/>
-            </a:pPr>
-            <a:r>
-              <a:rPr lang="en-US" sz="1150" b="1" dirty="0">
-                <a:solidFill>
-                  <a:srgbClr val="FFFFFF"/>
-                </a:solidFill>
-                <a:latin typeface="Calibri" pitchFamily="34" charset="0"/>
-                <a:ea typeface="Calibri" pitchFamily="34" charset="-122"/>
-                <a:cs typeface="Calibri" pitchFamily="34" charset="-120"/>
-              </a:rPr>
-              <a:t>Std</a:t>
-            </a:r>
-            <a:endParaRPr lang="en-US" sz="1150" dirty="0"/>
-          </a:p>
-        </p:txBody>
-      </p:sp>
-      <p:sp>
-        <p:nvSpPr>
-          <p:cNvPr id="10" name="Shape 8"/>
-          <p:cNvSpPr/>
-          <p:nvPr/>
-        </p:nvSpPr>
-        <p:spPr>
-          <a:xfrm>
-            <a:off x="3977640" y="841248"/>
-            <a:ext cx="640080" cy="347472"/>
-          </a:xfrm>
-          <a:prstGeom prst="rect">
-            <a:avLst/>
-          </a:prstGeom>
-          <a:solidFill>
-            <a:srgbClr val="1B2A4A"/>
-          </a:solidFill>
-          <a:ln w="12700">
-            <a:solidFill>
-              <a:srgbClr val="1B2A4A"/>
-            </a:solidFill>
-            <a:prstDash val="solid"/>
-          </a:ln>
-        </p:spPr>
-        <p:txBody>
-          <a:bodyPr/>
-          <a:lstStyle/>
-          <a:p>
-            <a:endParaRPr lang="en-US"/>
-          </a:p>
-        </p:txBody>
-      </p:sp>
-      <p:sp>
-        <p:nvSpPr>
-          <p:cNvPr id="11" name="Text 9"/>
-          <p:cNvSpPr/>
-          <p:nvPr/>
-        </p:nvSpPr>
-        <p:spPr>
-          <a:xfrm>
-            <a:off x="4032504" y="859536"/>
-            <a:ext cx="594360" cy="292608"/>
-          </a:xfrm>
-          <a:prstGeom prst="rect">
-            <a:avLst/>
-          </a:prstGeom>
-          <a:noFill/>
-          <a:ln/>
-        </p:spPr>
-        <p:txBody>
-          <a:bodyPr wrap="square" rtlCol="0" anchor="ctr"/>
-          <a:lstStyle/>
-          <a:p>
-            <a:pPr marL="0" indent="0">
-              <a:buNone/>
-            </a:pPr>
-            <a:r>
-              <a:rPr lang="en-US" sz="1150" b="1" dirty="0">
-                <a:solidFill>
-                  <a:srgbClr val="FFFFFF"/>
-                </a:solidFill>
-                <a:latin typeface="Calibri" pitchFamily="34" charset="0"/>
-                <a:ea typeface="Calibri" pitchFamily="34" charset="-122"/>
-                <a:cs typeface="Calibri" pitchFamily="34" charset="-120"/>
-              </a:rPr>
-              <a:t>Skew</a:t>
-            </a:r>
-            <a:endParaRPr lang="en-US" sz="1150" dirty="0"/>
-          </a:p>
-        </p:txBody>
-      </p:sp>
-      <p:sp>
-        <p:nvSpPr>
-          <p:cNvPr id="12" name="Shape 10"/>
-          <p:cNvSpPr/>
-          <p:nvPr/>
-        </p:nvSpPr>
-        <p:spPr>
-          <a:xfrm>
-            <a:off x="4709160" y="841248"/>
-            <a:ext cx="4114800" cy="347472"/>
-          </a:xfrm>
-          <a:prstGeom prst="rect">
-            <a:avLst/>
-          </a:prstGeom>
-          <a:solidFill>
-            <a:srgbClr val="1B2A4A"/>
-          </a:solidFill>
-          <a:ln w="12700">
-            <a:solidFill>
-              <a:srgbClr val="1B2A4A"/>
-            </a:solidFill>
-            <a:prstDash val="solid"/>
-          </a:ln>
-        </p:spPr>
-        <p:txBody>
-          <a:bodyPr/>
-          <a:lstStyle/>
-          <a:p>
-            <a:endParaRPr lang="en-US"/>
-          </a:p>
-        </p:txBody>
-      </p:sp>
-      <p:sp>
-        <p:nvSpPr>
-          <p:cNvPr id="13" name="Text 11"/>
-          <p:cNvSpPr/>
-          <p:nvPr/>
-        </p:nvSpPr>
-        <p:spPr>
-          <a:xfrm>
-            <a:off x="4764024" y="859536"/>
-            <a:ext cx="4069080" cy="292608"/>
-          </a:xfrm>
-          <a:prstGeom prst="rect">
-            <a:avLst/>
-          </a:prstGeom>
-          <a:noFill/>
-          <a:ln/>
-        </p:spPr>
-        <p:txBody>
-          <a:bodyPr wrap="square" rtlCol="0" anchor="ctr"/>
-          <a:lstStyle/>
-          <a:p>
-            <a:pPr marL="0" indent="0">
-              <a:buNone/>
-            </a:pPr>
-            <a:r>
-              <a:rPr lang="en-US" sz="1150" b="1" dirty="0">
-                <a:solidFill>
-                  <a:srgbClr val="FFFFFF"/>
-                </a:solidFill>
-                <a:latin typeface="Calibri" pitchFamily="34" charset="0"/>
-                <a:ea typeface="Calibri" pitchFamily="34" charset="-122"/>
-                <a:cs typeface="Calibri" pitchFamily="34" charset="-120"/>
-              </a:rPr>
-              <a:t>Interpretation</a:t>
-            </a:r>
-            <a:endParaRPr lang="en-US" sz="1150" dirty="0"/>
-          </a:p>
-        </p:txBody>
-      </p:sp>
-      <p:sp>
-        <p:nvSpPr>
-          <p:cNvPr id="14" name="Shape 12"/>
-          <p:cNvSpPr/>
-          <p:nvPr/>
-        </p:nvSpPr>
-        <p:spPr>
-          <a:xfrm>
-            <a:off x="365760" y="1234440"/>
-            <a:ext cx="1417320" cy="429768"/>
-          </a:xfrm>
-          <a:prstGeom prst="rect">
-            <a:avLst/>
-          </a:prstGeom>
-          <a:solidFill>
-            <a:srgbClr val="F8FAFC"/>
-          </a:solidFill>
-          <a:ln w="6350">
-            <a:solidFill>
-              <a:srgbClr val="E2E8F0"/>
-            </a:solidFill>
-            <a:prstDash val="solid"/>
-          </a:ln>
-        </p:spPr>
-        <p:txBody>
-          <a:bodyPr/>
-          <a:lstStyle/>
-          <a:p>
-            <a:endParaRPr lang="en-US"/>
-          </a:p>
-        </p:txBody>
-      </p:sp>
-      <p:sp>
-        <p:nvSpPr>
-          <p:cNvPr id="15" name="Text 13"/>
-          <p:cNvSpPr/>
-          <p:nvPr/>
-        </p:nvSpPr>
-        <p:spPr>
-          <a:xfrm>
-            <a:off x="420624" y="1280160"/>
-            <a:ext cx="1371600" cy="329184"/>
-          </a:xfrm>
-          <a:prstGeom prst="rect">
-            <a:avLst/>
-          </a:prstGeom>
-          <a:noFill/>
-          <a:ln/>
-        </p:spPr>
-        <p:txBody>
-          <a:bodyPr wrap="square" rtlCol="0" anchor="ctr"/>
-          <a:lstStyle/>
-          <a:p>
-            <a:pPr marL="0" indent="0">
-              <a:buNone/>
-            </a:pPr>
-            <a:r>
-              <a:rPr lang="en-US" sz="1100" b="1" dirty="0">
-                <a:solidFill>
-                  <a:srgbClr val="1B2A4A"/>
-                </a:solidFill>
-                <a:latin typeface="Consolas" pitchFamily="34" charset="0"/>
-                <a:ea typeface="Consolas" pitchFamily="34" charset="-122"/>
-                <a:cs typeface="Consolas" pitchFamily="34" charset="-120"/>
-              </a:rPr>
-              <a:t>Units</a:t>
-            </a:r>
-            <a:endParaRPr lang="en-US" sz="1100" dirty="0"/>
-          </a:p>
-        </p:txBody>
-      </p:sp>
-      <p:sp>
-        <p:nvSpPr>
-          <p:cNvPr id="16" name="Shape 14"/>
-          <p:cNvSpPr/>
-          <p:nvPr/>
-        </p:nvSpPr>
-        <p:spPr>
-          <a:xfrm>
-            <a:off x="1874520" y="1234440"/>
-            <a:ext cx="1051560" cy="429768"/>
-          </a:xfrm>
-          <a:prstGeom prst="rect">
-            <a:avLst/>
-          </a:prstGeom>
-          <a:solidFill>
-            <a:srgbClr val="F8FAFC"/>
-          </a:solidFill>
-          <a:ln w="6350">
-            <a:solidFill>
-              <a:srgbClr val="E2E8F0"/>
-            </a:solidFill>
-            <a:prstDash val="solid"/>
-          </a:ln>
-        </p:spPr>
-        <p:txBody>
-          <a:bodyPr/>
-          <a:lstStyle/>
-          <a:p>
-            <a:endParaRPr lang="en-US"/>
-          </a:p>
-        </p:txBody>
-      </p:sp>
-      <p:sp>
-        <p:nvSpPr>
-          <p:cNvPr id="17" name="Text 15"/>
-          <p:cNvSpPr/>
-          <p:nvPr/>
-        </p:nvSpPr>
-        <p:spPr>
-          <a:xfrm>
-            <a:off x="1929384" y="1280160"/>
-            <a:ext cx="1005840" cy="329184"/>
-          </a:xfrm>
-          <a:prstGeom prst="rect">
-            <a:avLst/>
-          </a:prstGeom>
-          <a:noFill/>
-          <a:ln/>
-        </p:spPr>
-        <p:txBody>
-          <a:bodyPr wrap="square" rtlCol="0" anchor="ctr"/>
-          <a:lstStyle/>
-          <a:p>
-            <a:pPr marL="0" indent="0">
-              <a:buNone/>
-            </a:pPr>
-            <a:r>
-              <a:rPr lang="en-US" sz="1100" dirty="0">
-                <a:solidFill>
-                  <a:srgbClr val="475569"/>
-                </a:solidFill>
-                <a:latin typeface="Calibri" pitchFamily="34" charset="0"/>
-                <a:ea typeface="Calibri" pitchFamily="34" charset="-122"/>
-                <a:cs typeface="Calibri" pitchFamily="34" charset="-120"/>
-              </a:rPr>
-              <a:t>561.88</a:t>
-            </a:r>
-            <a:endParaRPr lang="en-US" sz="1100" dirty="0"/>
-          </a:p>
-        </p:txBody>
-      </p:sp>
-      <p:sp>
-        <p:nvSpPr>
-          <p:cNvPr id="18" name="Shape 16"/>
-          <p:cNvSpPr/>
-          <p:nvPr/>
-        </p:nvSpPr>
-        <p:spPr>
-          <a:xfrm>
-            <a:off x="3017520" y="1234440"/>
-            <a:ext cx="868680" cy="429768"/>
-          </a:xfrm>
-          <a:prstGeom prst="rect">
-            <a:avLst/>
-          </a:prstGeom>
-          <a:solidFill>
-            <a:srgbClr val="F8FAFC"/>
-          </a:solidFill>
-          <a:ln w="6350">
-            <a:solidFill>
-              <a:srgbClr val="E2E8F0"/>
-            </a:solidFill>
-            <a:prstDash val="solid"/>
-          </a:ln>
-        </p:spPr>
-        <p:txBody>
-          <a:bodyPr/>
-          <a:lstStyle/>
-          <a:p>
-            <a:endParaRPr lang="en-US"/>
-          </a:p>
-        </p:txBody>
-      </p:sp>
-      <p:sp>
-        <p:nvSpPr>
-          <p:cNvPr id="19" name="Text 17"/>
-          <p:cNvSpPr/>
-          <p:nvPr/>
-        </p:nvSpPr>
-        <p:spPr>
-          <a:xfrm>
-            <a:off x="3072384" y="1280160"/>
-            <a:ext cx="822960" cy="329184"/>
-          </a:xfrm>
-          <a:prstGeom prst="rect">
-            <a:avLst/>
-          </a:prstGeom>
-          <a:noFill/>
-          <a:ln/>
-        </p:spPr>
-        <p:txBody>
-          <a:bodyPr wrap="square" rtlCol="0" anchor="ctr"/>
-          <a:lstStyle/>
-          <a:p>
-            <a:pPr marL="0" indent="0">
-              <a:buNone/>
-            </a:pPr>
-            <a:r>
-              <a:rPr lang="en-US" sz="1100" dirty="0">
-                <a:solidFill>
-                  <a:srgbClr val="475569"/>
-                </a:solidFill>
-                <a:latin typeface="Calibri" pitchFamily="34" charset="0"/>
-                <a:ea typeface="Calibri" pitchFamily="34" charset="-122"/>
-                <a:cs typeface="Calibri" pitchFamily="34" charset="-120"/>
-              </a:rPr>
-              <a:t>2396</a:t>
-            </a:r>
-            <a:endParaRPr lang="en-US" sz="1100" dirty="0"/>
-          </a:p>
-        </p:txBody>
-      </p:sp>
-      <p:sp>
-        <p:nvSpPr>
-          <p:cNvPr id="20" name="Shape 18"/>
-          <p:cNvSpPr/>
-          <p:nvPr/>
-        </p:nvSpPr>
-        <p:spPr>
-          <a:xfrm>
-            <a:off x="3977640" y="1234440"/>
-            <a:ext cx="640080" cy="429768"/>
-          </a:xfrm>
-          <a:prstGeom prst="rect">
-            <a:avLst/>
-          </a:prstGeom>
-          <a:solidFill>
-            <a:srgbClr val="F8FAFC"/>
-          </a:solidFill>
-          <a:ln w="6350">
-            <a:solidFill>
-              <a:srgbClr val="E2E8F0"/>
-            </a:solidFill>
-            <a:prstDash val="solid"/>
-          </a:ln>
-        </p:spPr>
-        <p:txBody>
-          <a:bodyPr/>
-          <a:lstStyle/>
-          <a:p>
-            <a:endParaRPr lang="en-US"/>
-          </a:p>
-        </p:txBody>
-      </p:sp>
-      <p:sp>
-        <p:nvSpPr>
-          <p:cNvPr id="21" name="Text 19"/>
-          <p:cNvSpPr/>
-          <p:nvPr/>
-        </p:nvSpPr>
-        <p:spPr>
-          <a:xfrm>
-            <a:off x="4032504" y="1280160"/>
-            <a:ext cx="594360" cy="329184"/>
-          </a:xfrm>
-          <a:prstGeom prst="rect">
-            <a:avLst/>
-          </a:prstGeom>
-          <a:noFill/>
-          <a:ln/>
-        </p:spPr>
-        <p:txBody>
-          <a:bodyPr wrap="square" rtlCol="0" anchor="ctr"/>
-          <a:lstStyle/>
-          <a:p>
-            <a:pPr marL="0" indent="0">
-              <a:buNone/>
-            </a:pPr>
-            <a:r>
-              <a:rPr lang="en-US" sz="1100" dirty="0">
-                <a:solidFill>
-                  <a:srgbClr val="475569"/>
-                </a:solidFill>
-                <a:latin typeface="Calibri" pitchFamily="34" charset="0"/>
-                <a:ea typeface="Calibri" pitchFamily="34" charset="-122"/>
-                <a:cs typeface="Calibri" pitchFamily="34" charset="-120"/>
-              </a:rPr>
-              <a:t>9.41</a:t>
-            </a:r>
-            <a:endParaRPr lang="en-US" sz="1100" dirty="0"/>
-          </a:p>
-        </p:txBody>
-      </p:sp>
-      <p:sp>
-        <p:nvSpPr>
-          <p:cNvPr id="22" name="Shape 20"/>
-          <p:cNvSpPr/>
-          <p:nvPr/>
-        </p:nvSpPr>
-        <p:spPr>
-          <a:xfrm>
-            <a:off x="4709160" y="1234440"/>
-            <a:ext cx="4114800" cy="429768"/>
-          </a:xfrm>
-          <a:prstGeom prst="rect">
-            <a:avLst/>
-          </a:prstGeom>
-          <a:solidFill>
-            <a:srgbClr val="F8FAFC"/>
-          </a:solidFill>
-          <a:ln w="6350">
-            <a:solidFill>
-              <a:srgbClr val="E2E8F0"/>
-            </a:solidFill>
-            <a:prstDash val="solid"/>
-          </a:ln>
-        </p:spPr>
-        <p:txBody>
-          <a:bodyPr/>
-          <a:lstStyle/>
-          <a:p>
-            <a:endParaRPr lang="en-US"/>
-          </a:p>
-        </p:txBody>
-      </p:sp>
-      <p:sp>
-        <p:nvSpPr>
-          <p:cNvPr id="23" name="Text 21"/>
-          <p:cNvSpPr/>
-          <p:nvPr/>
-        </p:nvSpPr>
-        <p:spPr>
-          <a:xfrm>
-            <a:off x="4764024" y="1280160"/>
-            <a:ext cx="4069080" cy="329184"/>
-          </a:xfrm>
-          <a:prstGeom prst="rect">
-            <a:avLst/>
-          </a:prstGeom>
-          <a:noFill/>
-          <a:ln/>
-        </p:spPr>
-        <p:txBody>
-          <a:bodyPr wrap="square" rtlCol="0" anchor="ctr"/>
-          <a:lstStyle/>
-          <a:p>
-            <a:pPr marL="0" indent="0">
-              <a:buNone/>
-            </a:pPr>
-            <a:r>
-              <a:rPr lang="en-US" sz="1100" dirty="0">
-                <a:solidFill>
-                  <a:srgbClr val="475569"/>
-                </a:solidFill>
-                <a:latin typeface="Calibri" pitchFamily="34" charset="0"/>
-                <a:ea typeface="Calibri" pitchFamily="34" charset="-122"/>
-                <a:cs typeface="Calibri" pitchFamily="34" charset="-120"/>
-              </a:rPr>
-              <a:t>Heavy right skew — extreme high-consumption outliers present</a:t>
-            </a:r>
-            <a:endParaRPr lang="en-US" sz="1100" dirty="0"/>
-          </a:p>
-        </p:txBody>
-      </p:sp>
-      <p:sp>
-        <p:nvSpPr>
-          <p:cNvPr id="24" name="Shape 22"/>
-          <p:cNvSpPr/>
-          <p:nvPr/>
-        </p:nvSpPr>
-        <p:spPr>
-          <a:xfrm>
-            <a:off x="365760" y="1709928"/>
-            <a:ext cx="1417320" cy="429768"/>
-          </a:xfrm>
-          <a:prstGeom prst="rect">
-            <a:avLst/>
-          </a:prstGeom>
-          <a:solidFill>
-            <a:srgbClr val="FFFFFF"/>
-          </a:solidFill>
-          <a:ln w="6350">
-            <a:solidFill>
-              <a:srgbClr val="E2E8F0"/>
-            </a:solidFill>
-            <a:prstDash val="solid"/>
-          </a:ln>
-        </p:spPr>
-        <p:txBody>
-          <a:bodyPr/>
-          <a:lstStyle/>
-          <a:p>
-            <a:endParaRPr lang="en-US"/>
-          </a:p>
-        </p:txBody>
-      </p:sp>
-      <p:sp>
-        <p:nvSpPr>
-          <p:cNvPr id="25" name="Text 23"/>
-          <p:cNvSpPr/>
-          <p:nvPr/>
-        </p:nvSpPr>
-        <p:spPr>
-          <a:xfrm>
-            <a:off x="420624" y="1755648"/>
-            <a:ext cx="1371600" cy="329184"/>
-          </a:xfrm>
-          <a:prstGeom prst="rect">
-            <a:avLst/>
-          </a:prstGeom>
-          <a:noFill/>
-          <a:ln/>
-        </p:spPr>
-        <p:txBody>
-          <a:bodyPr wrap="square" rtlCol="0" anchor="ctr"/>
-          <a:lstStyle/>
-          <a:p>
-            <a:pPr marL="0" indent="0">
-              <a:buNone/>
-            </a:pPr>
-            <a:r>
-              <a:rPr lang="en-US" sz="1100" b="1" dirty="0">
-                <a:solidFill>
-                  <a:srgbClr val="1B2A4A"/>
-                </a:solidFill>
-                <a:latin typeface="Consolas" pitchFamily="34" charset="0"/>
-                <a:ea typeface="Consolas" pitchFamily="34" charset="-122"/>
-                <a:cs typeface="Consolas" pitchFamily="34" charset="-120"/>
-              </a:rPr>
-              <a:t>Load</a:t>
-            </a:r>
-            <a:endParaRPr lang="en-US" sz="1100" dirty="0"/>
-          </a:p>
-        </p:txBody>
-      </p:sp>
-      <p:sp>
-        <p:nvSpPr>
-          <p:cNvPr id="26" name="Shape 24"/>
-          <p:cNvSpPr/>
-          <p:nvPr/>
-        </p:nvSpPr>
-        <p:spPr>
-          <a:xfrm>
-            <a:off x="1874520" y="1709928"/>
-            <a:ext cx="1051560" cy="429768"/>
-          </a:xfrm>
-          <a:prstGeom prst="rect">
-            <a:avLst/>
-          </a:prstGeom>
-          <a:solidFill>
-            <a:srgbClr val="FFFFFF"/>
-          </a:solidFill>
-          <a:ln w="6350">
-            <a:solidFill>
-              <a:srgbClr val="E2E8F0"/>
-            </a:solidFill>
-            <a:prstDash val="solid"/>
-          </a:ln>
-        </p:spPr>
-        <p:txBody>
-          <a:bodyPr/>
-          <a:lstStyle/>
-          <a:p>
-            <a:endParaRPr lang="en-US"/>
-          </a:p>
-        </p:txBody>
-      </p:sp>
-      <p:sp>
-        <p:nvSpPr>
-          <p:cNvPr id="27" name="Text 25"/>
-          <p:cNvSpPr/>
-          <p:nvPr/>
-        </p:nvSpPr>
-        <p:spPr>
-          <a:xfrm>
-            <a:off x="1929384" y="1755648"/>
-            <a:ext cx="1005840" cy="329184"/>
-          </a:xfrm>
-          <a:prstGeom prst="rect">
-            <a:avLst/>
-          </a:prstGeom>
-          <a:noFill/>
-          <a:ln/>
-        </p:spPr>
-        <p:txBody>
-          <a:bodyPr wrap="square" rtlCol="0" anchor="ctr"/>
-          <a:lstStyle/>
-          <a:p>
-            <a:pPr marL="0" indent="0">
-              <a:buNone/>
-            </a:pPr>
-            <a:r>
-              <a:rPr lang="en-US" sz="1100" dirty="0">
-                <a:solidFill>
-                  <a:srgbClr val="475569"/>
-                </a:solidFill>
-                <a:latin typeface="Calibri" pitchFamily="34" charset="0"/>
-                <a:ea typeface="Calibri" pitchFamily="34" charset="-122"/>
-                <a:cs typeface="Calibri" pitchFamily="34" charset="-120"/>
-              </a:rPr>
-              <a:t>6.03</a:t>
-            </a:r>
-            <a:endParaRPr lang="en-US" sz="1100" dirty="0"/>
-          </a:p>
-        </p:txBody>
-      </p:sp>
-      <p:sp>
-        <p:nvSpPr>
-          <p:cNvPr id="28" name="Shape 26"/>
-          <p:cNvSpPr/>
-          <p:nvPr/>
-        </p:nvSpPr>
-        <p:spPr>
-          <a:xfrm>
-            <a:off x="3017520" y="1709928"/>
-            <a:ext cx="868680" cy="429768"/>
-          </a:xfrm>
-          <a:prstGeom prst="rect">
-            <a:avLst/>
-          </a:prstGeom>
-          <a:solidFill>
-            <a:srgbClr val="FFFFFF"/>
-          </a:solidFill>
-          <a:ln w="6350">
-            <a:solidFill>
-              <a:srgbClr val="E2E8F0"/>
-            </a:solidFill>
-            <a:prstDash val="solid"/>
-          </a:ln>
-        </p:spPr>
-        <p:txBody>
-          <a:bodyPr/>
-          <a:lstStyle/>
-          <a:p>
-            <a:endParaRPr lang="en-US"/>
-          </a:p>
-        </p:txBody>
-      </p:sp>
-      <p:sp>
-        <p:nvSpPr>
-          <p:cNvPr id="29" name="Text 27"/>
-          <p:cNvSpPr/>
-          <p:nvPr/>
-        </p:nvSpPr>
-        <p:spPr>
-          <a:xfrm>
-            <a:off x="3072384" y="1755648"/>
-            <a:ext cx="822960" cy="329184"/>
-          </a:xfrm>
-          <a:prstGeom prst="rect">
-            <a:avLst/>
-          </a:prstGeom>
-          <a:noFill/>
-          <a:ln/>
-        </p:spPr>
-        <p:txBody>
-          <a:bodyPr wrap="square" rtlCol="0" anchor="ctr"/>
-          <a:lstStyle/>
-          <a:p>
-            <a:pPr marL="0" indent="0">
-              <a:buNone/>
-            </a:pPr>
-            <a:r>
-              <a:rPr lang="en-US" sz="1100" dirty="0">
-                <a:solidFill>
-                  <a:srgbClr val="475569"/>
-                </a:solidFill>
-                <a:latin typeface="Calibri" pitchFamily="34" charset="0"/>
-                <a:ea typeface="Calibri" pitchFamily="34" charset="-122"/>
-                <a:cs typeface="Calibri" pitchFamily="34" charset="-120"/>
-              </a:rPr>
-              <a:t>19.87</a:t>
-            </a:r>
-            <a:endParaRPr lang="en-US" sz="1100" dirty="0"/>
-          </a:p>
-        </p:txBody>
-      </p:sp>
-      <p:sp>
-        <p:nvSpPr>
-          <p:cNvPr id="30" name="Shape 28"/>
-          <p:cNvSpPr/>
-          <p:nvPr/>
-        </p:nvSpPr>
-        <p:spPr>
-          <a:xfrm>
-            <a:off x="3977640" y="1709928"/>
-            <a:ext cx="640080" cy="429768"/>
-          </a:xfrm>
-          <a:prstGeom prst="rect">
-            <a:avLst/>
-          </a:prstGeom>
-          <a:solidFill>
-            <a:srgbClr val="FFFFFF"/>
-          </a:solidFill>
-          <a:ln w="6350">
-            <a:solidFill>
-              <a:srgbClr val="E2E8F0"/>
-            </a:solidFill>
-            <a:prstDash val="solid"/>
-          </a:ln>
-        </p:spPr>
-        <p:txBody>
-          <a:bodyPr/>
-          <a:lstStyle/>
-          <a:p>
-            <a:endParaRPr lang="en-US"/>
-          </a:p>
-        </p:txBody>
-      </p:sp>
-      <p:sp>
-        <p:nvSpPr>
-          <p:cNvPr id="31" name="Text 29"/>
-          <p:cNvSpPr/>
-          <p:nvPr/>
-        </p:nvSpPr>
-        <p:spPr>
-          <a:xfrm>
-            <a:off x="4032504" y="1755648"/>
-            <a:ext cx="594360" cy="329184"/>
-          </a:xfrm>
-          <a:prstGeom prst="rect">
-            <a:avLst/>
-          </a:prstGeom>
-          <a:noFill/>
-          <a:ln/>
-        </p:spPr>
-        <p:txBody>
-          <a:bodyPr wrap="square" rtlCol="0" anchor="ctr"/>
-          <a:lstStyle/>
-          <a:p>
-            <a:pPr marL="0" indent="0">
-              <a:buNone/>
-            </a:pPr>
-            <a:r>
-              <a:rPr lang="en-US" sz="1100" dirty="0">
-                <a:solidFill>
-                  <a:srgbClr val="475569"/>
-                </a:solidFill>
-                <a:latin typeface="Calibri" pitchFamily="34" charset="0"/>
-                <a:ea typeface="Calibri" pitchFamily="34" charset="-122"/>
-                <a:cs typeface="Calibri" pitchFamily="34" charset="-120"/>
-              </a:rPr>
-              <a:t>9.38</a:t>
-            </a:r>
-            <a:endParaRPr lang="en-US" sz="1100" dirty="0"/>
-          </a:p>
-        </p:txBody>
-      </p:sp>
-      <p:sp>
-        <p:nvSpPr>
-          <p:cNvPr id="32" name="Shape 30"/>
-          <p:cNvSpPr/>
-          <p:nvPr/>
-        </p:nvSpPr>
-        <p:spPr>
-          <a:xfrm>
-            <a:off x="4709160" y="1709928"/>
-            <a:ext cx="4114800" cy="429768"/>
-          </a:xfrm>
-          <a:prstGeom prst="rect">
-            <a:avLst/>
-          </a:prstGeom>
-          <a:solidFill>
-            <a:srgbClr val="FFFFFF"/>
-          </a:solidFill>
-          <a:ln w="6350">
-            <a:solidFill>
-              <a:srgbClr val="E2E8F0"/>
-            </a:solidFill>
-            <a:prstDash val="solid"/>
-          </a:ln>
-        </p:spPr>
-        <p:txBody>
-          <a:bodyPr/>
-          <a:lstStyle/>
-          <a:p>
-            <a:endParaRPr lang="en-US"/>
-          </a:p>
-        </p:txBody>
-      </p:sp>
-      <p:sp>
-        <p:nvSpPr>
-          <p:cNvPr id="33" name="Text 31"/>
-          <p:cNvSpPr/>
-          <p:nvPr/>
-        </p:nvSpPr>
-        <p:spPr>
-          <a:xfrm>
-            <a:off x="4764024" y="1755648"/>
-            <a:ext cx="4069080" cy="329184"/>
-          </a:xfrm>
-          <a:prstGeom prst="rect">
-            <a:avLst/>
-          </a:prstGeom>
-          <a:noFill/>
-          <a:ln/>
-        </p:spPr>
-        <p:txBody>
-          <a:bodyPr wrap="square" rtlCol="0" anchor="ctr"/>
-          <a:lstStyle/>
-          <a:p>
-            <a:pPr marL="0" indent="0">
-              <a:buNone/>
-            </a:pPr>
-            <a:r>
-              <a:rPr lang="en-US" sz="1100" dirty="0">
-                <a:solidFill>
-                  <a:srgbClr val="475569"/>
-                </a:solidFill>
-                <a:latin typeface="Calibri" pitchFamily="34" charset="0"/>
-                <a:ea typeface="Calibri" pitchFamily="34" charset="-122"/>
-                <a:cs typeface="Calibri" pitchFamily="34" charset="-120"/>
-              </a:rPr>
-              <a:t>Same pattern as Units — correlated extreme tails</a:t>
-            </a:r>
-            <a:endParaRPr lang="en-US" sz="1100" dirty="0"/>
-          </a:p>
-        </p:txBody>
-      </p:sp>
-      <p:sp>
-        <p:nvSpPr>
-          <p:cNvPr id="34" name="Shape 32"/>
-          <p:cNvSpPr/>
-          <p:nvPr/>
-        </p:nvSpPr>
-        <p:spPr>
-          <a:xfrm>
-            <a:off x="365760" y="2185416"/>
-            <a:ext cx="1417320" cy="429768"/>
-          </a:xfrm>
-          <a:prstGeom prst="rect">
-            <a:avLst/>
-          </a:prstGeom>
-          <a:solidFill>
-            <a:srgbClr val="F8FAFC"/>
-          </a:solidFill>
-          <a:ln w="6350">
-            <a:solidFill>
-              <a:srgbClr val="E2E8F0"/>
-            </a:solidFill>
-            <a:prstDash val="solid"/>
-          </a:ln>
-        </p:spPr>
-        <p:txBody>
-          <a:bodyPr/>
-          <a:lstStyle/>
-          <a:p>
-            <a:endParaRPr lang="en-US"/>
-          </a:p>
-        </p:txBody>
-      </p:sp>
-      <p:sp>
-        <p:nvSpPr>
-          <p:cNvPr id="35" name="Text 33"/>
-          <p:cNvSpPr/>
-          <p:nvPr/>
-        </p:nvSpPr>
-        <p:spPr>
-          <a:xfrm>
-            <a:off x="420624" y="2231136"/>
-            <a:ext cx="1371600" cy="329184"/>
-          </a:xfrm>
-          <a:prstGeom prst="rect">
-            <a:avLst/>
-          </a:prstGeom>
-          <a:noFill/>
-          <a:ln/>
-        </p:spPr>
-        <p:txBody>
-          <a:bodyPr wrap="square" rtlCol="0" anchor="ctr"/>
-          <a:lstStyle/>
-          <a:p>
-            <a:pPr marL="0" indent="0">
-              <a:buNone/>
-            </a:pPr>
-            <a:r>
-              <a:rPr lang="en-US" sz="1100" b="1" dirty="0">
-                <a:solidFill>
-                  <a:srgbClr val="1B2A4A"/>
-                </a:solidFill>
-                <a:latin typeface="Consolas" pitchFamily="34" charset="0"/>
-                <a:ea typeface="Consolas" pitchFamily="34" charset="-122"/>
-                <a:cs typeface="Consolas" pitchFamily="34" charset="-120"/>
-              </a:rPr>
-              <a:t>billing_rate</a:t>
-            </a:r>
-            <a:endParaRPr lang="en-US" sz="1100" dirty="0"/>
-          </a:p>
-        </p:txBody>
-      </p:sp>
-      <p:sp>
-        <p:nvSpPr>
-          <p:cNvPr id="36" name="Shape 34"/>
-          <p:cNvSpPr/>
-          <p:nvPr/>
-        </p:nvSpPr>
-        <p:spPr>
-          <a:xfrm>
-            <a:off x="1874520" y="2185416"/>
-            <a:ext cx="1051560" cy="429768"/>
-          </a:xfrm>
-          <a:prstGeom prst="rect">
-            <a:avLst/>
-          </a:prstGeom>
-          <a:solidFill>
-            <a:srgbClr val="F8FAFC"/>
-          </a:solidFill>
-          <a:ln w="6350">
-            <a:solidFill>
-              <a:srgbClr val="E2E8F0"/>
-            </a:solidFill>
-            <a:prstDash val="solid"/>
-          </a:ln>
-        </p:spPr>
-        <p:txBody>
-          <a:bodyPr/>
-          <a:lstStyle/>
-          <a:p>
-            <a:endParaRPr lang="en-US"/>
-          </a:p>
-        </p:txBody>
-      </p:sp>
-      <p:sp>
-        <p:nvSpPr>
-          <p:cNvPr id="37" name="Text 35"/>
-          <p:cNvSpPr/>
-          <p:nvPr/>
-        </p:nvSpPr>
-        <p:spPr>
-          <a:xfrm>
-            <a:off x="1929384" y="2231136"/>
-            <a:ext cx="1005840" cy="329184"/>
-          </a:xfrm>
-          <a:prstGeom prst="rect">
-            <a:avLst/>
-          </a:prstGeom>
-          <a:noFill/>
-          <a:ln/>
-        </p:spPr>
-        <p:txBody>
-          <a:bodyPr wrap="square" rtlCol="0" anchor="ctr"/>
-          <a:lstStyle/>
-          <a:p>
-            <a:pPr marL="0" indent="0">
-              <a:buNone/>
-            </a:pPr>
-            <a:r>
-              <a:rPr lang="en-US" sz="1100" dirty="0">
-                <a:solidFill>
-                  <a:srgbClr val="475569"/>
-                </a:solidFill>
-                <a:latin typeface="Calibri" pitchFamily="34" charset="0"/>
-                <a:ea typeface="Calibri" pitchFamily="34" charset="-122"/>
-                <a:cs typeface="Calibri" pitchFamily="34" charset="-120"/>
-              </a:rPr>
-              <a:t>0.62</a:t>
-            </a:r>
-            <a:endParaRPr lang="en-US" sz="1100" dirty="0"/>
-          </a:p>
-        </p:txBody>
-      </p:sp>
-      <p:sp>
-        <p:nvSpPr>
-          <p:cNvPr id="38" name="Shape 36"/>
-          <p:cNvSpPr/>
-          <p:nvPr/>
-        </p:nvSpPr>
-        <p:spPr>
-          <a:xfrm>
-            <a:off x="3017520" y="2185416"/>
-            <a:ext cx="868680" cy="429768"/>
-          </a:xfrm>
-          <a:prstGeom prst="rect">
-            <a:avLst/>
-          </a:prstGeom>
-          <a:solidFill>
-            <a:srgbClr val="F8FAFC"/>
-          </a:solidFill>
-          <a:ln w="6350">
-            <a:solidFill>
-              <a:srgbClr val="E2E8F0"/>
-            </a:solidFill>
-            <a:prstDash val="solid"/>
-          </a:ln>
-        </p:spPr>
-        <p:txBody>
-          <a:bodyPr/>
-          <a:lstStyle/>
-          <a:p>
-            <a:endParaRPr lang="en-US"/>
-          </a:p>
-        </p:txBody>
-      </p:sp>
-      <p:sp>
-        <p:nvSpPr>
-          <p:cNvPr id="39" name="Text 37"/>
-          <p:cNvSpPr/>
-          <p:nvPr/>
-        </p:nvSpPr>
-        <p:spPr>
-          <a:xfrm>
-            <a:off x="3072384" y="2231136"/>
-            <a:ext cx="822960" cy="329184"/>
-          </a:xfrm>
-          <a:prstGeom prst="rect">
-            <a:avLst/>
-          </a:prstGeom>
-          <a:noFill/>
-          <a:ln/>
-        </p:spPr>
-        <p:txBody>
-          <a:bodyPr wrap="square" rtlCol="0" anchor="ctr"/>
-          <a:lstStyle/>
-          <a:p>
-            <a:pPr marL="0" indent="0">
-              <a:buNone/>
-            </a:pPr>
-            <a:r>
-              <a:rPr lang="en-US" sz="1100" dirty="0">
-                <a:solidFill>
-                  <a:srgbClr val="475569"/>
-                </a:solidFill>
-                <a:latin typeface="Calibri" pitchFamily="34" charset="0"/>
-                <a:ea typeface="Calibri" pitchFamily="34" charset="-122"/>
-                <a:cs typeface="Calibri" pitchFamily="34" charset="-120"/>
-              </a:rPr>
-              <a:t>0.43</a:t>
-            </a:r>
-            <a:endParaRPr lang="en-US" sz="1100" dirty="0"/>
-          </a:p>
-        </p:txBody>
-      </p:sp>
-      <p:sp>
-        <p:nvSpPr>
-          <p:cNvPr id="40" name="Shape 38"/>
-          <p:cNvSpPr/>
-          <p:nvPr/>
-        </p:nvSpPr>
-        <p:spPr>
-          <a:xfrm>
-            <a:off x="3977640" y="2185416"/>
-            <a:ext cx="640080" cy="429768"/>
-          </a:xfrm>
-          <a:prstGeom prst="rect">
-            <a:avLst/>
-          </a:prstGeom>
-          <a:solidFill>
-            <a:srgbClr val="F8FAFC"/>
-          </a:solidFill>
-          <a:ln w="6350">
-            <a:solidFill>
-              <a:srgbClr val="E2E8F0"/>
-            </a:solidFill>
-            <a:prstDash val="solid"/>
-          </a:ln>
-        </p:spPr>
-        <p:txBody>
-          <a:bodyPr/>
-          <a:lstStyle/>
-          <a:p>
-            <a:endParaRPr lang="en-US"/>
-          </a:p>
-        </p:txBody>
-      </p:sp>
-      <p:sp>
-        <p:nvSpPr>
-          <p:cNvPr id="41" name="Text 39"/>
-          <p:cNvSpPr/>
-          <p:nvPr/>
-        </p:nvSpPr>
-        <p:spPr>
-          <a:xfrm>
-            <a:off x="4032504" y="2231136"/>
-            <a:ext cx="594360" cy="329184"/>
-          </a:xfrm>
-          <a:prstGeom prst="rect">
-            <a:avLst/>
-          </a:prstGeom>
-          <a:noFill/>
-          <a:ln/>
-        </p:spPr>
-        <p:txBody>
-          <a:bodyPr wrap="square" rtlCol="0" anchor="ctr"/>
-          <a:lstStyle/>
-          <a:p>
-            <a:pPr marL="0" indent="0">
-              <a:buNone/>
-            </a:pPr>
-            <a:r>
-              <a:rPr lang="en-US" sz="1100" dirty="0">
-                <a:solidFill>
-                  <a:srgbClr val="475569"/>
-                </a:solidFill>
-                <a:latin typeface="Calibri" pitchFamily="34" charset="0"/>
-                <a:ea typeface="Calibri" pitchFamily="34" charset="-122"/>
-                <a:cs typeface="Calibri" pitchFamily="34" charset="-120"/>
-              </a:rPr>
-              <a:t>−0.55</a:t>
-            </a:r>
-            <a:endParaRPr lang="en-US" sz="1100" dirty="0"/>
-          </a:p>
-        </p:txBody>
-      </p:sp>
-      <p:sp>
-        <p:nvSpPr>
-          <p:cNvPr id="42" name="Shape 40"/>
-          <p:cNvSpPr/>
-          <p:nvPr/>
-        </p:nvSpPr>
-        <p:spPr>
-          <a:xfrm>
-            <a:off x="4709160" y="2185416"/>
-            <a:ext cx="4114800" cy="429768"/>
-          </a:xfrm>
-          <a:prstGeom prst="rect">
-            <a:avLst/>
-          </a:prstGeom>
-          <a:solidFill>
-            <a:srgbClr val="F8FAFC"/>
-          </a:solidFill>
-          <a:ln w="6350">
-            <a:solidFill>
-              <a:srgbClr val="E2E8F0"/>
-            </a:solidFill>
-            <a:prstDash val="solid"/>
-          </a:ln>
-        </p:spPr>
-        <p:txBody>
-          <a:bodyPr/>
-          <a:lstStyle/>
-          <a:p>
-            <a:endParaRPr lang="en-US"/>
-          </a:p>
-        </p:txBody>
-      </p:sp>
-      <p:sp>
-        <p:nvSpPr>
-          <p:cNvPr id="43" name="Text 41"/>
-          <p:cNvSpPr/>
-          <p:nvPr/>
-        </p:nvSpPr>
-        <p:spPr>
-          <a:xfrm>
-            <a:off x="4764024" y="2231136"/>
-            <a:ext cx="4069080" cy="329184"/>
-          </a:xfrm>
-          <a:prstGeom prst="rect">
-            <a:avLst/>
-          </a:prstGeom>
-          <a:noFill/>
-          <a:ln/>
-        </p:spPr>
-        <p:txBody>
-          <a:bodyPr wrap="square" rtlCol="0" anchor="ctr"/>
-          <a:lstStyle/>
-          <a:p>
-            <a:pPr marL="0" indent="0">
-              <a:buNone/>
-            </a:pPr>
-            <a:r>
-              <a:rPr lang="en-US" sz="1100" dirty="0">
-                <a:solidFill>
-                  <a:srgbClr val="475569"/>
-                </a:solidFill>
-                <a:latin typeface="Calibri" pitchFamily="34" charset="0"/>
-                <a:ea typeface="Calibri" pitchFamily="34" charset="-122"/>
-                <a:cs typeface="Calibri" pitchFamily="34" charset="-120"/>
-              </a:rPr>
-              <a:t>Bimodal: 0 (entirely unbilled) and 1 (fully billed)</a:t>
-            </a:r>
-            <a:endParaRPr lang="en-US" sz="1100" dirty="0"/>
-          </a:p>
-        </p:txBody>
-      </p:sp>
-      <p:sp>
-        <p:nvSpPr>
-          <p:cNvPr id="44" name="Shape 42"/>
-          <p:cNvSpPr/>
-          <p:nvPr/>
-        </p:nvSpPr>
-        <p:spPr>
-          <a:xfrm>
-            <a:off x="365760" y="2660904"/>
-            <a:ext cx="1417320" cy="429768"/>
-          </a:xfrm>
-          <a:prstGeom prst="rect">
-            <a:avLst/>
-          </a:prstGeom>
-          <a:solidFill>
-            <a:srgbClr val="FFF5F5"/>
-          </a:solidFill>
-          <a:ln w="6350">
-            <a:solidFill>
-              <a:srgbClr val="E2E8F0"/>
-            </a:solidFill>
-            <a:prstDash val="solid"/>
-          </a:ln>
-        </p:spPr>
-        <p:txBody>
-          <a:bodyPr/>
-          <a:lstStyle/>
-          <a:p>
-            <a:endParaRPr lang="en-US"/>
-          </a:p>
-        </p:txBody>
-      </p:sp>
-      <p:sp>
-        <p:nvSpPr>
-          <p:cNvPr id="45" name="Text 43"/>
-          <p:cNvSpPr/>
-          <p:nvPr/>
-        </p:nvSpPr>
-        <p:spPr>
-          <a:xfrm>
-            <a:off x="420624" y="2706624"/>
-            <a:ext cx="1371600" cy="329184"/>
-          </a:xfrm>
-          <a:prstGeom prst="rect">
-            <a:avLst/>
-          </a:prstGeom>
-          <a:noFill/>
-          <a:ln/>
-        </p:spPr>
-        <p:txBody>
-          <a:bodyPr wrap="square" rtlCol="0" anchor="ctr"/>
-          <a:lstStyle/>
-          <a:p>
-            <a:pPr marL="0" indent="0">
-              <a:buNone/>
-            </a:pPr>
-            <a:r>
-              <a:rPr lang="en-US" sz="1100" b="1" dirty="0">
-                <a:solidFill>
-                  <a:srgbClr val="1B2A4A"/>
-                </a:solidFill>
-                <a:latin typeface="Consolas" pitchFamily="34" charset="0"/>
-                <a:ea typeface="Consolas" pitchFamily="34" charset="-122"/>
-                <a:cs typeface="Consolas" pitchFamily="34" charset="-120"/>
-              </a:rPr>
-              <a:t>efficiency</a:t>
-            </a:r>
-            <a:endParaRPr lang="en-US" sz="1100" dirty="0"/>
-          </a:p>
-        </p:txBody>
-      </p:sp>
-      <p:sp>
-        <p:nvSpPr>
-          <p:cNvPr id="46" name="Shape 44"/>
-          <p:cNvSpPr/>
-          <p:nvPr/>
-        </p:nvSpPr>
-        <p:spPr>
-          <a:xfrm>
-            <a:off x="1874520" y="2660904"/>
-            <a:ext cx="1051560" cy="429768"/>
-          </a:xfrm>
-          <a:prstGeom prst="rect">
-            <a:avLst/>
-          </a:prstGeom>
-          <a:solidFill>
-            <a:srgbClr val="FFF5F5"/>
-          </a:solidFill>
-          <a:ln w="6350">
-            <a:solidFill>
-              <a:srgbClr val="E2E8F0"/>
-            </a:solidFill>
-            <a:prstDash val="solid"/>
-          </a:ln>
-        </p:spPr>
-        <p:txBody>
-          <a:bodyPr/>
-          <a:lstStyle/>
-          <a:p>
-            <a:endParaRPr lang="en-US"/>
-          </a:p>
-        </p:txBody>
-      </p:sp>
-      <p:sp>
-        <p:nvSpPr>
-          <p:cNvPr id="47" name="Text 45"/>
-          <p:cNvSpPr/>
-          <p:nvPr/>
-        </p:nvSpPr>
-        <p:spPr>
-          <a:xfrm>
-            <a:off x="1929384" y="2706624"/>
-            <a:ext cx="1005840" cy="329184"/>
-          </a:xfrm>
-          <a:prstGeom prst="rect">
-            <a:avLst/>
-          </a:prstGeom>
-          <a:noFill/>
-          <a:ln/>
-        </p:spPr>
-        <p:txBody>
-          <a:bodyPr wrap="square" rtlCol="0" anchor="ctr"/>
-          <a:lstStyle/>
-          <a:p>
-            <a:pPr marL="0" indent="0">
-              <a:buNone/>
-            </a:pPr>
-            <a:r>
-              <a:rPr lang="en-US" sz="1100" dirty="0">
-                <a:solidFill>
-                  <a:srgbClr val="475569"/>
-                </a:solidFill>
-                <a:latin typeface="Calibri" pitchFamily="34" charset="0"/>
-                <a:ea typeface="Calibri" pitchFamily="34" charset="-122"/>
-                <a:cs typeface="Calibri" pitchFamily="34" charset="-120"/>
-              </a:rPr>
-              <a:t>49.16</a:t>
-            </a:r>
-            <a:endParaRPr lang="en-US" sz="1100" dirty="0"/>
-          </a:p>
-        </p:txBody>
-      </p:sp>
-      <p:sp>
-        <p:nvSpPr>
-          <p:cNvPr id="48" name="Shape 46"/>
-          <p:cNvSpPr/>
-          <p:nvPr/>
-        </p:nvSpPr>
-        <p:spPr>
-          <a:xfrm>
-            <a:off x="3017520" y="2660904"/>
-            <a:ext cx="868680" cy="429768"/>
-          </a:xfrm>
-          <a:prstGeom prst="rect">
-            <a:avLst/>
-          </a:prstGeom>
-          <a:solidFill>
-            <a:srgbClr val="FFF5F5"/>
-          </a:solidFill>
-          <a:ln w="6350">
-            <a:solidFill>
-              <a:srgbClr val="E2E8F0"/>
-            </a:solidFill>
-            <a:prstDash val="solid"/>
-          </a:ln>
-        </p:spPr>
-        <p:txBody>
-          <a:bodyPr/>
-          <a:lstStyle/>
-          <a:p>
-            <a:endParaRPr lang="en-US"/>
-          </a:p>
-        </p:txBody>
-      </p:sp>
-      <p:sp>
-        <p:nvSpPr>
-          <p:cNvPr id="49" name="Text 47"/>
-          <p:cNvSpPr/>
-          <p:nvPr/>
-        </p:nvSpPr>
-        <p:spPr>
-          <a:xfrm>
-            <a:off x="3072384" y="2706624"/>
-            <a:ext cx="822960" cy="329184"/>
-          </a:xfrm>
-          <a:prstGeom prst="rect">
-            <a:avLst/>
-          </a:prstGeom>
-          <a:noFill/>
-          <a:ln/>
-        </p:spPr>
-        <p:txBody>
-          <a:bodyPr wrap="square" rtlCol="0" anchor="ctr"/>
-          <a:lstStyle/>
-          <a:p>
-            <a:pPr marL="0" indent="0">
-              <a:buNone/>
-            </a:pPr>
-            <a:r>
-              <a:rPr lang="en-US" sz="1100" dirty="0">
-                <a:solidFill>
-                  <a:srgbClr val="475569"/>
-                </a:solidFill>
-                <a:latin typeface="Calibri" pitchFamily="34" charset="0"/>
-                <a:ea typeface="Calibri" pitchFamily="34" charset="-122"/>
-                <a:cs typeface="Calibri" pitchFamily="34" charset="-120"/>
-              </a:rPr>
-              <a:t>167.91</a:t>
-            </a:r>
-            <a:endParaRPr lang="en-US" sz="1100" dirty="0"/>
-          </a:p>
-        </p:txBody>
-      </p:sp>
-      <p:sp>
-        <p:nvSpPr>
-          <p:cNvPr id="50" name="Shape 48"/>
-          <p:cNvSpPr/>
-          <p:nvPr/>
-        </p:nvSpPr>
-        <p:spPr>
-          <a:xfrm>
-            <a:off x="3977640" y="2660904"/>
-            <a:ext cx="640080" cy="429768"/>
-          </a:xfrm>
-          <a:prstGeom prst="rect">
-            <a:avLst/>
-          </a:prstGeom>
-          <a:solidFill>
-            <a:srgbClr val="FFF5F5"/>
-          </a:solidFill>
-          <a:ln w="6350">
-            <a:solidFill>
-              <a:srgbClr val="E2E8F0"/>
-            </a:solidFill>
-            <a:prstDash val="solid"/>
-          </a:ln>
-        </p:spPr>
-        <p:txBody>
-          <a:bodyPr/>
-          <a:lstStyle/>
-          <a:p>
-            <a:endParaRPr lang="en-US"/>
-          </a:p>
-        </p:txBody>
-      </p:sp>
-      <p:sp>
-        <p:nvSpPr>
-          <p:cNvPr id="51" name="Text 49"/>
-          <p:cNvSpPr/>
-          <p:nvPr/>
-        </p:nvSpPr>
-        <p:spPr>
-          <a:xfrm>
-            <a:off x="4032504" y="2706624"/>
-            <a:ext cx="594360" cy="329184"/>
-          </a:xfrm>
-          <a:prstGeom prst="rect">
-            <a:avLst/>
-          </a:prstGeom>
-          <a:noFill/>
-          <a:ln/>
-        </p:spPr>
-        <p:txBody>
-          <a:bodyPr wrap="square" rtlCol="0" anchor="ctr"/>
-          <a:lstStyle/>
-          <a:p>
-            <a:pPr marL="0" indent="0">
-              <a:buNone/>
-            </a:pPr>
-            <a:r>
-              <a:rPr lang="en-US" sz="1100" dirty="0">
-                <a:solidFill>
-                  <a:srgbClr val="C0392B"/>
-                </a:solidFill>
-                <a:latin typeface="Calibri" pitchFamily="34" charset="0"/>
-                <a:ea typeface="Calibri" pitchFamily="34" charset="-122"/>
-                <a:cs typeface="Calibri" pitchFamily="34" charset="-120"/>
-              </a:rPr>
-              <a:t>19.27</a:t>
-            </a:r>
-            <a:endParaRPr lang="en-US" sz="1100" dirty="0"/>
-          </a:p>
-        </p:txBody>
-      </p:sp>
-      <p:sp>
-        <p:nvSpPr>
-          <p:cNvPr id="52" name="Shape 50"/>
-          <p:cNvSpPr/>
-          <p:nvPr/>
-        </p:nvSpPr>
-        <p:spPr>
-          <a:xfrm>
-            <a:off x="4709160" y="2660904"/>
-            <a:ext cx="4114800" cy="429768"/>
-          </a:xfrm>
-          <a:prstGeom prst="rect">
-            <a:avLst/>
-          </a:prstGeom>
-          <a:solidFill>
-            <a:srgbClr val="FFF5F5"/>
-          </a:solidFill>
-          <a:ln w="6350">
-            <a:solidFill>
-              <a:srgbClr val="E2E8F0"/>
-            </a:solidFill>
-            <a:prstDash val="solid"/>
-          </a:ln>
-        </p:spPr>
-        <p:txBody>
-          <a:bodyPr/>
-          <a:lstStyle/>
-          <a:p>
-            <a:endParaRPr lang="en-US"/>
-          </a:p>
-        </p:txBody>
-      </p:sp>
-      <p:sp>
-        <p:nvSpPr>
-          <p:cNvPr id="53" name="Text 51"/>
-          <p:cNvSpPr/>
-          <p:nvPr/>
-        </p:nvSpPr>
-        <p:spPr>
-          <a:xfrm>
-            <a:off x="4764024" y="2706624"/>
-            <a:ext cx="4069080" cy="329184"/>
-          </a:xfrm>
-          <a:prstGeom prst="rect">
-            <a:avLst/>
-          </a:prstGeom>
-          <a:noFill/>
-          <a:ln/>
-        </p:spPr>
-        <p:txBody>
-          <a:bodyPr wrap="square" rtlCol="0" anchor="ctr"/>
-          <a:lstStyle/>
-          <a:p>
-            <a:pPr marL="0" indent="0">
-              <a:buNone/>
-            </a:pPr>
-            <a:r>
-              <a:rPr lang="en-US" sz="1100" dirty="0">
-                <a:solidFill>
-                  <a:srgbClr val="475569"/>
-                </a:solidFill>
-                <a:latin typeface="Calibri" pitchFamily="34" charset="0"/>
-                <a:ea typeface="Calibri" pitchFamily="34" charset="-122"/>
-                <a:cs typeface="Calibri" pitchFamily="34" charset="-120"/>
-              </a:rPr>
-              <a:t>Extremely heavy tail — primary range for theft signals</a:t>
-            </a:r>
-            <a:endParaRPr lang="en-US" sz="1100" dirty="0"/>
-          </a:p>
-        </p:txBody>
-      </p:sp>
-      <p:sp>
-        <p:nvSpPr>
-          <p:cNvPr id="54" name="Shape 52"/>
-          <p:cNvSpPr/>
-          <p:nvPr/>
-        </p:nvSpPr>
-        <p:spPr>
-          <a:xfrm>
-            <a:off x="365760" y="3136392"/>
-            <a:ext cx="1417320" cy="429768"/>
-          </a:xfrm>
-          <a:prstGeom prst="rect">
-            <a:avLst/>
-          </a:prstGeom>
-          <a:solidFill>
-            <a:srgbClr val="F8FAFC"/>
-          </a:solidFill>
-          <a:ln w="6350">
-            <a:solidFill>
-              <a:srgbClr val="E2E8F0"/>
-            </a:solidFill>
-            <a:prstDash val="solid"/>
-          </a:ln>
-        </p:spPr>
-        <p:txBody>
-          <a:bodyPr/>
-          <a:lstStyle/>
-          <a:p>
-            <a:endParaRPr lang="en-US"/>
-          </a:p>
-        </p:txBody>
-      </p:sp>
-      <p:sp>
-        <p:nvSpPr>
-          <p:cNvPr id="55" name="Text 53"/>
-          <p:cNvSpPr/>
-          <p:nvPr/>
-        </p:nvSpPr>
-        <p:spPr>
-          <a:xfrm>
-            <a:off x="420624" y="3182112"/>
-            <a:ext cx="1371600" cy="329184"/>
-          </a:xfrm>
-          <a:prstGeom prst="rect">
-            <a:avLst/>
-          </a:prstGeom>
-          <a:noFill/>
-          <a:ln/>
-        </p:spPr>
-        <p:txBody>
-          <a:bodyPr wrap="square" rtlCol="0" anchor="ctr"/>
-          <a:lstStyle/>
-          <a:p>
-            <a:pPr marL="0" indent="0">
-              <a:buNone/>
-            </a:pPr>
-            <a:r>
-              <a:rPr lang="en-US" sz="1100" b="1" dirty="0">
-                <a:solidFill>
-                  <a:srgbClr val="1B2A4A"/>
-                </a:solidFill>
-                <a:latin typeface="Consolas" pitchFamily="34" charset="0"/>
-                <a:ea typeface="Consolas" pitchFamily="34" charset="-122"/>
-                <a:cs typeface="Consolas" pitchFamily="34" charset="-120"/>
-              </a:rPr>
-              <a:t>areas</a:t>
-            </a:r>
-            <a:endParaRPr lang="en-US" sz="1100" dirty="0"/>
-          </a:p>
-        </p:txBody>
-      </p:sp>
-      <p:sp>
-        <p:nvSpPr>
-          <p:cNvPr id="56" name="Shape 54"/>
-          <p:cNvSpPr/>
-          <p:nvPr/>
-        </p:nvSpPr>
-        <p:spPr>
-          <a:xfrm>
-            <a:off x="1874520" y="3136392"/>
-            <a:ext cx="1051560" cy="429768"/>
-          </a:xfrm>
-          <a:prstGeom prst="rect">
-            <a:avLst/>
-          </a:prstGeom>
-          <a:solidFill>
-            <a:srgbClr val="F8FAFC"/>
-          </a:solidFill>
-          <a:ln w="6350">
-            <a:solidFill>
-              <a:srgbClr val="E2E8F0"/>
-            </a:solidFill>
-            <a:prstDash val="solid"/>
-          </a:ln>
-        </p:spPr>
-        <p:txBody>
-          <a:bodyPr/>
-          <a:lstStyle/>
-          <a:p>
-            <a:endParaRPr lang="en-US"/>
-          </a:p>
-        </p:txBody>
-      </p:sp>
-      <p:sp>
-        <p:nvSpPr>
-          <p:cNvPr id="57" name="Text 55"/>
-          <p:cNvSpPr/>
-          <p:nvPr/>
-        </p:nvSpPr>
-        <p:spPr>
-          <a:xfrm>
-            <a:off x="1929384" y="3182112"/>
-            <a:ext cx="1005840" cy="329184"/>
-          </a:xfrm>
-          <a:prstGeom prst="rect">
-            <a:avLst/>
-          </a:prstGeom>
-          <a:noFill/>
-          <a:ln/>
-        </p:spPr>
-        <p:txBody>
-          <a:bodyPr wrap="square" rtlCol="0" anchor="ctr"/>
-          <a:lstStyle/>
-          <a:p>
-            <a:pPr marL="0" indent="0">
-              <a:buNone/>
-            </a:pPr>
-            <a:r>
-              <a:rPr lang="en-US" sz="1100" dirty="0">
-                <a:solidFill>
-                  <a:srgbClr val="475569"/>
-                </a:solidFill>
-                <a:latin typeface="Calibri" pitchFamily="34" charset="0"/>
-                <a:ea typeface="Calibri" pitchFamily="34" charset="-122"/>
-                <a:cs typeface="Calibri" pitchFamily="34" charset="-120"/>
-              </a:rPr>
-              <a:t>0.03</a:t>
-            </a:r>
-            <a:endParaRPr lang="en-US" sz="1100" dirty="0"/>
-          </a:p>
-        </p:txBody>
-      </p:sp>
-      <p:sp>
-        <p:nvSpPr>
-          <p:cNvPr id="58" name="Shape 56"/>
-          <p:cNvSpPr/>
-          <p:nvPr/>
-        </p:nvSpPr>
-        <p:spPr>
-          <a:xfrm>
-            <a:off x="3017520" y="3136392"/>
-            <a:ext cx="868680" cy="429768"/>
-          </a:xfrm>
-          <a:prstGeom prst="rect">
-            <a:avLst/>
-          </a:prstGeom>
-          <a:solidFill>
-            <a:srgbClr val="F8FAFC"/>
-          </a:solidFill>
-          <a:ln w="6350">
-            <a:solidFill>
-              <a:srgbClr val="E2E8F0"/>
-            </a:solidFill>
-            <a:prstDash val="solid"/>
-          </a:ln>
-        </p:spPr>
-        <p:txBody>
-          <a:bodyPr/>
-          <a:lstStyle/>
-          <a:p>
-            <a:endParaRPr lang="en-US"/>
-          </a:p>
-        </p:txBody>
-      </p:sp>
-      <p:sp>
-        <p:nvSpPr>
-          <p:cNvPr id="59" name="Text 57"/>
-          <p:cNvSpPr/>
-          <p:nvPr/>
-        </p:nvSpPr>
-        <p:spPr>
-          <a:xfrm>
-            <a:off x="3072384" y="3182112"/>
-            <a:ext cx="822960" cy="329184"/>
-          </a:xfrm>
-          <a:prstGeom prst="rect">
-            <a:avLst/>
-          </a:prstGeom>
-          <a:noFill/>
-          <a:ln/>
-        </p:spPr>
-        <p:txBody>
-          <a:bodyPr wrap="square" rtlCol="0" anchor="ctr"/>
-          <a:lstStyle/>
-          <a:p>
-            <a:pPr marL="0" indent="0">
-              <a:buNone/>
-            </a:pPr>
-            <a:r>
-              <a:rPr lang="en-US" sz="1100" dirty="0">
-                <a:solidFill>
-                  <a:srgbClr val="475569"/>
-                </a:solidFill>
-                <a:latin typeface="Calibri" pitchFamily="34" charset="0"/>
-                <a:ea typeface="Calibri" pitchFamily="34" charset="-122"/>
-                <a:cs typeface="Calibri" pitchFamily="34" charset="-120"/>
-              </a:rPr>
-              <a:t>0.01</a:t>
-            </a:r>
-            <a:endParaRPr lang="en-US" sz="1100" dirty="0"/>
-          </a:p>
-        </p:txBody>
-      </p:sp>
-      <p:sp>
-        <p:nvSpPr>
-          <p:cNvPr id="60" name="Shape 58"/>
-          <p:cNvSpPr/>
-          <p:nvPr/>
-        </p:nvSpPr>
-        <p:spPr>
-          <a:xfrm>
-            <a:off x="3977640" y="3136392"/>
-            <a:ext cx="640080" cy="429768"/>
-          </a:xfrm>
-          <a:prstGeom prst="rect">
-            <a:avLst/>
-          </a:prstGeom>
-          <a:solidFill>
-            <a:srgbClr val="F8FAFC"/>
-          </a:solidFill>
-          <a:ln w="6350">
-            <a:solidFill>
-              <a:srgbClr val="E2E8F0"/>
-            </a:solidFill>
-            <a:prstDash val="solid"/>
-          </a:ln>
-        </p:spPr>
-        <p:txBody>
-          <a:bodyPr/>
-          <a:lstStyle/>
-          <a:p>
-            <a:endParaRPr lang="en-US"/>
-          </a:p>
-        </p:txBody>
-      </p:sp>
-      <p:sp>
-        <p:nvSpPr>
-          <p:cNvPr id="61" name="Text 59"/>
-          <p:cNvSpPr/>
-          <p:nvPr/>
-        </p:nvSpPr>
-        <p:spPr>
-          <a:xfrm>
-            <a:off x="4032504" y="3182112"/>
-            <a:ext cx="594360" cy="329184"/>
-          </a:xfrm>
-          <a:prstGeom prst="rect">
-            <a:avLst/>
-          </a:prstGeom>
-          <a:noFill/>
-          <a:ln/>
-        </p:spPr>
-        <p:txBody>
-          <a:bodyPr wrap="square" rtlCol="0" anchor="ctr"/>
-          <a:lstStyle/>
-          <a:p>
-            <a:pPr marL="0" indent="0">
-              <a:buNone/>
-            </a:pPr>
-            <a:r>
-              <a:rPr lang="en-US" sz="1100" dirty="0">
-                <a:solidFill>
-                  <a:srgbClr val="475569"/>
-                </a:solidFill>
-                <a:latin typeface="Calibri" pitchFamily="34" charset="0"/>
-                <a:ea typeface="Calibri" pitchFamily="34" charset="-122"/>
-                <a:cs typeface="Calibri" pitchFamily="34" charset="-120"/>
-              </a:rPr>
-              <a:t>—</a:t>
-            </a:r>
-            <a:endParaRPr lang="en-US" sz="1100" dirty="0"/>
-          </a:p>
-        </p:txBody>
-      </p:sp>
-      <p:sp>
-        <p:nvSpPr>
-          <p:cNvPr id="62" name="Shape 60"/>
-          <p:cNvSpPr/>
-          <p:nvPr/>
-        </p:nvSpPr>
-        <p:spPr>
-          <a:xfrm>
-            <a:off x="4709160" y="3136392"/>
-            <a:ext cx="4114800" cy="429768"/>
-          </a:xfrm>
-          <a:prstGeom prst="rect">
-            <a:avLst/>
-          </a:prstGeom>
-          <a:solidFill>
-            <a:srgbClr val="F8FAFC"/>
-          </a:solidFill>
-          <a:ln w="6350">
-            <a:solidFill>
-              <a:srgbClr val="E2E8F0"/>
-            </a:solidFill>
-            <a:prstDash val="solid"/>
-          </a:ln>
-        </p:spPr>
-        <p:txBody>
-          <a:bodyPr/>
-          <a:lstStyle/>
-          <a:p>
-            <a:endParaRPr lang="en-US"/>
-          </a:p>
-        </p:txBody>
-      </p:sp>
-      <p:sp>
-        <p:nvSpPr>
-          <p:cNvPr id="63" name="Text 61"/>
-          <p:cNvSpPr/>
-          <p:nvPr/>
-        </p:nvSpPr>
-        <p:spPr>
-          <a:xfrm>
-            <a:off x="4764024" y="3182112"/>
-            <a:ext cx="4069080" cy="329184"/>
-          </a:xfrm>
-          <a:prstGeom prst="rect">
-            <a:avLst/>
-          </a:prstGeom>
-          <a:noFill/>
-          <a:ln/>
-        </p:spPr>
-        <p:txBody>
-          <a:bodyPr wrap="square" rtlCol="0" anchor="ctr"/>
-          <a:lstStyle/>
-          <a:p>
-            <a:pPr marL="0" indent="0">
-              <a:buNone/>
-            </a:pPr>
-            <a:r>
-              <a:rPr lang="en-US" sz="1100" dirty="0">
-                <a:solidFill>
-                  <a:srgbClr val="475569"/>
-                </a:solidFill>
-                <a:latin typeface="Calibri" pitchFamily="34" charset="0"/>
-                <a:ea typeface="Calibri" pitchFamily="34" charset="-122"/>
-                <a:cs typeface="Calibri" pitchFamily="34" charset="-120"/>
-              </a:rPr>
-              <a:t>Frequency-encoded location weight — rare areas score low</a:t>
-            </a:r>
-            <a:endParaRPr lang="en-US" sz="1100" dirty="0"/>
-          </a:p>
-        </p:txBody>
-      </p:sp>
-      <p:sp>
-        <p:nvSpPr>
-          <p:cNvPr id="64" name="Shape 62"/>
-          <p:cNvSpPr/>
-          <p:nvPr/>
-        </p:nvSpPr>
-        <p:spPr>
-          <a:xfrm>
-            <a:off x="365760" y="3703320"/>
-            <a:ext cx="8412480" cy="530352"/>
-          </a:xfrm>
-          <a:prstGeom prst="rect">
-            <a:avLst/>
-          </a:prstGeom>
-          <a:solidFill>
-            <a:srgbClr val="F8FAFC"/>
-          </a:solidFill>
-          <a:ln w="12700">
-            <a:solidFill>
-              <a:srgbClr val="E2E8F0"/>
-            </a:solidFill>
-            <a:prstDash val="solid"/>
-          </a:ln>
-        </p:spPr>
-        <p:txBody>
-          <a:bodyPr/>
-          <a:lstStyle/>
-          <a:p>
-            <a:endParaRPr lang="en-US"/>
-          </a:p>
-        </p:txBody>
-      </p:sp>
-      <p:sp>
-        <p:nvSpPr>
-          <p:cNvPr id="65" name="Text 63"/>
-          <p:cNvSpPr/>
-          <p:nvPr/>
-        </p:nvSpPr>
-        <p:spPr>
-          <a:xfrm>
-            <a:off x="502920" y="3767328"/>
-            <a:ext cx="5029200" cy="347472"/>
-          </a:xfrm>
-          <a:prstGeom prst="rect">
-            <a:avLst/>
-          </a:prstGeom>
-          <a:noFill/>
-          <a:ln/>
-        </p:spPr>
-        <p:txBody>
-          <a:bodyPr wrap="square" rtlCol="0" anchor="ctr"/>
-          <a:lstStyle/>
-          <a:p>
-            <a:pPr marL="0" indent="0">
-              <a:buNone/>
-            </a:pPr>
-            <a:r>
-              <a:rPr lang="en-US" sz="1150" dirty="0">
-                <a:solidFill>
-                  <a:srgbClr val="475569"/>
-                </a:solidFill>
-                <a:latin typeface="Calibri" pitchFamily="34" charset="0"/>
-                <a:ea typeface="Calibri" pitchFamily="34" charset="-122"/>
-                <a:cs typeface="Calibri" pitchFamily="34" charset="-120"/>
-              </a:rPr>
-              <a:t>StandardScaler applied — normalises to zero mean and unit variance before ODIF.</a:t>
-            </a:r>
-            <a:endParaRPr lang="en-US" sz="1150" dirty="0"/>
-          </a:p>
-        </p:txBody>
-      </p:sp>
-      <p:sp>
-        <p:nvSpPr>
-          <p:cNvPr id="66" name="Text 64"/>
-          <p:cNvSpPr/>
-          <p:nvPr/>
-        </p:nvSpPr>
-        <p:spPr>
-          <a:xfrm>
-            <a:off x="5577840" y="3794760"/>
-            <a:ext cx="3063240" cy="274320"/>
-          </a:xfrm>
-          <a:prstGeom prst="rect">
-            <a:avLst/>
-          </a:prstGeom>
-          <a:noFill/>
-          <a:ln/>
-        </p:spPr>
-        <p:txBody>
-          <a:bodyPr wrap="square" rtlCol="0" anchor="ctr"/>
-          <a:lstStyle/>
-          <a:p>
-            <a:pPr marL="0" indent="0">
-              <a:buNone/>
-            </a:pPr>
-            <a:r>
-              <a:rPr lang="en-US" sz="1100" b="1" dirty="0">
-                <a:solidFill>
-                  <a:srgbClr val="14B8A6"/>
-                </a:solidFill>
-                <a:latin typeface="Consolas" pitchFamily="34" charset="0"/>
-                <a:ea typeface="Consolas" pitchFamily="34" charset="-122"/>
-                <a:cs typeface="Consolas" pitchFamily="34" charset="-120"/>
-              </a:rPr>
-              <a:t>scaler.fit_transform(X)</a:t>
-            </a:r>
-            <a:endParaRPr lang="en-US" sz="1100" dirty="0"/>
-          </a:p>
-        </p:txBody>
-      </p:sp>
-      <p:sp>
-        <p:nvSpPr>
-          <p:cNvPr id="67" name="Shape 65"/>
-          <p:cNvSpPr/>
-          <p:nvPr/>
-        </p:nvSpPr>
-        <p:spPr>
-          <a:xfrm>
-            <a:off x="365760" y="4325112"/>
-            <a:ext cx="8412480" cy="548640"/>
-          </a:xfrm>
-          <a:prstGeom prst="rect">
-            <a:avLst/>
-          </a:prstGeom>
-          <a:solidFill>
-            <a:srgbClr val="FEF9C3"/>
-          </a:solidFill>
-          <a:ln w="12700">
-            <a:solidFill>
-              <a:srgbClr val="FCD34D"/>
-            </a:solidFill>
-            <a:prstDash val="solid"/>
-          </a:ln>
-        </p:spPr>
-        <p:txBody>
-          <a:bodyPr/>
-          <a:lstStyle/>
-          <a:p>
-            <a:endParaRPr lang="en-US"/>
-          </a:p>
-        </p:txBody>
-      </p:sp>
-      <p:sp>
-        <p:nvSpPr>
-          <p:cNvPr id="68" name="Text 66"/>
-          <p:cNvSpPr/>
-          <p:nvPr/>
-        </p:nvSpPr>
-        <p:spPr>
-          <a:xfrm>
-            <a:off x="502920" y="4398264"/>
-            <a:ext cx="8138160" cy="402336"/>
-          </a:xfrm>
-          <a:prstGeom prst="rect">
-            <a:avLst/>
-          </a:prstGeom>
-          <a:noFill/>
-          <a:ln/>
-        </p:spPr>
-        <p:txBody>
-          <a:bodyPr wrap="square" rtlCol="0" anchor="ctr"/>
-          <a:lstStyle/>
-          <a:p>
-            <a:pPr marL="0" indent="0">
-              <a:buNone/>
-            </a:pPr>
-            <a:r>
-              <a:rPr lang="en-US" sz="1150" dirty="0">
-                <a:solidFill>
-                  <a:srgbClr val="92400E"/>
-                </a:solidFill>
-                <a:latin typeface="Calibri" pitchFamily="34" charset="0"/>
-                <a:ea typeface="Calibri" pitchFamily="34" charset="-122"/>
-                <a:cs typeface="Calibri" pitchFamily="34" charset="-120"/>
-              </a:rPr>
-              <a:t>⚠  16 rows had Load = 0 → efficiency undefined (division by zero). Dropped before modelling. Final dataset: 7,105 rows.</a:t>
             </a:r>
             <a:endParaRPr lang="en-US" sz="1150" dirty="0"/>
           </a:p>
@@ -16806,6 +14907,2421 @@
 
 <file path=ppt/slides/slide20.xml><?xml version="1.0" encoding="utf-8"?>
 <p:sld xmlns:a="http://schemas.openxmlformats.org/drawingml/2006/main" xmlns:r="http://schemas.openxmlformats.org/officeDocument/2006/relationships" xmlns:p="http://schemas.openxmlformats.org/presentationml/2006/main">
+  <p:cSld name="Slide 19">
+    <p:bg>
+      <p:bgPr>
+        <a:solidFill>
+          <a:srgbClr val="FFFFFF"/>
+        </a:solidFill>
+        <a:effectLst/>
+      </p:bgPr>
+    </p:bg>
+    <p:spTree>
+      <p:nvGrpSpPr>
+        <p:cNvPr id="1" name=""/>
+        <p:cNvGrpSpPr/>
+        <p:nvPr/>
+      </p:nvGrpSpPr>
+      <p:grpSpPr>
+        <a:xfrm>
+          <a:off x="0" y="0"/>
+          <a:ext cx="0" cy="0"/>
+          <a:chOff x="0" y="0"/>
+          <a:chExt cx="0" cy="0"/>
+        </a:xfrm>
+      </p:grpSpPr>
+      <p:sp>
+        <p:nvSpPr>
+          <p:cNvPr id="2" name="Shape 0"/>
+          <p:cNvSpPr/>
+          <p:nvPr/>
+        </p:nvSpPr>
+        <p:spPr>
+          <a:xfrm>
+            <a:off x="0" y="0"/>
+            <a:ext cx="9144000" cy="64008"/>
+          </a:xfrm>
+          <a:prstGeom prst="rect">
+            <a:avLst/>
+          </a:prstGeom>
+          <a:solidFill>
+            <a:srgbClr val="0D9488"/>
+          </a:solidFill>
+          <a:ln w="12700">
+            <a:solidFill>
+              <a:srgbClr val="0D9488"/>
+            </a:solidFill>
+            <a:prstDash val="solid"/>
+          </a:ln>
+        </p:spPr>
+        <p:txBody>
+          <a:bodyPr/>
+          <a:lstStyle/>
+          <a:p>
+            <a:endParaRPr lang="en-US"/>
+          </a:p>
+        </p:txBody>
+      </p:sp>
+      <p:sp>
+        <p:nvSpPr>
+          <p:cNvPr id="3" name="Text 1"/>
+          <p:cNvSpPr/>
+          <p:nvPr/>
+        </p:nvSpPr>
+        <p:spPr>
+          <a:xfrm>
+            <a:off x="457200" y="182880"/>
+            <a:ext cx="8229600" cy="548640"/>
+          </a:xfrm>
+          <a:prstGeom prst="rect">
+            <a:avLst/>
+          </a:prstGeom>
+          <a:noFill/>
+          <a:ln/>
+        </p:spPr>
+        <p:txBody>
+          <a:bodyPr wrap="square" rtlCol="0" anchor="ctr"/>
+          <a:lstStyle/>
+          <a:p>
+            <a:pPr marL="0" indent="0">
+              <a:buNone/>
+            </a:pPr>
+            <a:r>
+              <a:rPr lang="en-US" sz="2400" b="1" dirty="0">
+                <a:solidFill>
+                  <a:srgbClr val="1B2A4A"/>
+                </a:solidFill>
+                <a:latin typeface="Cambria" pitchFamily="34" charset="0"/>
+                <a:ea typeface="Cambria" pitchFamily="34" charset="-122"/>
+                <a:cs typeface="Cambria" pitchFamily="34" charset="-120"/>
+              </a:rPr>
+              <a:t>Data Distribution — January 2019 Sample  (n = 7,105)</a:t>
+            </a:r>
+            <a:endParaRPr lang="en-US" sz="2400" dirty="0"/>
+          </a:p>
+        </p:txBody>
+      </p:sp>
+      <p:sp>
+        <p:nvSpPr>
+          <p:cNvPr id="4" name="Shape 2"/>
+          <p:cNvSpPr/>
+          <p:nvPr/>
+        </p:nvSpPr>
+        <p:spPr>
+          <a:xfrm>
+            <a:off x="365760" y="841248"/>
+            <a:ext cx="1417320" cy="347472"/>
+          </a:xfrm>
+          <a:prstGeom prst="rect">
+            <a:avLst/>
+          </a:prstGeom>
+          <a:solidFill>
+            <a:srgbClr val="1B2A4A"/>
+          </a:solidFill>
+          <a:ln w="12700">
+            <a:solidFill>
+              <a:srgbClr val="1B2A4A"/>
+            </a:solidFill>
+            <a:prstDash val="solid"/>
+          </a:ln>
+        </p:spPr>
+        <p:txBody>
+          <a:bodyPr/>
+          <a:lstStyle/>
+          <a:p>
+            <a:endParaRPr lang="en-US"/>
+          </a:p>
+        </p:txBody>
+      </p:sp>
+      <p:sp>
+        <p:nvSpPr>
+          <p:cNvPr id="5" name="Text 3"/>
+          <p:cNvSpPr/>
+          <p:nvPr/>
+        </p:nvSpPr>
+        <p:spPr>
+          <a:xfrm>
+            <a:off x="420624" y="859536"/>
+            <a:ext cx="1371600" cy="292608"/>
+          </a:xfrm>
+          <a:prstGeom prst="rect">
+            <a:avLst/>
+          </a:prstGeom>
+          <a:noFill/>
+          <a:ln/>
+        </p:spPr>
+        <p:txBody>
+          <a:bodyPr wrap="square" rtlCol="0" anchor="ctr"/>
+          <a:lstStyle/>
+          <a:p>
+            <a:pPr marL="0" indent="0">
+              <a:buNone/>
+            </a:pPr>
+            <a:r>
+              <a:rPr lang="en-US" sz="1150" b="1" dirty="0">
+                <a:solidFill>
+                  <a:srgbClr val="FFFFFF"/>
+                </a:solidFill>
+                <a:latin typeface="Calibri" pitchFamily="34" charset="0"/>
+                <a:ea typeface="Calibri" pitchFamily="34" charset="-122"/>
+                <a:cs typeface="Calibri" pitchFamily="34" charset="-120"/>
+              </a:rPr>
+              <a:t>Feature</a:t>
+            </a:r>
+            <a:endParaRPr lang="en-US" sz="1150" dirty="0"/>
+          </a:p>
+        </p:txBody>
+      </p:sp>
+      <p:sp>
+        <p:nvSpPr>
+          <p:cNvPr id="6" name="Shape 4"/>
+          <p:cNvSpPr/>
+          <p:nvPr/>
+        </p:nvSpPr>
+        <p:spPr>
+          <a:xfrm>
+            <a:off x="1874520" y="841248"/>
+            <a:ext cx="1051560" cy="347472"/>
+          </a:xfrm>
+          <a:prstGeom prst="rect">
+            <a:avLst/>
+          </a:prstGeom>
+          <a:solidFill>
+            <a:srgbClr val="1B2A4A"/>
+          </a:solidFill>
+          <a:ln w="12700">
+            <a:solidFill>
+              <a:srgbClr val="1B2A4A"/>
+            </a:solidFill>
+            <a:prstDash val="solid"/>
+          </a:ln>
+        </p:spPr>
+        <p:txBody>
+          <a:bodyPr/>
+          <a:lstStyle/>
+          <a:p>
+            <a:endParaRPr lang="en-US"/>
+          </a:p>
+        </p:txBody>
+      </p:sp>
+      <p:sp>
+        <p:nvSpPr>
+          <p:cNvPr id="7" name="Text 5"/>
+          <p:cNvSpPr/>
+          <p:nvPr/>
+        </p:nvSpPr>
+        <p:spPr>
+          <a:xfrm>
+            <a:off x="1929384" y="859536"/>
+            <a:ext cx="1005840" cy="292608"/>
+          </a:xfrm>
+          <a:prstGeom prst="rect">
+            <a:avLst/>
+          </a:prstGeom>
+          <a:noFill/>
+          <a:ln/>
+        </p:spPr>
+        <p:txBody>
+          <a:bodyPr wrap="square" rtlCol="0" anchor="ctr"/>
+          <a:lstStyle/>
+          <a:p>
+            <a:pPr marL="0" indent="0">
+              <a:buNone/>
+            </a:pPr>
+            <a:r>
+              <a:rPr lang="en-US" sz="1150" b="1" dirty="0">
+                <a:solidFill>
+                  <a:srgbClr val="FFFFFF"/>
+                </a:solidFill>
+                <a:latin typeface="Calibri" pitchFamily="34" charset="0"/>
+                <a:ea typeface="Calibri" pitchFamily="34" charset="-122"/>
+                <a:cs typeface="Calibri" pitchFamily="34" charset="-120"/>
+              </a:rPr>
+              <a:t>Mean</a:t>
+            </a:r>
+            <a:endParaRPr lang="en-US" sz="1150" dirty="0"/>
+          </a:p>
+        </p:txBody>
+      </p:sp>
+      <p:sp>
+        <p:nvSpPr>
+          <p:cNvPr id="8" name="Shape 6"/>
+          <p:cNvSpPr/>
+          <p:nvPr/>
+        </p:nvSpPr>
+        <p:spPr>
+          <a:xfrm>
+            <a:off x="3017520" y="841248"/>
+            <a:ext cx="868680" cy="347472"/>
+          </a:xfrm>
+          <a:prstGeom prst="rect">
+            <a:avLst/>
+          </a:prstGeom>
+          <a:solidFill>
+            <a:srgbClr val="1B2A4A"/>
+          </a:solidFill>
+          <a:ln w="12700">
+            <a:solidFill>
+              <a:srgbClr val="1B2A4A"/>
+            </a:solidFill>
+            <a:prstDash val="solid"/>
+          </a:ln>
+        </p:spPr>
+        <p:txBody>
+          <a:bodyPr/>
+          <a:lstStyle/>
+          <a:p>
+            <a:endParaRPr lang="en-US"/>
+          </a:p>
+        </p:txBody>
+      </p:sp>
+      <p:sp>
+        <p:nvSpPr>
+          <p:cNvPr id="9" name="Text 7"/>
+          <p:cNvSpPr/>
+          <p:nvPr/>
+        </p:nvSpPr>
+        <p:spPr>
+          <a:xfrm>
+            <a:off x="3072384" y="859536"/>
+            <a:ext cx="822960" cy="292608"/>
+          </a:xfrm>
+          <a:prstGeom prst="rect">
+            <a:avLst/>
+          </a:prstGeom>
+          <a:noFill/>
+          <a:ln/>
+        </p:spPr>
+        <p:txBody>
+          <a:bodyPr wrap="square" rtlCol="0" anchor="ctr"/>
+          <a:lstStyle/>
+          <a:p>
+            <a:pPr marL="0" indent="0">
+              <a:buNone/>
+            </a:pPr>
+            <a:r>
+              <a:rPr lang="en-US" sz="1150" b="1" dirty="0">
+                <a:solidFill>
+                  <a:srgbClr val="FFFFFF"/>
+                </a:solidFill>
+                <a:latin typeface="Calibri" pitchFamily="34" charset="0"/>
+                <a:ea typeface="Calibri" pitchFamily="34" charset="-122"/>
+                <a:cs typeface="Calibri" pitchFamily="34" charset="-120"/>
+              </a:rPr>
+              <a:t>Std</a:t>
+            </a:r>
+            <a:endParaRPr lang="en-US" sz="1150" dirty="0"/>
+          </a:p>
+        </p:txBody>
+      </p:sp>
+      <p:sp>
+        <p:nvSpPr>
+          <p:cNvPr id="10" name="Shape 8"/>
+          <p:cNvSpPr/>
+          <p:nvPr/>
+        </p:nvSpPr>
+        <p:spPr>
+          <a:xfrm>
+            <a:off x="3977640" y="841248"/>
+            <a:ext cx="640080" cy="347472"/>
+          </a:xfrm>
+          <a:prstGeom prst="rect">
+            <a:avLst/>
+          </a:prstGeom>
+          <a:solidFill>
+            <a:srgbClr val="1B2A4A"/>
+          </a:solidFill>
+          <a:ln w="12700">
+            <a:solidFill>
+              <a:srgbClr val="1B2A4A"/>
+            </a:solidFill>
+            <a:prstDash val="solid"/>
+          </a:ln>
+        </p:spPr>
+        <p:txBody>
+          <a:bodyPr/>
+          <a:lstStyle/>
+          <a:p>
+            <a:endParaRPr lang="en-US"/>
+          </a:p>
+        </p:txBody>
+      </p:sp>
+      <p:sp>
+        <p:nvSpPr>
+          <p:cNvPr id="11" name="Text 9"/>
+          <p:cNvSpPr/>
+          <p:nvPr/>
+        </p:nvSpPr>
+        <p:spPr>
+          <a:xfrm>
+            <a:off x="4032504" y="859536"/>
+            <a:ext cx="594360" cy="292608"/>
+          </a:xfrm>
+          <a:prstGeom prst="rect">
+            <a:avLst/>
+          </a:prstGeom>
+          <a:noFill/>
+          <a:ln/>
+        </p:spPr>
+        <p:txBody>
+          <a:bodyPr wrap="square" rtlCol="0" anchor="ctr"/>
+          <a:lstStyle/>
+          <a:p>
+            <a:pPr marL="0" indent="0">
+              <a:buNone/>
+            </a:pPr>
+            <a:r>
+              <a:rPr lang="en-US" sz="1150" b="1" dirty="0">
+                <a:solidFill>
+                  <a:srgbClr val="FFFFFF"/>
+                </a:solidFill>
+                <a:latin typeface="Calibri" pitchFamily="34" charset="0"/>
+                <a:ea typeface="Calibri" pitchFamily="34" charset="-122"/>
+                <a:cs typeface="Calibri" pitchFamily="34" charset="-120"/>
+              </a:rPr>
+              <a:t>Skew</a:t>
+            </a:r>
+            <a:endParaRPr lang="en-US" sz="1150" dirty="0"/>
+          </a:p>
+        </p:txBody>
+      </p:sp>
+      <p:sp>
+        <p:nvSpPr>
+          <p:cNvPr id="12" name="Shape 10"/>
+          <p:cNvSpPr/>
+          <p:nvPr/>
+        </p:nvSpPr>
+        <p:spPr>
+          <a:xfrm>
+            <a:off x="4709160" y="841248"/>
+            <a:ext cx="4114800" cy="347472"/>
+          </a:xfrm>
+          <a:prstGeom prst="rect">
+            <a:avLst/>
+          </a:prstGeom>
+          <a:solidFill>
+            <a:srgbClr val="1B2A4A"/>
+          </a:solidFill>
+          <a:ln w="12700">
+            <a:solidFill>
+              <a:srgbClr val="1B2A4A"/>
+            </a:solidFill>
+            <a:prstDash val="solid"/>
+          </a:ln>
+        </p:spPr>
+        <p:txBody>
+          <a:bodyPr/>
+          <a:lstStyle/>
+          <a:p>
+            <a:endParaRPr lang="en-US"/>
+          </a:p>
+        </p:txBody>
+      </p:sp>
+      <p:sp>
+        <p:nvSpPr>
+          <p:cNvPr id="13" name="Text 11"/>
+          <p:cNvSpPr/>
+          <p:nvPr/>
+        </p:nvSpPr>
+        <p:spPr>
+          <a:xfrm>
+            <a:off x="4764024" y="859536"/>
+            <a:ext cx="4069080" cy="292608"/>
+          </a:xfrm>
+          <a:prstGeom prst="rect">
+            <a:avLst/>
+          </a:prstGeom>
+          <a:noFill/>
+          <a:ln/>
+        </p:spPr>
+        <p:txBody>
+          <a:bodyPr wrap="square" rtlCol="0" anchor="ctr"/>
+          <a:lstStyle/>
+          <a:p>
+            <a:pPr marL="0" indent="0">
+              <a:buNone/>
+            </a:pPr>
+            <a:r>
+              <a:rPr lang="en-US" sz="1150" b="1" dirty="0">
+                <a:solidFill>
+                  <a:srgbClr val="FFFFFF"/>
+                </a:solidFill>
+                <a:latin typeface="Calibri" pitchFamily="34" charset="0"/>
+                <a:ea typeface="Calibri" pitchFamily="34" charset="-122"/>
+                <a:cs typeface="Calibri" pitchFamily="34" charset="-120"/>
+              </a:rPr>
+              <a:t>Interpretation</a:t>
+            </a:r>
+            <a:endParaRPr lang="en-US" sz="1150" dirty="0"/>
+          </a:p>
+        </p:txBody>
+      </p:sp>
+      <p:sp>
+        <p:nvSpPr>
+          <p:cNvPr id="14" name="Shape 12"/>
+          <p:cNvSpPr/>
+          <p:nvPr/>
+        </p:nvSpPr>
+        <p:spPr>
+          <a:xfrm>
+            <a:off x="365760" y="1234440"/>
+            <a:ext cx="1417320" cy="429768"/>
+          </a:xfrm>
+          <a:prstGeom prst="rect">
+            <a:avLst/>
+          </a:prstGeom>
+          <a:solidFill>
+            <a:srgbClr val="F8FAFC"/>
+          </a:solidFill>
+          <a:ln w="6350">
+            <a:solidFill>
+              <a:srgbClr val="E2E8F0"/>
+            </a:solidFill>
+            <a:prstDash val="solid"/>
+          </a:ln>
+        </p:spPr>
+        <p:txBody>
+          <a:bodyPr/>
+          <a:lstStyle/>
+          <a:p>
+            <a:endParaRPr lang="en-US"/>
+          </a:p>
+        </p:txBody>
+      </p:sp>
+      <p:sp>
+        <p:nvSpPr>
+          <p:cNvPr id="15" name="Text 13"/>
+          <p:cNvSpPr/>
+          <p:nvPr/>
+        </p:nvSpPr>
+        <p:spPr>
+          <a:xfrm>
+            <a:off x="420624" y="1280160"/>
+            <a:ext cx="1371600" cy="329184"/>
+          </a:xfrm>
+          <a:prstGeom prst="rect">
+            <a:avLst/>
+          </a:prstGeom>
+          <a:noFill/>
+          <a:ln/>
+        </p:spPr>
+        <p:txBody>
+          <a:bodyPr wrap="square" rtlCol="0" anchor="ctr"/>
+          <a:lstStyle/>
+          <a:p>
+            <a:pPr marL="0" indent="0">
+              <a:buNone/>
+            </a:pPr>
+            <a:r>
+              <a:rPr lang="en-US" sz="1100" b="1" dirty="0">
+                <a:solidFill>
+                  <a:srgbClr val="1B2A4A"/>
+                </a:solidFill>
+                <a:latin typeface="Consolas" pitchFamily="34" charset="0"/>
+                <a:ea typeface="Consolas" pitchFamily="34" charset="-122"/>
+                <a:cs typeface="Consolas" pitchFamily="34" charset="-120"/>
+              </a:rPr>
+              <a:t>Units</a:t>
+            </a:r>
+            <a:endParaRPr lang="en-US" sz="1100" dirty="0"/>
+          </a:p>
+        </p:txBody>
+      </p:sp>
+      <p:sp>
+        <p:nvSpPr>
+          <p:cNvPr id="16" name="Shape 14"/>
+          <p:cNvSpPr/>
+          <p:nvPr/>
+        </p:nvSpPr>
+        <p:spPr>
+          <a:xfrm>
+            <a:off x="1874520" y="1234440"/>
+            <a:ext cx="1051560" cy="429768"/>
+          </a:xfrm>
+          <a:prstGeom prst="rect">
+            <a:avLst/>
+          </a:prstGeom>
+          <a:solidFill>
+            <a:srgbClr val="F8FAFC"/>
+          </a:solidFill>
+          <a:ln w="6350">
+            <a:solidFill>
+              <a:srgbClr val="E2E8F0"/>
+            </a:solidFill>
+            <a:prstDash val="solid"/>
+          </a:ln>
+        </p:spPr>
+        <p:txBody>
+          <a:bodyPr/>
+          <a:lstStyle/>
+          <a:p>
+            <a:endParaRPr lang="en-US"/>
+          </a:p>
+        </p:txBody>
+      </p:sp>
+      <p:sp>
+        <p:nvSpPr>
+          <p:cNvPr id="17" name="Text 15"/>
+          <p:cNvSpPr/>
+          <p:nvPr/>
+        </p:nvSpPr>
+        <p:spPr>
+          <a:xfrm>
+            <a:off x="1929384" y="1280160"/>
+            <a:ext cx="1005840" cy="329184"/>
+          </a:xfrm>
+          <a:prstGeom prst="rect">
+            <a:avLst/>
+          </a:prstGeom>
+          <a:noFill/>
+          <a:ln/>
+        </p:spPr>
+        <p:txBody>
+          <a:bodyPr wrap="square" rtlCol="0" anchor="ctr"/>
+          <a:lstStyle/>
+          <a:p>
+            <a:pPr marL="0" indent="0">
+              <a:buNone/>
+            </a:pPr>
+            <a:r>
+              <a:rPr lang="en-US" sz="1100" dirty="0">
+                <a:solidFill>
+                  <a:srgbClr val="475569"/>
+                </a:solidFill>
+                <a:latin typeface="Calibri" pitchFamily="34" charset="0"/>
+                <a:ea typeface="Calibri" pitchFamily="34" charset="-122"/>
+                <a:cs typeface="Calibri" pitchFamily="34" charset="-120"/>
+              </a:rPr>
+              <a:t>561.88</a:t>
+            </a:r>
+            <a:endParaRPr lang="en-US" sz="1100" dirty="0"/>
+          </a:p>
+        </p:txBody>
+      </p:sp>
+      <p:sp>
+        <p:nvSpPr>
+          <p:cNvPr id="18" name="Shape 16"/>
+          <p:cNvSpPr/>
+          <p:nvPr/>
+        </p:nvSpPr>
+        <p:spPr>
+          <a:xfrm>
+            <a:off x="3017520" y="1234440"/>
+            <a:ext cx="868680" cy="429768"/>
+          </a:xfrm>
+          <a:prstGeom prst="rect">
+            <a:avLst/>
+          </a:prstGeom>
+          <a:solidFill>
+            <a:srgbClr val="F8FAFC"/>
+          </a:solidFill>
+          <a:ln w="6350">
+            <a:solidFill>
+              <a:srgbClr val="E2E8F0"/>
+            </a:solidFill>
+            <a:prstDash val="solid"/>
+          </a:ln>
+        </p:spPr>
+        <p:txBody>
+          <a:bodyPr/>
+          <a:lstStyle/>
+          <a:p>
+            <a:endParaRPr lang="en-US"/>
+          </a:p>
+        </p:txBody>
+      </p:sp>
+      <p:sp>
+        <p:nvSpPr>
+          <p:cNvPr id="19" name="Text 17"/>
+          <p:cNvSpPr/>
+          <p:nvPr/>
+        </p:nvSpPr>
+        <p:spPr>
+          <a:xfrm>
+            <a:off x="3072384" y="1280160"/>
+            <a:ext cx="822960" cy="329184"/>
+          </a:xfrm>
+          <a:prstGeom prst="rect">
+            <a:avLst/>
+          </a:prstGeom>
+          <a:noFill/>
+          <a:ln/>
+        </p:spPr>
+        <p:txBody>
+          <a:bodyPr wrap="square" rtlCol="0" anchor="ctr"/>
+          <a:lstStyle/>
+          <a:p>
+            <a:pPr marL="0" indent="0">
+              <a:buNone/>
+            </a:pPr>
+            <a:r>
+              <a:rPr lang="en-US" sz="1100" dirty="0">
+                <a:solidFill>
+                  <a:srgbClr val="475569"/>
+                </a:solidFill>
+                <a:latin typeface="Calibri" pitchFamily="34" charset="0"/>
+                <a:ea typeface="Calibri" pitchFamily="34" charset="-122"/>
+                <a:cs typeface="Calibri" pitchFamily="34" charset="-120"/>
+              </a:rPr>
+              <a:t>2396</a:t>
+            </a:r>
+            <a:endParaRPr lang="en-US" sz="1100" dirty="0"/>
+          </a:p>
+        </p:txBody>
+      </p:sp>
+      <p:sp>
+        <p:nvSpPr>
+          <p:cNvPr id="20" name="Shape 18"/>
+          <p:cNvSpPr/>
+          <p:nvPr/>
+        </p:nvSpPr>
+        <p:spPr>
+          <a:xfrm>
+            <a:off x="3977640" y="1234440"/>
+            <a:ext cx="640080" cy="429768"/>
+          </a:xfrm>
+          <a:prstGeom prst="rect">
+            <a:avLst/>
+          </a:prstGeom>
+          <a:solidFill>
+            <a:srgbClr val="F8FAFC"/>
+          </a:solidFill>
+          <a:ln w="6350">
+            <a:solidFill>
+              <a:srgbClr val="E2E8F0"/>
+            </a:solidFill>
+            <a:prstDash val="solid"/>
+          </a:ln>
+        </p:spPr>
+        <p:txBody>
+          <a:bodyPr/>
+          <a:lstStyle/>
+          <a:p>
+            <a:endParaRPr lang="en-US"/>
+          </a:p>
+        </p:txBody>
+      </p:sp>
+      <p:sp>
+        <p:nvSpPr>
+          <p:cNvPr id="21" name="Text 19"/>
+          <p:cNvSpPr/>
+          <p:nvPr/>
+        </p:nvSpPr>
+        <p:spPr>
+          <a:xfrm>
+            <a:off x="4032504" y="1280160"/>
+            <a:ext cx="594360" cy="329184"/>
+          </a:xfrm>
+          <a:prstGeom prst="rect">
+            <a:avLst/>
+          </a:prstGeom>
+          <a:noFill/>
+          <a:ln/>
+        </p:spPr>
+        <p:txBody>
+          <a:bodyPr wrap="square" rtlCol="0" anchor="ctr"/>
+          <a:lstStyle/>
+          <a:p>
+            <a:pPr marL="0" indent="0">
+              <a:buNone/>
+            </a:pPr>
+            <a:r>
+              <a:rPr lang="en-US" sz="1100" dirty="0">
+                <a:solidFill>
+                  <a:srgbClr val="475569"/>
+                </a:solidFill>
+                <a:latin typeface="Calibri" pitchFamily="34" charset="0"/>
+                <a:ea typeface="Calibri" pitchFamily="34" charset="-122"/>
+                <a:cs typeface="Calibri" pitchFamily="34" charset="-120"/>
+              </a:rPr>
+              <a:t>9.41</a:t>
+            </a:r>
+            <a:endParaRPr lang="en-US" sz="1100" dirty="0"/>
+          </a:p>
+        </p:txBody>
+      </p:sp>
+      <p:sp>
+        <p:nvSpPr>
+          <p:cNvPr id="22" name="Shape 20"/>
+          <p:cNvSpPr/>
+          <p:nvPr/>
+        </p:nvSpPr>
+        <p:spPr>
+          <a:xfrm>
+            <a:off x="4709160" y="1234440"/>
+            <a:ext cx="4114800" cy="429768"/>
+          </a:xfrm>
+          <a:prstGeom prst="rect">
+            <a:avLst/>
+          </a:prstGeom>
+          <a:solidFill>
+            <a:srgbClr val="F8FAFC"/>
+          </a:solidFill>
+          <a:ln w="6350">
+            <a:solidFill>
+              <a:srgbClr val="E2E8F0"/>
+            </a:solidFill>
+            <a:prstDash val="solid"/>
+          </a:ln>
+        </p:spPr>
+        <p:txBody>
+          <a:bodyPr/>
+          <a:lstStyle/>
+          <a:p>
+            <a:endParaRPr lang="en-US"/>
+          </a:p>
+        </p:txBody>
+      </p:sp>
+      <p:sp>
+        <p:nvSpPr>
+          <p:cNvPr id="23" name="Text 21"/>
+          <p:cNvSpPr/>
+          <p:nvPr/>
+        </p:nvSpPr>
+        <p:spPr>
+          <a:xfrm>
+            <a:off x="4764024" y="1280160"/>
+            <a:ext cx="4069080" cy="329184"/>
+          </a:xfrm>
+          <a:prstGeom prst="rect">
+            <a:avLst/>
+          </a:prstGeom>
+          <a:noFill/>
+          <a:ln/>
+        </p:spPr>
+        <p:txBody>
+          <a:bodyPr wrap="square" rtlCol="0" anchor="ctr"/>
+          <a:lstStyle/>
+          <a:p>
+            <a:pPr marL="0" indent="0">
+              <a:buNone/>
+            </a:pPr>
+            <a:r>
+              <a:rPr lang="en-US" sz="1100" dirty="0">
+                <a:solidFill>
+                  <a:srgbClr val="475569"/>
+                </a:solidFill>
+                <a:latin typeface="Calibri" pitchFamily="34" charset="0"/>
+                <a:ea typeface="Calibri" pitchFamily="34" charset="-122"/>
+                <a:cs typeface="Calibri" pitchFamily="34" charset="-120"/>
+              </a:rPr>
+              <a:t>Heavy right skew — extreme high-consumption outliers present</a:t>
+            </a:r>
+            <a:endParaRPr lang="en-US" sz="1100" dirty="0"/>
+          </a:p>
+        </p:txBody>
+      </p:sp>
+      <p:sp>
+        <p:nvSpPr>
+          <p:cNvPr id="24" name="Shape 22"/>
+          <p:cNvSpPr/>
+          <p:nvPr/>
+        </p:nvSpPr>
+        <p:spPr>
+          <a:xfrm>
+            <a:off x="365760" y="1709928"/>
+            <a:ext cx="1417320" cy="429768"/>
+          </a:xfrm>
+          <a:prstGeom prst="rect">
+            <a:avLst/>
+          </a:prstGeom>
+          <a:solidFill>
+            <a:srgbClr val="FFFFFF"/>
+          </a:solidFill>
+          <a:ln w="6350">
+            <a:solidFill>
+              <a:srgbClr val="E2E8F0"/>
+            </a:solidFill>
+            <a:prstDash val="solid"/>
+          </a:ln>
+        </p:spPr>
+        <p:txBody>
+          <a:bodyPr/>
+          <a:lstStyle/>
+          <a:p>
+            <a:endParaRPr lang="en-US"/>
+          </a:p>
+        </p:txBody>
+      </p:sp>
+      <p:sp>
+        <p:nvSpPr>
+          <p:cNvPr id="25" name="Text 23"/>
+          <p:cNvSpPr/>
+          <p:nvPr/>
+        </p:nvSpPr>
+        <p:spPr>
+          <a:xfrm>
+            <a:off x="420624" y="1755648"/>
+            <a:ext cx="1371600" cy="329184"/>
+          </a:xfrm>
+          <a:prstGeom prst="rect">
+            <a:avLst/>
+          </a:prstGeom>
+          <a:noFill/>
+          <a:ln/>
+        </p:spPr>
+        <p:txBody>
+          <a:bodyPr wrap="square" rtlCol="0" anchor="ctr"/>
+          <a:lstStyle/>
+          <a:p>
+            <a:pPr marL="0" indent="0">
+              <a:buNone/>
+            </a:pPr>
+            <a:r>
+              <a:rPr lang="en-US" sz="1100" b="1" dirty="0">
+                <a:solidFill>
+                  <a:srgbClr val="1B2A4A"/>
+                </a:solidFill>
+                <a:latin typeface="Consolas" pitchFamily="34" charset="0"/>
+                <a:ea typeface="Consolas" pitchFamily="34" charset="-122"/>
+                <a:cs typeface="Consolas" pitchFamily="34" charset="-120"/>
+              </a:rPr>
+              <a:t>Load</a:t>
+            </a:r>
+            <a:endParaRPr lang="en-US" sz="1100" dirty="0"/>
+          </a:p>
+        </p:txBody>
+      </p:sp>
+      <p:sp>
+        <p:nvSpPr>
+          <p:cNvPr id="26" name="Shape 24"/>
+          <p:cNvSpPr/>
+          <p:nvPr/>
+        </p:nvSpPr>
+        <p:spPr>
+          <a:xfrm>
+            <a:off x="1874520" y="1709928"/>
+            <a:ext cx="1051560" cy="429768"/>
+          </a:xfrm>
+          <a:prstGeom prst="rect">
+            <a:avLst/>
+          </a:prstGeom>
+          <a:solidFill>
+            <a:srgbClr val="FFFFFF"/>
+          </a:solidFill>
+          <a:ln w="6350">
+            <a:solidFill>
+              <a:srgbClr val="E2E8F0"/>
+            </a:solidFill>
+            <a:prstDash val="solid"/>
+          </a:ln>
+        </p:spPr>
+        <p:txBody>
+          <a:bodyPr/>
+          <a:lstStyle/>
+          <a:p>
+            <a:endParaRPr lang="en-US"/>
+          </a:p>
+        </p:txBody>
+      </p:sp>
+      <p:sp>
+        <p:nvSpPr>
+          <p:cNvPr id="27" name="Text 25"/>
+          <p:cNvSpPr/>
+          <p:nvPr/>
+        </p:nvSpPr>
+        <p:spPr>
+          <a:xfrm>
+            <a:off x="1929384" y="1755648"/>
+            <a:ext cx="1005840" cy="329184"/>
+          </a:xfrm>
+          <a:prstGeom prst="rect">
+            <a:avLst/>
+          </a:prstGeom>
+          <a:noFill/>
+          <a:ln/>
+        </p:spPr>
+        <p:txBody>
+          <a:bodyPr wrap="square" rtlCol="0" anchor="ctr"/>
+          <a:lstStyle/>
+          <a:p>
+            <a:pPr marL="0" indent="0">
+              <a:buNone/>
+            </a:pPr>
+            <a:r>
+              <a:rPr lang="en-US" sz="1100" dirty="0">
+                <a:solidFill>
+                  <a:srgbClr val="475569"/>
+                </a:solidFill>
+                <a:latin typeface="Calibri" pitchFamily="34" charset="0"/>
+                <a:ea typeface="Calibri" pitchFamily="34" charset="-122"/>
+                <a:cs typeface="Calibri" pitchFamily="34" charset="-120"/>
+              </a:rPr>
+              <a:t>6.03</a:t>
+            </a:r>
+            <a:endParaRPr lang="en-US" sz="1100" dirty="0"/>
+          </a:p>
+        </p:txBody>
+      </p:sp>
+      <p:sp>
+        <p:nvSpPr>
+          <p:cNvPr id="28" name="Shape 26"/>
+          <p:cNvSpPr/>
+          <p:nvPr/>
+        </p:nvSpPr>
+        <p:spPr>
+          <a:xfrm>
+            <a:off x="3017520" y="1709928"/>
+            <a:ext cx="868680" cy="429768"/>
+          </a:xfrm>
+          <a:prstGeom prst="rect">
+            <a:avLst/>
+          </a:prstGeom>
+          <a:solidFill>
+            <a:srgbClr val="FFFFFF"/>
+          </a:solidFill>
+          <a:ln w="6350">
+            <a:solidFill>
+              <a:srgbClr val="E2E8F0"/>
+            </a:solidFill>
+            <a:prstDash val="solid"/>
+          </a:ln>
+        </p:spPr>
+        <p:txBody>
+          <a:bodyPr/>
+          <a:lstStyle/>
+          <a:p>
+            <a:endParaRPr lang="en-US"/>
+          </a:p>
+        </p:txBody>
+      </p:sp>
+      <p:sp>
+        <p:nvSpPr>
+          <p:cNvPr id="29" name="Text 27"/>
+          <p:cNvSpPr/>
+          <p:nvPr/>
+        </p:nvSpPr>
+        <p:spPr>
+          <a:xfrm>
+            <a:off x="3072384" y="1755648"/>
+            <a:ext cx="822960" cy="329184"/>
+          </a:xfrm>
+          <a:prstGeom prst="rect">
+            <a:avLst/>
+          </a:prstGeom>
+          <a:noFill/>
+          <a:ln/>
+        </p:spPr>
+        <p:txBody>
+          <a:bodyPr wrap="square" rtlCol="0" anchor="ctr"/>
+          <a:lstStyle/>
+          <a:p>
+            <a:pPr marL="0" indent="0">
+              <a:buNone/>
+            </a:pPr>
+            <a:r>
+              <a:rPr lang="en-US" sz="1100" dirty="0">
+                <a:solidFill>
+                  <a:srgbClr val="475569"/>
+                </a:solidFill>
+                <a:latin typeface="Calibri" pitchFamily="34" charset="0"/>
+                <a:ea typeface="Calibri" pitchFamily="34" charset="-122"/>
+                <a:cs typeface="Calibri" pitchFamily="34" charset="-120"/>
+              </a:rPr>
+              <a:t>19.87</a:t>
+            </a:r>
+            <a:endParaRPr lang="en-US" sz="1100" dirty="0"/>
+          </a:p>
+        </p:txBody>
+      </p:sp>
+      <p:sp>
+        <p:nvSpPr>
+          <p:cNvPr id="30" name="Shape 28"/>
+          <p:cNvSpPr/>
+          <p:nvPr/>
+        </p:nvSpPr>
+        <p:spPr>
+          <a:xfrm>
+            <a:off x="3977640" y="1709928"/>
+            <a:ext cx="640080" cy="429768"/>
+          </a:xfrm>
+          <a:prstGeom prst="rect">
+            <a:avLst/>
+          </a:prstGeom>
+          <a:solidFill>
+            <a:srgbClr val="FFFFFF"/>
+          </a:solidFill>
+          <a:ln w="6350">
+            <a:solidFill>
+              <a:srgbClr val="E2E8F0"/>
+            </a:solidFill>
+            <a:prstDash val="solid"/>
+          </a:ln>
+        </p:spPr>
+        <p:txBody>
+          <a:bodyPr/>
+          <a:lstStyle/>
+          <a:p>
+            <a:endParaRPr lang="en-US"/>
+          </a:p>
+        </p:txBody>
+      </p:sp>
+      <p:sp>
+        <p:nvSpPr>
+          <p:cNvPr id="31" name="Text 29"/>
+          <p:cNvSpPr/>
+          <p:nvPr/>
+        </p:nvSpPr>
+        <p:spPr>
+          <a:xfrm>
+            <a:off x="4032504" y="1755648"/>
+            <a:ext cx="594360" cy="329184"/>
+          </a:xfrm>
+          <a:prstGeom prst="rect">
+            <a:avLst/>
+          </a:prstGeom>
+          <a:noFill/>
+          <a:ln/>
+        </p:spPr>
+        <p:txBody>
+          <a:bodyPr wrap="square" rtlCol="0" anchor="ctr"/>
+          <a:lstStyle/>
+          <a:p>
+            <a:pPr marL="0" indent="0">
+              <a:buNone/>
+            </a:pPr>
+            <a:r>
+              <a:rPr lang="en-US" sz="1100" dirty="0">
+                <a:solidFill>
+                  <a:srgbClr val="475569"/>
+                </a:solidFill>
+                <a:latin typeface="Calibri" pitchFamily="34" charset="0"/>
+                <a:ea typeface="Calibri" pitchFamily="34" charset="-122"/>
+                <a:cs typeface="Calibri" pitchFamily="34" charset="-120"/>
+              </a:rPr>
+              <a:t>9.38</a:t>
+            </a:r>
+            <a:endParaRPr lang="en-US" sz="1100" dirty="0"/>
+          </a:p>
+        </p:txBody>
+      </p:sp>
+      <p:sp>
+        <p:nvSpPr>
+          <p:cNvPr id="32" name="Shape 30"/>
+          <p:cNvSpPr/>
+          <p:nvPr/>
+        </p:nvSpPr>
+        <p:spPr>
+          <a:xfrm>
+            <a:off x="4709160" y="1709928"/>
+            <a:ext cx="4114800" cy="429768"/>
+          </a:xfrm>
+          <a:prstGeom prst="rect">
+            <a:avLst/>
+          </a:prstGeom>
+          <a:solidFill>
+            <a:srgbClr val="FFFFFF"/>
+          </a:solidFill>
+          <a:ln w="6350">
+            <a:solidFill>
+              <a:srgbClr val="E2E8F0"/>
+            </a:solidFill>
+            <a:prstDash val="solid"/>
+          </a:ln>
+        </p:spPr>
+        <p:txBody>
+          <a:bodyPr/>
+          <a:lstStyle/>
+          <a:p>
+            <a:endParaRPr lang="en-US"/>
+          </a:p>
+        </p:txBody>
+      </p:sp>
+      <p:sp>
+        <p:nvSpPr>
+          <p:cNvPr id="33" name="Text 31"/>
+          <p:cNvSpPr/>
+          <p:nvPr/>
+        </p:nvSpPr>
+        <p:spPr>
+          <a:xfrm>
+            <a:off x="4764024" y="1755648"/>
+            <a:ext cx="4069080" cy="329184"/>
+          </a:xfrm>
+          <a:prstGeom prst="rect">
+            <a:avLst/>
+          </a:prstGeom>
+          <a:noFill/>
+          <a:ln/>
+        </p:spPr>
+        <p:txBody>
+          <a:bodyPr wrap="square" rtlCol="0" anchor="ctr"/>
+          <a:lstStyle/>
+          <a:p>
+            <a:pPr marL="0" indent="0">
+              <a:buNone/>
+            </a:pPr>
+            <a:r>
+              <a:rPr lang="en-US" sz="1100" dirty="0">
+                <a:solidFill>
+                  <a:srgbClr val="475569"/>
+                </a:solidFill>
+                <a:latin typeface="Calibri" pitchFamily="34" charset="0"/>
+                <a:ea typeface="Calibri" pitchFamily="34" charset="-122"/>
+                <a:cs typeface="Calibri" pitchFamily="34" charset="-120"/>
+              </a:rPr>
+              <a:t>Same pattern as Units — correlated extreme tails</a:t>
+            </a:r>
+            <a:endParaRPr lang="en-US" sz="1100" dirty="0"/>
+          </a:p>
+        </p:txBody>
+      </p:sp>
+      <p:sp>
+        <p:nvSpPr>
+          <p:cNvPr id="34" name="Shape 32"/>
+          <p:cNvSpPr/>
+          <p:nvPr/>
+        </p:nvSpPr>
+        <p:spPr>
+          <a:xfrm>
+            <a:off x="365760" y="2185416"/>
+            <a:ext cx="1417320" cy="429768"/>
+          </a:xfrm>
+          <a:prstGeom prst="rect">
+            <a:avLst/>
+          </a:prstGeom>
+          <a:solidFill>
+            <a:srgbClr val="F8FAFC"/>
+          </a:solidFill>
+          <a:ln w="6350">
+            <a:solidFill>
+              <a:srgbClr val="E2E8F0"/>
+            </a:solidFill>
+            <a:prstDash val="solid"/>
+          </a:ln>
+        </p:spPr>
+        <p:txBody>
+          <a:bodyPr/>
+          <a:lstStyle/>
+          <a:p>
+            <a:endParaRPr lang="en-US"/>
+          </a:p>
+        </p:txBody>
+      </p:sp>
+      <p:sp>
+        <p:nvSpPr>
+          <p:cNvPr id="35" name="Text 33"/>
+          <p:cNvSpPr/>
+          <p:nvPr/>
+        </p:nvSpPr>
+        <p:spPr>
+          <a:xfrm>
+            <a:off x="420624" y="2231136"/>
+            <a:ext cx="1371600" cy="329184"/>
+          </a:xfrm>
+          <a:prstGeom prst="rect">
+            <a:avLst/>
+          </a:prstGeom>
+          <a:noFill/>
+          <a:ln/>
+        </p:spPr>
+        <p:txBody>
+          <a:bodyPr wrap="square" rtlCol="0" anchor="ctr"/>
+          <a:lstStyle/>
+          <a:p>
+            <a:pPr marL="0" indent="0">
+              <a:buNone/>
+            </a:pPr>
+            <a:r>
+              <a:rPr lang="en-US" sz="1100" b="1" dirty="0">
+                <a:solidFill>
+                  <a:srgbClr val="1B2A4A"/>
+                </a:solidFill>
+                <a:latin typeface="Consolas" pitchFamily="34" charset="0"/>
+                <a:ea typeface="Consolas" pitchFamily="34" charset="-122"/>
+                <a:cs typeface="Consolas" pitchFamily="34" charset="-120"/>
+              </a:rPr>
+              <a:t>billing_rate</a:t>
+            </a:r>
+            <a:endParaRPr lang="en-US" sz="1100" dirty="0"/>
+          </a:p>
+        </p:txBody>
+      </p:sp>
+      <p:sp>
+        <p:nvSpPr>
+          <p:cNvPr id="36" name="Shape 34"/>
+          <p:cNvSpPr/>
+          <p:nvPr/>
+        </p:nvSpPr>
+        <p:spPr>
+          <a:xfrm>
+            <a:off x="1874520" y="2185416"/>
+            <a:ext cx="1051560" cy="429768"/>
+          </a:xfrm>
+          <a:prstGeom prst="rect">
+            <a:avLst/>
+          </a:prstGeom>
+          <a:solidFill>
+            <a:srgbClr val="F8FAFC"/>
+          </a:solidFill>
+          <a:ln w="6350">
+            <a:solidFill>
+              <a:srgbClr val="E2E8F0"/>
+            </a:solidFill>
+            <a:prstDash val="solid"/>
+          </a:ln>
+        </p:spPr>
+        <p:txBody>
+          <a:bodyPr/>
+          <a:lstStyle/>
+          <a:p>
+            <a:endParaRPr lang="en-US"/>
+          </a:p>
+        </p:txBody>
+      </p:sp>
+      <p:sp>
+        <p:nvSpPr>
+          <p:cNvPr id="37" name="Text 35"/>
+          <p:cNvSpPr/>
+          <p:nvPr/>
+        </p:nvSpPr>
+        <p:spPr>
+          <a:xfrm>
+            <a:off x="1929384" y="2231136"/>
+            <a:ext cx="1005840" cy="329184"/>
+          </a:xfrm>
+          <a:prstGeom prst="rect">
+            <a:avLst/>
+          </a:prstGeom>
+          <a:noFill/>
+          <a:ln/>
+        </p:spPr>
+        <p:txBody>
+          <a:bodyPr wrap="square" rtlCol="0" anchor="ctr"/>
+          <a:lstStyle/>
+          <a:p>
+            <a:pPr marL="0" indent="0">
+              <a:buNone/>
+            </a:pPr>
+            <a:r>
+              <a:rPr lang="en-US" sz="1100" dirty="0">
+                <a:solidFill>
+                  <a:srgbClr val="475569"/>
+                </a:solidFill>
+                <a:latin typeface="Calibri" pitchFamily="34" charset="0"/>
+                <a:ea typeface="Calibri" pitchFamily="34" charset="-122"/>
+                <a:cs typeface="Calibri" pitchFamily="34" charset="-120"/>
+              </a:rPr>
+              <a:t>0.62</a:t>
+            </a:r>
+            <a:endParaRPr lang="en-US" sz="1100" dirty="0"/>
+          </a:p>
+        </p:txBody>
+      </p:sp>
+      <p:sp>
+        <p:nvSpPr>
+          <p:cNvPr id="38" name="Shape 36"/>
+          <p:cNvSpPr/>
+          <p:nvPr/>
+        </p:nvSpPr>
+        <p:spPr>
+          <a:xfrm>
+            <a:off x="3017520" y="2185416"/>
+            <a:ext cx="868680" cy="429768"/>
+          </a:xfrm>
+          <a:prstGeom prst="rect">
+            <a:avLst/>
+          </a:prstGeom>
+          <a:solidFill>
+            <a:srgbClr val="F8FAFC"/>
+          </a:solidFill>
+          <a:ln w="6350">
+            <a:solidFill>
+              <a:srgbClr val="E2E8F0"/>
+            </a:solidFill>
+            <a:prstDash val="solid"/>
+          </a:ln>
+        </p:spPr>
+        <p:txBody>
+          <a:bodyPr/>
+          <a:lstStyle/>
+          <a:p>
+            <a:endParaRPr lang="en-US"/>
+          </a:p>
+        </p:txBody>
+      </p:sp>
+      <p:sp>
+        <p:nvSpPr>
+          <p:cNvPr id="39" name="Text 37"/>
+          <p:cNvSpPr/>
+          <p:nvPr/>
+        </p:nvSpPr>
+        <p:spPr>
+          <a:xfrm>
+            <a:off x="3072384" y="2231136"/>
+            <a:ext cx="822960" cy="329184"/>
+          </a:xfrm>
+          <a:prstGeom prst="rect">
+            <a:avLst/>
+          </a:prstGeom>
+          <a:noFill/>
+          <a:ln/>
+        </p:spPr>
+        <p:txBody>
+          <a:bodyPr wrap="square" rtlCol="0" anchor="ctr"/>
+          <a:lstStyle/>
+          <a:p>
+            <a:pPr marL="0" indent="0">
+              <a:buNone/>
+            </a:pPr>
+            <a:r>
+              <a:rPr lang="en-US" sz="1100" dirty="0">
+                <a:solidFill>
+                  <a:srgbClr val="475569"/>
+                </a:solidFill>
+                <a:latin typeface="Calibri" pitchFamily="34" charset="0"/>
+                <a:ea typeface="Calibri" pitchFamily="34" charset="-122"/>
+                <a:cs typeface="Calibri" pitchFamily="34" charset="-120"/>
+              </a:rPr>
+              <a:t>0.43</a:t>
+            </a:r>
+            <a:endParaRPr lang="en-US" sz="1100" dirty="0"/>
+          </a:p>
+        </p:txBody>
+      </p:sp>
+      <p:sp>
+        <p:nvSpPr>
+          <p:cNvPr id="40" name="Shape 38"/>
+          <p:cNvSpPr/>
+          <p:nvPr/>
+        </p:nvSpPr>
+        <p:spPr>
+          <a:xfrm>
+            <a:off x="3977640" y="2185416"/>
+            <a:ext cx="640080" cy="429768"/>
+          </a:xfrm>
+          <a:prstGeom prst="rect">
+            <a:avLst/>
+          </a:prstGeom>
+          <a:solidFill>
+            <a:srgbClr val="F8FAFC"/>
+          </a:solidFill>
+          <a:ln w="6350">
+            <a:solidFill>
+              <a:srgbClr val="E2E8F0"/>
+            </a:solidFill>
+            <a:prstDash val="solid"/>
+          </a:ln>
+        </p:spPr>
+        <p:txBody>
+          <a:bodyPr/>
+          <a:lstStyle/>
+          <a:p>
+            <a:endParaRPr lang="en-US"/>
+          </a:p>
+        </p:txBody>
+      </p:sp>
+      <p:sp>
+        <p:nvSpPr>
+          <p:cNvPr id="41" name="Text 39"/>
+          <p:cNvSpPr/>
+          <p:nvPr/>
+        </p:nvSpPr>
+        <p:spPr>
+          <a:xfrm>
+            <a:off x="4032504" y="2231136"/>
+            <a:ext cx="594360" cy="329184"/>
+          </a:xfrm>
+          <a:prstGeom prst="rect">
+            <a:avLst/>
+          </a:prstGeom>
+          <a:noFill/>
+          <a:ln/>
+        </p:spPr>
+        <p:txBody>
+          <a:bodyPr wrap="square" rtlCol="0" anchor="ctr"/>
+          <a:lstStyle/>
+          <a:p>
+            <a:pPr marL="0" indent="0">
+              <a:buNone/>
+            </a:pPr>
+            <a:r>
+              <a:rPr lang="en-US" sz="1100" dirty="0">
+                <a:solidFill>
+                  <a:srgbClr val="475569"/>
+                </a:solidFill>
+                <a:latin typeface="Calibri" pitchFamily="34" charset="0"/>
+                <a:ea typeface="Calibri" pitchFamily="34" charset="-122"/>
+                <a:cs typeface="Calibri" pitchFamily="34" charset="-120"/>
+              </a:rPr>
+              <a:t>−0.55</a:t>
+            </a:r>
+            <a:endParaRPr lang="en-US" sz="1100" dirty="0"/>
+          </a:p>
+        </p:txBody>
+      </p:sp>
+      <p:sp>
+        <p:nvSpPr>
+          <p:cNvPr id="42" name="Shape 40"/>
+          <p:cNvSpPr/>
+          <p:nvPr/>
+        </p:nvSpPr>
+        <p:spPr>
+          <a:xfrm>
+            <a:off x="4709160" y="2185416"/>
+            <a:ext cx="4114800" cy="429768"/>
+          </a:xfrm>
+          <a:prstGeom prst="rect">
+            <a:avLst/>
+          </a:prstGeom>
+          <a:solidFill>
+            <a:srgbClr val="F8FAFC"/>
+          </a:solidFill>
+          <a:ln w="6350">
+            <a:solidFill>
+              <a:srgbClr val="E2E8F0"/>
+            </a:solidFill>
+            <a:prstDash val="solid"/>
+          </a:ln>
+        </p:spPr>
+        <p:txBody>
+          <a:bodyPr/>
+          <a:lstStyle/>
+          <a:p>
+            <a:endParaRPr lang="en-US"/>
+          </a:p>
+        </p:txBody>
+      </p:sp>
+      <p:sp>
+        <p:nvSpPr>
+          <p:cNvPr id="43" name="Text 41"/>
+          <p:cNvSpPr/>
+          <p:nvPr/>
+        </p:nvSpPr>
+        <p:spPr>
+          <a:xfrm>
+            <a:off x="4764024" y="2231136"/>
+            <a:ext cx="4069080" cy="329184"/>
+          </a:xfrm>
+          <a:prstGeom prst="rect">
+            <a:avLst/>
+          </a:prstGeom>
+          <a:noFill/>
+          <a:ln/>
+        </p:spPr>
+        <p:txBody>
+          <a:bodyPr wrap="square" rtlCol="0" anchor="ctr"/>
+          <a:lstStyle/>
+          <a:p>
+            <a:pPr marL="0" indent="0">
+              <a:buNone/>
+            </a:pPr>
+            <a:r>
+              <a:rPr lang="en-US" sz="1100" dirty="0">
+                <a:solidFill>
+                  <a:srgbClr val="475569"/>
+                </a:solidFill>
+                <a:latin typeface="Calibri" pitchFamily="34" charset="0"/>
+                <a:ea typeface="Calibri" pitchFamily="34" charset="-122"/>
+                <a:cs typeface="Calibri" pitchFamily="34" charset="-120"/>
+              </a:rPr>
+              <a:t>Bimodal: 0 (entirely unbilled) and 1 (fully billed)</a:t>
+            </a:r>
+            <a:endParaRPr lang="en-US" sz="1100" dirty="0"/>
+          </a:p>
+        </p:txBody>
+      </p:sp>
+      <p:sp>
+        <p:nvSpPr>
+          <p:cNvPr id="44" name="Shape 42"/>
+          <p:cNvSpPr/>
+          <p:nvPr/>
+        </p:nvSpPr>
+        <p:spPr>
+          <a:xfrm>
+            <a:off x="365760" y="2660904"/>
+            <a:ext cx="1417320" cy="429768"/>
+          </a:xfrm>
+          <a:prstGeom prst="rect">
+            <a:avLst/>
+          </a:prstGeom>
+          <a:solidFill>
+            <a:srgbClr val="FFF5F5"/>
+          </a:solidFill>
+          <a:ln w="6350">
+            <a:solidFill>
+              <a:srgbClr val="E2E8F0"/>
+            </a:solidFill>
+            <a:prstDash val="solid"/>
+          </a:ln>
+        </p:spPr>
+        <p:txBody>
+          <a:bodyPr/>
+          <a:lstStyle/>
+          <a:p>
+            <a:endParaRPr lang="en-US"/>
+          </a:p>
+        </p:txBody>
+      </p:sp>
+      <p:sp>
+        <p:nvSpPr>
+          <p:cNvPr id="45" name="Text 43"/>
+          <p:cNvSpPr/>
+          <p:nvPr/>
+        </p:nvSpPr>
+        <p:spPr>
+          <a:xfrm>
+            <a:off x="420624" y="2706624"/>
+            <a:ext cx="1371600" cy="329184"/>
+          </a:xfrm>
+          <a:prstGeom prst="rect">
+            <a:avLst/>
+          </a:prstGeom>
+          <a:noFill/>
+          <a:ln/>
+        </p:spPr>
+        <p:txBody>
+          <a:bodyPr wrap="square" rtlCol="0" anchor="ctr"/>
+          <a:lstStyle/>
+          <a:p>
+            <a:pPr marL="0" indent="0">
+              <a:buNone/>
+            </a:pPr>
+            <a:r>
+              <a:rPr lang="en-US" sz="1100" b="1" dirty="0">
+                <a:solidFill>
+                  <a:srgbClr val="1B2A4A"/>
+                </a:solidFill>
+                <a:latin typeface="Consolas" pitchFamily="34" charset="0"/>
+                <a:ea typeface="Consolas" pitchFamily="34" charset="-122"/>
+                <a:cs typeface="Consolas" pitchFamily="34" charset="-120"/>
+              </a:rPr>
+              <a:t>efficiency</a:t>
+            </a:r>
+            <a:endParaRPr lang="en-US" sz="1100" dirty="0"/>
+          </a:p>
+        </p:txBody>
+      </p:sp>
+      <p:sp>
+        <p:nvSpPr>
+          <p:cNvPr id="46" name="Shape 44"/>
+          <p:cNvSpPr/>
+          <p:nvPr/>
+        </p:nvSpPr>
+        <p:spPr>
+          <a:xfrm>
+            <a:off x="1874520" y="2660904"/>
+            <a:ext cx="1051560" cy="429768"/>
+          </a:xfrm>
+          <a:prstGeom prst="rect">
+            <a:avLst/>
+          </a:prstGeom>
+          <a:solidFill>
+            <a:srgbClr val="FFF5F5"/>
+          </a:solidFill>
+          <a:ln w="6350">
+            <a:solidFill>
+              <a:srgbClr val="E2E8F0"/>
+            </a:solidFill>
+            <a:prstDash val="solid"/>
+          </a:ln>
+        </p:spPr>
+        <p:txBody>
+          <a:bodyPr/>
+          <a:lstStyle/>
+          <a:p>
+            <a:endParaRPr lang="en-US"/>
+          </a:p>
+        </p:txBody>
+      </p:sp>
+      <p:sp>
+        <p:nvSpPr>
+          <p:cNvPr id="47" name="Text 45"/>
+          <p:cNvSpPr/>
+          <p:nvPr/>
+        </p:nvSpPr>
+        <p:spPr>
+          <a:xfrm>
+            <a:off x="1929384" y="2706624"/>
+            <a:ext cx="1005840" cy="329184"/>
+          </a:xfrm>
+          <a:prstGeom prst="rect">
+            <a:avLst/>
+          </a:prstGeom>
+          <a:noFill/>
+          <a:ln/>
+        </p:spPr>
+        <p:txBody>
+          <a:bodyPr wrap="square" rtlCol="0" anchor="ctr"/>
+          <a:lstStyle/>
+          <a:p>
+            <a:pPr marL="0" indent="0">
+              <a:buNone/>
+            </a:pPr>
+            <a:r>
+              <a:rPr lang="en-US" sz="1100" dirty="0">
+                <a:solidFill>
+                  <a:srgbClr val="475569"/>
+                </a:solidFill>
+                <a:latin typeface="Calibri" pitchFamily="34" charset="0"/>
+                <a:ea typeface="Calibri" pitchFamily="34" charset="-122"/>
+                <a:cs typeface="Calibri" pitchFamily="34" charset="-120"/>
+              </a:rPr>
+              <a:t>49.16</a:t>
+            </a:r>
+            <a:endParaRPr lang="en-US" sz="1100" dirty="0"/>
+          </a:p>
+        </p:txBody>
+      </p:sp>
+      <p:sp>
+        <p:nvSpPr>
+          <p:cNvPr id="48" name="Shape 46"/>
+          <p:cNvSpPr/>
+          <p:nvPr/>
+        </p:nvSpPr>
+        <p:spPr>
+          <a:xfrm>
+            <a:off x="3017520" y="2660904"/>
+            <a:ext cx="868680" cy="429768"/>
+          </a:xfrm>
+          <a:prstGeom prst="rect">
+            <a:avLst/>
+          </a:prstGeom>
+          <a:solidFill>
+            <a:srgbClr val="FFF5F5"/>
+          </a:solidFill>
+          <a:ln w="6350">
+            <a:solidFill>
+              <a:srgbClr val="E2E8F0"/>
+            </a:solidFill>
+            <a:prstDash val="solid"/>
+          </a:ln>
+        </p:spPr>
+        <p:txBody>
+          <a:bodyPr/>
+          <a:lstStyle/>
+          <a:p>
+            <a:endParaRPr lang="en-US"/>
+          </a:p>
+        </p:txBody>
+      </p:sp>
+      <p:sp>
+        <p:nvSpPr>
+          <p:cNvPr id="49" name="Text 47"/>
+          <p:cNvSpPr/>
+          <p:nvPr/>
+        </p:nvSpPr>
+        <p:spPr>
+          <a:xfrm>
+            <a:off x="3072384" y="2706624"/>
+            <a:ext cx="822960" cy="329184"/>
+          </a:xfrm>
+          <a:prstGeom prst="rect">
+            <a:avLst/>
+          </a:prstGeom>
+          <a:noFill/>
+          <a:ln/>
+        </p:spPr>
+        <p:txBody>
+          <a:bodyPr wrap="square" rtlCol="0" anchor="ctr"/>
+          <a:lstStyle/>
+          <a:p>
+            <a:pPr marL="0" indent="0">
+              <a:buNone/>
+            </a:pPr>
+            <a:r>
+              <a:rPr lang="en-US" sz="1100" dirty="0">
+                <a:solidFill>
+                  <a:srgbClr val="475569"/>
+                </a:solidFill>
+                <a:latin typeface="Calibri" pitchFamily="34" charset="0"/>
+                <a:ea typeface="Calibri" pitchFamily="34" charset="-122"/>
+                <a:cs typeface="Calibri" pitchFamily="34" charset="-120"/>
+              </a:rPr>
+              <a:t>167.91</a:t>
+            </a:r>
+            <a:endParaRPr lang="en-US" sz="1100" dirty="0"/>
+          </a:p>
+        </p:txBody>
+      </p:sp>
+      <p:sp>
+        <p:nvSpPr>
+          <p:cNvPr id="50" name="Shape 48"/>
+          <p:cNvSpPr/>
+          <p:nvPr/>
+        </p:nvSpPr>
+        <p:spPr>
+          <a:xfrm>
+            <a:off x="3977640" y="2660904"/>
+            <a:ext cx="640080" cy="429768"/>
+          </a:xfrm>
+          <a:prstGeom prst="rect">
+            <a:avLst/>
+          </a:prstGeom>
+          <a:solidFill>
+            <a:srgbClr val="FFF5F5"/>
+          </a:solidFill>
+          <a:ln w="6350">
+            <a:solidFill>
+              <a:srgbClr val="E2E8F0"/>
+            </a:solidFill>
+            <a:prstDash val="solid"/>
+          </a:ln>
+        </p:spPr>
+        <p:txBody>
+          <a:bodyPr/>
+          <a:lstStyle/>
+          <a:p>
+            <a:endParaRPr lang="en-US"/>
+          </a:p>
+        </p:txBody>
+      </p:sp>
+      <p:sp>
+        <p:nvSpPr>
+          <p:cNvPr id="51" name="Text 49"/>
+          <p:cNvSpPr/>
+          <p:nvPr/>
+        </p:nvSpPr>
+        <p:spPr>
+          <a:xfrm>
+            <a:off x="4032504" y="2706624"/>
+            <a:ext cx="594360" cy="329184"/>
+          </a:xfrm>
+          <a:prstGeom prst="rect">
+            <a:avLst/>
+          </a:prstGeom>
+          <a:noFill/>
+          <a:ln/>
+        </p:spPr>
+        <p:txBody>
+          <a:bodyPr wrap="square" rtlCol="0" anchor="ctr"/>
+          <a:lstStyle/>
+          <a:p>
+            <a:pPr marL="0" indent="0">
+              <a:buNone/>
+            </a:pPr>
+            <a:r>
+              <a:rPr lang="en-US" sz="1100" dirty="0">
+                <a:solidFill>
+                  <a:srgbClr val="C0392B"/>
+                </a:solidFill>
+                <a:latin typeface="Calibri" pitchFamily="34" charset="0"/>
+                <a:ea typeface="Calibri" pitchFamily="34" charset="-122"/>
+                <a:cs typeface="Calibri" pitchFamily="34" charset="-120"/>
+              </a:rPr>
+              <a:t>19.27</a:t>
+            </a:r>
+            <a:endParaRPr lang="en-US" sz="1100" dirty="0"/>
+          </a:p>
+        </p:txBody>
+      </p:sp>
+      <p:sp>
+        <p:nvSpPr>
+          <p:cNvPr id="52" name="Shape 50"/>
+          <p:cNvSpPr/>
+          <p:nvPr/>
+        </p:nvSpPr>
+        <p:spPr>
+          <a:xfrm>
+            <a:off x="4709160" y="2660904"/>
+            <a:ext cx="4114800" cy="429768"/>
+          </a:xfrm>
+          <a:prstGeom prst="rect">
+            <a:avLst/>
+          </a:prstGeom>
+          <a:solidFill>
+            <a:srgbClr val="FFF5F5"/>
+          </a:solidFill>
+          <a:ln w="6350">
+            <a:solidFill>
+              <a:srgbClr val="E2E8F0"/>
+            </a:solidFill>
+            <a:prstDash val="solid"/>
+          </a:ln>
+        </p:spPr>
+        <p:txBody>
+          <a:bodyPr/>
+          <a:lstStyle/>
+          <a:p>
+            <a:endParaRPr lang="en-US"/>
+          </a:p>
+        </p:txBody>
+      </p:sp>
+      <p:sp>
+        <p:nvSpPr>
+          <p:cNvPr id="53" name="Text 51"/>
+          <p:cNvSpPr/>
+          <p:nvPr/>
+        </p:nvSpPr>
+        <p:spPr>
+          <a:xfrm>
+            <a:off x="4764024" y="2706624"/>
+            <a:ext cx="4069080" cy="329184"/>
+          </a:xfrm>
+          <a:prstGeom prst="rect">
+            <a:avLst/>
+          </a:prstGeom>
+          <a:noFill/>
+          <a:ln/>
+        </p:spPr>
+        <p:txBody>
+          <a:bodyPr wrap="square" rtlCol="0" anchor="ctr"/>
+          <a:lstStyle/>
+          <a:p>
+            <a:pPr marL="0" indent="0">
+              <a:buNone/>
+            </a:pPr>
+            <a:r>
+              <a:rPr lang="en-US" sz="1100" dirty="0">
+                <a:solidFill>
+                  <a:srgbClr val="475569"/>
+                </a:solidFill>
+                <a:latin typeface="Calibri" pitchFamily="34" charset="0"/>
+                <a:ea typeface="Calibri" pitchFamily="34" charset="-122"/>
+                <a:cs typeface="Calibri" pitchFamily="34" charset="-120"/>
+              </a:rPr>
+              <a:t>Extremely heavy tail — primary range for theft signals</a:t>
+            </a:r>
+            <a:endParaRPr lang="en-US" sz="1100" dirty="0"/>
+          </a:p>
+        </p:txBody>
+      </p:sp>
+      <p:sp>
+        <p:nvSpPr>
+          <p:cNvPr id="54" name="Shape 52"/>
+          <p:cNvSpPr/>
+          <p:nvPr/>
+        </p:nvSpPr>
+        <p:spPr>
+          <a:xfrm>
+            <a:off x="365760" y="3136392"/>
+            <a:ext cx="1417320" cy="429768"/>
+          </a:xfrm>
+          <a:prstGeom prst="rect">
+            <a:avLst/>
+          </a:prstGeom>
+          <a:solidFill>
+            <a:srgbClr val="F8FAFC"/>
+          </a:solidFill>
+          <a:ln w="6350">
+            <a:solidFill>
+              <a:srgbClr val="E2E8F0"/>
+            </a:solidFill>
+            <a:prstDash val="solid"/>
+          </a:ln>
+        </p:spPr>
+        <p:txBody>
+          <a:bodyPr/>
+          <a:lstStyle/>
+          <a:p>
+            <a:endParaRPr lang="en-US"/>
+          </a:p>
+        </p:txBody>
+      </p:sp>
+      <p:sp>
+        <p:nvSpPr>
+          <p:cNvPr id="55" name="Text 53"/>
+          <p:cNvSpPr/>
+          <p:nvPr/>
+        </p:nvSpPr>
+        <p:spPr>
+          <a:xfrm>
+            <a:off x="420624" y="3182112"/>
+            <a:ext cx="1371600" cy="329184"/>
+          </a:xfrm>
+          <a:prstGeom prst="rect">
+            <a:avLst/>
+          </a:prstGeom>
+          <a:noFill/>
+          <a:ln/>
+        </p:spPr>
+        <p:txBody>
+          <a:bodyPr wrap="square" rtlCol="0" anchor="ctr"/>
+          <a:lstStyle/>
+          <a:p>
+            <a:pPr marL="0" indent="0">
+              <a:buNone/>
+            </a:pPr>
+            <a:r>
+              <a:rPr lang="en-US" sz="1100" b="1" dirty="0">
+                <a:solidFill>
+                  <a:srgbClr val="1B2A4A"/>
+                </a:solidFill>
+                <a:latin typeface="Consolas" pitchFamily="34" charset="0"/>
+                <a:ea typeface="Consolas" pitchFamily="34" charset="-122"/>
+                <a:cs typeface="Consolas" pitchFamily="34" charset="-120"/>
+              </a:rPr>
+              <a:t>areas</a:t>
+            </a:r>
+            <a:endParaRPr lang="en-US" sz="1100" dirty="0"/>
+          </a:p>
+        </p:txBody>
+      </p:sp>
+      <p:sp>
+        <p:nvSpPr>
+          <p:cNvPr id="56" name="Shape 54"/>
+          <p:cNvSpPr/>
+          <p:nvPr/>
+        </p:nvSpPr>
+        <p:spPr>
+          <a:xfrm>
+            <a:off x="1874520" y="3136392"/>
+            <a:ext cx="1051560" cy="429768"/>
+          </a:xfrm>
+          <a:prstGeom prst="rect">
+            <a:avLst/>
+          </a:prstGeom>
+          <a:solidFill>
+            <a:srgbClr val="F8FAFC"/>
+          </a:solidFill>
+          <a:ln w="6350">
+            <a:solidFill>
+              <a:srgbClr val="E2E8F0"/>
+            </a:solidFill>
+            <a:prstDash val="solid"/>
+          </a:ln>
+        </p:spPr>
+        <p:txBody>
+          <a:bodyPr/>
+          <a:lstStyle/>
+          <a:p>
+            <a:endParaRPr lang="en-US"/>
+          </a:p>
+        </p:txBody>
+      </p:sp>
+      <p:sp>
+        <p:nvSpPr>
+          <p:cNvPr id="57" name="Text 55"/>
+          <p:cNvSpPr/>
+          <p:nvPr/>
+        </p:nvSpPr>
+        <p:spPr>
+          <a:xfrm>
+            <a:off x="1929384" y="3182112"/>
+            <a:ext cx="1005840" cy="329184"/>
+          </a:xfrm>
+          <a:prstGeom prst="rect">
+            <a:avLst/>
+          </a:prstGeom>
+          <a:noFill/>
+          <a:ln/>
+        </p:spPr>
+        <p:txBody>
+          <a:bodyPr wrap="square" rtlCol="0" anchor="ctr"/>
+          <a:lstStyle/>
+          <a:p>
+            <a:pPr marL="0" indent="0">
+              <a:buNone/>
+            </a:pPr>
+            <a:r>
+              <a:rPr lang="en-US" sz="1100" dirty="0">
+                <a:solidFill>
+                  <a:srgbClr val="475569"/>
+                </a:solidFill>
+                <a:latin typeface="Calibri" pitchFamily="34" charset="0"/>
+                <a:ea typeface="Calibri" pitchFamily="34" charset="-122"/>
+                <a:cs typeface="Calibri" pitchFamily="34" charset="-120"/>
+              </a:rPr>
+              <a:t>0.03</a:t>
+            </a:r>
+            <a:endParaRPr lang="en-US" sz="1100" dirty="0"/>
+          </a:p>
+        </p:txBody>
+      </p:sp>
+      <p:sp>
+        <p:nvSpPr>
+          <p:cNvPr id="58" name="Shape 56"/>
+          <p:cNvSpPr/>
+          <p:nvPr/>
+        </p:nvSpPr>
+        <p:spPr>
+          <a:xfrm>
+            <a:off x="3017520" y="3136392"/>
+            <a:ext cx="868680" cy="429768"/>
+          </a:xfrm>
+          <a:prstGeom prst="rect">
+            <a:avLst/>
+          </a:prstGeom>
+          <a:solidFill>
+            <a:srgbClr val="F8FAFC"/>
+          </a:solidFill>
+          <a:ln w="6350">
+            <a:solidFill>
+              <a:srgbClr val="E2E8F0"/>
+            </a:solidFill>
+            <a:prstDash val="solid"/>
+          </a:ln>
+        </p:spPr>
+        <p:txBody>
+          <a:bodyPr/>
+          <a:lstStyle/>
+          <a:p>
+            <a:endParaRPr lang="en-US"/>
+          </a:p>
+        </p:txBody>
+      </p:sp>
+      <p:sp>
+        <p:nvSpPr>
+          <p:cNvPr id="59" name="Text 57"/>
+          <p:cNvSpPr/>
+          <p:nvPr/>
+        </p:nvSpPr>
+        <p:spPr>
+          <a:xfrm>
+            <a:off x="3072384" y="3182112"/>
+            <a:ext cx="822960" cy="329184"/>
+          </a:xfrm>
+          <a:prstGeom prst="rect">
+            <a:avLst/>
+          </a:prstGeom>
+          <a:noFill/>
+          <a:ln/>
+        </p:spPr>
+        <p:txBody>
+          <a:bodyPr wrap="square" rtlCol="0" anchor="ctr"/>
+          <a:lstStyle/>
+          <a:p>
+            <a:pPr marL="0" indent="0">
+              <a:buNone/>
+            </a:pPr>
+            <a:r>
+              <a:rPr lang="en-US" sz="1100" dirty="0">
+                <a:solidFill>
+                  <a:srgbClr val="475569"/>
+                </a:solidFill>
+                <a:latin typeface="Calibri" pitchFamily="34" charset="0"/>
+                <a:ea typeface="Calibri" pitchFamily="34" charset="-122"/>
+                <a:cs typeface="Calibri" pitchFamily="34" charset="-120"/>
+              </a:rPr>
+              <a:t>0.01</a:t>
+            </a:r>
+            <a:endParaRPr lang="en-US" sz="1100" dirty="0"/>
+          </a:p>
+        </p:txBody>
+      </p:sp>
+      <p:sp>
+        <p:nvSpPr>
+          <p:cNvPr id="60" name="Shape 58"/>
+          <p:cNvSpPr/>
+          <p:nvPr/>
+        </p:nvSpPr>
+        <p:spPr>
+          <a:xfrm>
+            <a:off x="3977640" y="3136392"/>
+            <a:ext cx="640080" cy="429768"/>
+          </a:xfrm>
+          <a:prstGeom prst="rect">
+            <a:avLst/>
+          </a:prstGeom>
+          <a:solidFill>
+            <a:srgbClr val="F8FAFC"/>
+          </a:solidFill>
+          <a:ln w="6350">
+            <a:solidFill>
+              <a:srgbClr val="E2E8F0"/>
+            </a:solidFill>
+            <a:prstDash val="solid"/>
+          </a:ln>
+        </p:spPr>
+        <p:txBody>
+          <a:bodyPr/>
+          <a:lstStyle/>
+          <a:p>
+            <a:endParaRPr lang="en-US"/>
+          </a:p>
+        </p:txBody>
+      </p:sp>
+      <p:sp>
+        <p:nvSpPr>
+          <p:cNvPr id="61" name="Text 59"/>
+          <p:cNvSpPr/>
+          <p:nvPr/>
+        </p:nvSpPr>
+        <p:spPr>
+          <a:xfrm>
+            <a:off x="4032504" y="3182112"/>
+            <a:ext cx="594360" cy="329184"/>
+          </a:xfrm>
+          <a:prstGeom prst="rect">
+            <a:avLst/>
+          </a:prstGeom>
+          <a:noFill/>
+          <a:ln/>
+        </p:spPr>
+        <p:txBody>
+          <a:bodyPr wrap="square" rtlCol="0" anchor="ctr"/>
+          <a:lstStyle/>
+          <a:p>
+            <a:pPr marL="0" indent="0">
+              <a:buNone/>
+            </a:pPr>
+            <a:r>
+              <a:rPr lang="en-US" sz="1100" dirty="0">
+                <a:solidFill>
+                  <a:srgbClr val="475569"/>
+                </a:solidFill>
+                <a:latin typeface="Calibri" pitchFamily="34" charset="0"/>
+                <a:ea typeface="Calibri" pitchFamily="34" charset="-122"/>
+                <a:cs typeface="Calibri" pitchFamily="34" charset="-120"/>
+              </a:rPr>
+              <a:t>—</a:t>
+            </a:r>
+            <a:endParaRPr lang="en-US" sz="1100" dirty="0"/>
+          </a:p>
+        </p:txBody>
+      </p:sp>
+      <p:sp>
+        <p:nvSpPr>
+          <p:cNvPr id="62" name="Shape 60"/>
+          <p:cNvSpPr/>
+          <p:nvPr/>
+        </p:nvSpPr>
+        <p:spPr>
+          <a:xfrm>
+            <a:off x="4709160" y="3136392"/>
+            <a:ext cx="4114800" cy="429768"/>
+          </a:xfrm>
+          <a:prstGeom prst="rect">
+            <a:avLst/>
+          </a:prstGeom>
+          <a:solidFill>
+            <a:srgbClr val="F8FAFC"/>
+          </a:solidFill>
+          <a:ln w="6350">
+            <a:solidFill>
+              <a:srgbClr val="E2E8F0"/>
+            </a:solidFill>
+            <a:prstDash val="solid"/>
+          </a:ln>
+        </p:spPr>
+        <p:txBody>
+          <a:bodyPr/>
+          <a:lstStyle/>
+          <a:p>
+            <a:endParaRPr lang="en-US"/>
+          </a:p>
+        </p:txBody>
+      </p:sp>
+      <p:sp>
+        <p:nvSpPr>
+          <p:cNvPr id="63" name="Text 61"/>
+          <p:cNvSpPr/>
+          <p:nvPr/>
+        </p:nvSpPr>
+        <p:spPr>
+          <a:xfrm>
+            <a:off x="4764024" y="3182112"/>
+            <a:ext cx="4069080" cy="329184"/>
+          </a:xfrm>
+          <a:prstGeom prst="rect">
+            <a:avLst/>
+          </a:prstGeom>
+          <a:noFill/>
+          <a:ln/>
+        </p:spPr>
+        <p:txBody>
+          <a:bodyPr wrap="square" rtlCol="0" anchor="ctr"/>
+          <a:lstStyle/>
+          <a:p>
+            <a:pPr marL="0" indent="0">
+              <a:buNone/>
+            </a:pPr>
+            <a:r>
+              <a:rPr lang="en-US" sz="1100" dirty="0">
+                <a:solidFill>
+                  <a:srgbClr val="475569"/>
+                </a:solidFill>
+                <a:latin typeface="Calibri" pitchFamily="34" charset="0"/>
+                <a:ea typeface="Calibri" pitchFamily="34" charset="-122"/>
+                <a:cs typeface="Calibri" pitchFamily="34" charset="-120"/>
+              </a:rPr>
+              <a:t>Frequency-encoded location weight — rare areas score low</a:t>
+            </a:r>
+            <a:endParaRPr lang="en-US" sz="1100" dirty="0"/>
+          </a:p>
+        </p:txBody>
+      </p:sp>
+      <p:sp>
+        <p:nvSpPr>
+          <p:cNvPr id="64" name="Shape 62"/>
+          <p:cNvSpPr/>
+          <p:nvPr/>
+        </p:nvSpPr>
+        <p:spPr>
+          <a:xfrm>
+            <a:off x="365760" y="3703320"/>
+            <a:ext cx="8412480" cy="530352"/>
+          </a:xfrm>
+          <a:prstGeom prst="rect">
+            <a:avLst/>
+          </a:prstGeom>
+          <a:solidFill>
+            <a:srgbClr val="F8FAFC"/>
+          </a:solidFill>
+          <a:ln w="12700">
+            <a:solidFill>
+              <a:srgbClr val="E2E8F0"/>
+            </a:solidFill>
+            <a:prstDash val="solid"/>
+          </a:ln>
+        </p:spPr>
+        <p:txBody>
+          <a:bodyPr/>
+          <a:lstStyle/>
+          <a:p>
+            <a:endParaRPr lang="en-US"/>
+          </a:p>
+        </p:txBody>
+      </p:sp>
+      <p:sp>
+        <p:nvSpPr>
+          <p:cNvPr id="65" name="Text 63"/>
+          <p:cNvSpPr/>
+          <p:nvPr/>
+        </p:nvSpPr>
+        <p:spPr>
+          <a:xfrm>
+            <a:off x="502920" y="3767328"/>
+            <a:ext cx="5029200" cy="347472"/>
+          </a:xfrm>
+          <a:prstGeom prst="rect">
+            <a:avLst/>
+          </a:prstGeom>
+          <a:noFill/>
+          <a:ln/>
+        </p:spPr>
+        <p:txBody>
+          <a:bodyPr wrap="square" rtlCol="0" anchor="ctr"/>
+          <a:lstStyle/>
+          <a:p>
+            <a:pPr marL="0" indent="0">
+              <a:buNone/>
+            </a:pPr>
+            <a:r>
+              <a:rPr lang="en-US" sz="1150" dirty="0">
+                <a:solidFill>
+                  <a:srgbClr val="475569"/>
+                </a:solidFill>
+                <a:latin typeface="Calibri" pitchFamily="34" charset="0"/>
+                <a:ea typeface="Calibri" pitchFamily="34" charset="-122"/>
+                <a:cs typeface="Calibri" pitchFamily="34" charset="-120"/>
+              </a:rPr>
+              <a:t>StandardScaler applied — normalises to zero mean and unit variance before ODIF.</a:t>
+            </a:r>
+            <a:endParaRPr lang="en-US" sz="1150" dirty="0"/>
+          </a:p>
+        </p:txBody>
+      </p:sp>
+      <p:sp>
+        <p:nvSpPr>
+          <p:cNvPr id="66" name="Text 64"/>
+          <p:cNvSpPr/>
+          <p:nvPr/>
+        </p:nvSpPr>
+        <p:spPr>
+          <a:xfrm>
+            <a:off x="5577840" y="3794760"/>
+            <a:ext cx="3063240" cy="274320"/>
+          </a:xfrm>
+          <a:prstGeom prst="rect">
+            <a:avLst/>
+          </a:prstGeom>
+          <a:noFill/>
+          <a:ln/>
+        </p:spPr>
+        <p:txBody>
+          <a:bodyPr wrap="square" rtlCol="0" anchor="ctr"/>
+          <a:lstStyle/>
+          <a:p>
+            <a:pPr marL="0" indent="0">
+              <a:buNone/>
+            </a:pPr>
+            <a:r>
+              <a:rPr lang="en-US" sz="1100" b="1" dirty="0">
+                <a:solidFill>
+                  <a:srgbClr val="14B8A6"/>
+                </a:solidFill>
+                <a:latin typeface="Consolas" pitchFamily="34" charset="0"/>
+                <a:ea typeface="Consolas" pitchFamily="34" charset="-122"/>
+                <a:cs typeface="Consolas" pitchFamily="34" charset="-120"/>
+              </a:rPr>
+              <a:t>scaler.fit_transform(X)</a:t>
+            </a:r>
+            <a:endParaRPr lang="en-US" sz="1100" dirty="0"/>
+          </a:p>
+        </p:txBody>
+      </p:sp>
+      <p:sp>
+        <p:nvSpPr>
+          <p:cNvPr id="67" name="Shape 65"/>
+          <p:cNvSpPr/>
+          <p:nvPr/>
+        </p:nvSpPr>
+        <p:spPr>
+          <a:xfrm>
+            <a:off x="365760" y="4325112"/>
+            <a:ext cx="8412480" cy="548640"/>
+          </a:xfrm>
+          <a:prstGeom prst="rect">
+            <a:avLst/>
+          </a:prstGeom>
+          <a:solidFill>
+            <a:srgbClr val="FEF9C3"/>
+          </a:solidFill>
+          <a:ln w="12700">
+            <a:solidFill>
+              <a:srgbClr val="FCD34D"/>
+            </a:solidFill>
+            <a:prstDash val="solid"/>
+          </a:ln>
+        </p:spPr>
+        <p:txBody>
+          <a:bodyPr/>
+          <a:lstStyle/>
+          <a:p>
+            <a:endParaRPr lang="en-US"/>
+          </a:p>
+        </p:txBody>
+      </p:sp>
+      <p:sp>
+        <p:nvSpPr>
+          <p:cNvPr id="68" name="Text 66"/>
+          <p:cNvSpPr/>
+          <p:nvPr/>
+        </p:nvSpPr>
+        <p:spPr>
+          <a:xfrm>
+            <a:off x="502920" y="4398264"/>
+            <a:ext cx="8138160" cy="402336"/>
+          </a:xfrm>
+          <a:prstGeom prst="rect">
+            <a:avLst/>
+          </a:prstGeom>
+          <a:noFill/>
+          <a:ln/>
+        </p:spPr>
+        <p:txBody>
+          <a:bodyPr wrap="square" rtlCol="0" anchor="ctr"/>
+          <a:lstStyle/>
+          <a:p>
+            <a:pPr marL="0" indent="0">
+              <a:buNone/>
+            </a:pPr>
+            <a:r>
+              <a:rPr lang="en-US" sz="1150" dirty="0">
+                <a:solidFill>
+                  <a:srgbClr val="92400E"/>
+                </a:solidFill>
+                <a:latin typeface="Calibri" pitchFamily="34" charset="0"/>
+                <a:ea typeface="Calibri" pitchFamily="34" charset="-122"/>
+                <a:cs typeface="Calibri" pitchFamily="34" charset="-120"/>
+              </a:rPr>
+              <a:t>⚠  16 rows had Load = 0 → efficiency undefined (division by zero). Dropped before modelling. Final dataset: 7,105 rows.</a:t>
+            </a:r>
+            <a:endParaRPr lang="en-US" sz="1150" dirty="0"/>
+          </a:p>
+        </p:txBody>
+      </p:sp>
+    </p:spTree>
+  </p:cSld>
+  <p:clrMapOvr>
+    <a:masterClrMapping/>
+  </p:clrMapOvr>
+</p:sld>
+</file>
+
+<file path=ppt/slides/slide21.xml><?xml version="1.0" encoding="utf-8"?>
+<p:sld xmlns:a="http://schemas.openxmlformats.org/drawingml/2006/main" xmlns:r="http://schemas.openxmlformats.org/officeDocument/2006/relationships" xmlns:p="http://schemas.openxmlformats.org/presentationml/2006/main">
   <p:cSld name="Slide 20">
     <p:bg>
       <p:bgPr>
@@ -18730,7 +19246,7 @@
 </p:sld>
 </file>
 
-<file path=ppt/slides/slide21.xml><?xml version="1.0" encoding="utf-8"?>
+<file path=ppt/slides/slide22.xml><?xml version="1.0" encoding="utf-8"?>
 <p:sld xmlns:a="http://schemas.openxmlformats.org/drawingml/2006/main" xmlns:r="http://schemas.openxmlformats.org/officeDocument/2006/relationships" xmlns:p="http://schemas.openxmlformats.org/presentationml/2006/main">
   <p:cSld name="Slide 21">
     <p:bg>
@@ -18820,6 +19336,175 @@
                 <a:ea typeface="Cambria" pitchFamily="34" charset="-122"/>
                 <a:cs typeface="Cambria" pitchFamily="34" charset="-120"/>
               </a:rPr>
+              <a:t>Results</a:t>
+            </a:r>
+            <a:endParaRPr lang="en-US" sz="2600" dirty="0"/>
+          </a:p>
+        </p:txBody>
+      </p:sp>
+      <p:pic>
+        <p:nvPicPr>
+          <p:cNvPr id="2050" name="Picture 2">
+            <a:extLst>
+              <a:ext uri="{FF2B5EF4-FFF2-40B4-BE49-F238E27FC236}">
+                <a16:creationId xmlns:a16="http://schemas.microsoft.com/office/drawing/2014/main" id="{8012A8C6-BCD5-AD43-73D0-5222A9244D9C}"/>
+              </a:ext>
+            </a:extLst>
+          </p:cNvPr>
+          <p:cNvPicPr>
+            <a:picLocks noChangeAspect="1" noChangeArrowheads="1"/>
+          </p:cNvPicPr>
+          <p:nvPr/>
+        </p:nvPicPr>
+        <p:blipFill>
+          <a:blip r:embed="rId3">
+            <a:extLst>
+              <a:ext uri="{28A0092B-C50C-407E-A947-70E740481C1C}">
+                <a14:useLocalDpi xmlns:a14="http://schemas.microsoft.com/office/drawing/2010/main" val="0"/>
+              </a:ext>
+            </a:extLst>
+          </a:blip>
+          <a:srcRect/>
+          <a:stretch>
+            <a:fillRect/>
+          </a:stretch>
+        </p:blipFill>
+        <p:spPr bwMode="auto">
+          <a:xfrm>
+            <a:off x="0" y="769076"/>
+            <a:ext cx="9144000" cy="3602037"/>
+          </a:xfrm>
+          <a:prstGeom prst="rect">
+            <a:avLst/>
+          </a:prstGeom>
+          <a:noFill/>
+          <a:extLst>
+            <a:ext uri="{909E8E84-426E-40DD-AFC4-6F175D3DCCD1}">
+              <a14:hiddenFill xmlns:a14="http://schemas.microsoft.com/office/drawing/2010/main">
+                <a:solidFill>
+                  <a:srgbClr val="FFFFFF"/>
+                </a:solidFill>
+              </a14:hiddenFill>
+            </a:ext>
+          </a:extLst>
+        </p:spPr>
+      </p:pic>
+    </p:spTree>
+  </p:cSld>
+  <p:clrMapOvr>
+    <a:masterClrMapping/>
+  </p:clrMapOvr>
+</p:sld>
+</file>
+
+<file path=ppt/slides/slide23.xml><?xml version="1.0" encoding="utf-8"?>
+<p:sld xmlns:a="http://schemas.openxmlformats.org/drawingml/2006/main" xmlns:r="http://schemas.openxmlformats.org/officeDocument/2006/relationships" xmlns:p="http://schemas.openxmlformats.org/presentationml/2006/main">
+  <p:cSld>
+    <p:bg>
+      <p:bgPr>
+        <a:solidFill>
+          <a:srgbClr val="FFFFFF"/>
+        </a:solidFill>
+        <a:effectLst/>
+      </p:bgPr>
+    </p:bg>
+    <p:spTree>
+      <p:nvGrpSpPr>
+        <p:cNvPr id="1" name="">
+          <a:extLst>
+            <a:ext uri="{FF2B5EF4-FFF2-40B4-BE49-F238E27FC236}">
+              <a16:creationId xmlns:a16="http://schemas.microsoft.com/office/drawing/2014/main" id="{AB3A22B5-F083-1C07-12A9-456069EA76E9}"/>
+            </a:ext>
+          </a:extLst>
+        </p:cNvPr>
+        <p:cNvGrpSpPr/>
+        <p:nvPr/>
+      </p:nvGrpSpPr>
+      <p:grpSpPr>
+        <a:xfrm>
+          <a:off x="0" y="0"/>
+          <a:ext cx="0" cy="0"/>
+          <a:chOff x="0" y="0"/>
+          <a:chExt cx="0" cy="0"/>
+        </a:xfrm>
+      </p:grpSpPr>
+      <p:sp>
+        <p:nvSpPr>
+          <p:cNvPr id="2" name="Shape 0">
+            <a:extLst>
+              <a:ext uri="{FF2B5EF4-FFF2-40B4-BE49-F238E27FC236}">
+                <a16:creationId xmlns:a16="http://schemas.microsoft.com/office/drawing/2014/main" id="{BB194429-0B4C-85A7-6DE5-9FE305EBC132}"/>
+              </a:ext>
+            </a:extLst>
+          </p:cNvPr>
+          <p:cNvSpPr/>
+          <p:nvPr/>
+        </p:nvSpPr>
+        <p:spPr>
+          <a:xfrm>
+            <a:off x="0" y="0"/>
+            <a:ext cx="9144000" cy="64008"/>
+          </a:xfrm>
+          <a:prstGeom prst="rect">
+            <a:avLst/>
+          </a:prstGeom>
+          <a:solidFill>
+            <a:srgbClr val="0D9488"/>
+          </a:solidFill>
+          <a:ln w="12700">
+            <a:solidFill>
+              <a:srgbClr val="0D9488"/>
+            </a:solidFill>
+            <a:prstDash val="solid"/>
+          </a:ln>
+        </p:spPr>
+        <p:txBody>
+          <a:bodyPr/>
+          <a:lstStyle/>
+          <a:p>
+            <a:endParaRPr lang="en-US"/>
+          </a:p>
+        </p:txBody>
+      </p:sp>
+      <p:sp>
+        <p:nvSpPr>
+          <p:cNvPr id="3" name="Text 1">
+            <a:extLst>
+              <a:ext uri="{FF2B5EF4-FFF2-40B4-BE49-F238E27FC236}">
+                <a16:creationId xmlns:a16="http://schemas.microsoft.com/office/drawing/2014/main" id="{63176034-EE91-AC63-A7E5-D8D4627EB673}"/>
+              </a:ext>
+            </a:extLst>
+          </p:cNvPr>
+          <p:cNvSpPr/>
+          <p:nvPr/>
+        </p:nvSpPr>
+        <p:spPr>
+          <a:xfrm>
+            <a:off x="457200" y="182880"/>
+            <a:ext cx="8229600" cy="548640"/>
+          </a:xfrm>
+          <a:prstGeom prst="rect">
+            <a:avLst/>
+          </a:prstGeom>
+          <a:noFill/>
+          <a:ln/>
+        </p:spPr>
+        <p:txBody>
+          <a:bodyPr wrap="square" rtlCol="0" anchor="ctr"/>
+          <a:lstStyle/>
+          <a:p>
+            <a:pPr marL="0" indent="0">
+              <a:buNone/>
+            </a:pPr>
+            <a:r>
+              <a:rPr lang="en-US" sz="2600" b="1" dirty="0">
+                <a:solidFill>
+                  <a:srgbClr val="1B2A4A"/>
+                </a:solidFill>
+                <a:latin typeface="Cambria" pitchFamily="34" charset="0"/>
+                <a:ea typeface="Cambria" pitchFamily="34" charset="-122"/>
+                <a:cs typeface="Cambria" pitchFamily="34" charset="-120"/>
+              </a:rPr>
               <a:t>Anomaly Profile — What the Model Found</a:t>
             </a:r>
             <a:endParaRPr lang="en-US" sz="2600" dirty="0"/>
@@ -18828,7 +19513,13 @@
       </p:sp>
       <p:sp>
         <p:nvSpPr>
-          <p:cNvPr id="4" name="Text 2"/>
+          <p:cNvPr id="4" name="Text 2">
+            <a:extLst>
+              <a:ext uri="{FF2B5EF4-FFF2-40B4-BE49-F238E27FC236}">
+                <a16:creationId xmlns:a16="http://schemas.microsoft.com/office/drawing/2014/main" id="{3B662106-8C2C-C494-6FFA-9A52E28FA1C6}"/>
+              </a:ext>
+            </a:extLst>
+          </p:cNvPr>
           <p:cNvSpPr/>
           <p:nvPr/>
         </p:nvSpPr>
@@ -18867,7 +19558,13 @@
       </p:sp>
       <p:sp>
         <p:nvSpPr>
-          <p:cNvPr id="5" name="Shape 3"/>
+          <p:cNvPr id="5" name="Shape 3">
+            <a:extLst>
+              <a:ext uri="{FF2B5EF4-FFF2-40B4-BE49-F238E27FC236}">
+                <a16:creationId xmlns:a16="http://schemas.microsoft.com/office/drawing/2014/main" id="{10CB5BC0-0421-210E-12DB-51556FE3693C}"/>
+              </a:ext>
+            </a:extLst>
+          </p:cNvPr>
           <p:cNvSpPr/>
           <p:nvPr/>
         </p:nvSpPr>
@@ -18899,7 +19596,13 @@
       </p:sp>
       <p:sp>
         <p:nvSpPr>
-          <p:cNvPr id="6" name="Text 4"/>
+          <p:cNvPr id="6" name="Text 4">
+            <a:extLst>
+              <a:ext uri="{FF2B5EF4-FFF2-40B4-BE49-F238E27FC236}">
+                <a16:creationId xmlns:a16="http://schemas.microsoft.com/office/drawing/2014/main" id="{4F785AD3-89BE-A56C-F582-AFEF5B9533B9}"/>
+              </a:ext>
+            </a:extLst>
+          </p:cNvPr>
           <p:cNvSpPr/>
           <p:nvPr/>
         </p:nvSpPr>
@@ -18938,7 +19641,13 @@
       </p:sp>
       <p:sp>
         <p:nvSpPr>
-          <p:cNvPr id="7" name="Shape 5"/>
+          <p:cNvPr id="7" name="Shape 5">
+            <a:extLst>
+              <a:ext uri="{FF2B5EF4-FFF2-40B4-BE49-F238E27FC236}">
+                <a16:creationId xmlns:a16="http://schemas.microsoft.com/office/drawing/2014/main" id="{873FDA5B-AFBE-00CB-F5D2-4313F35258D6}"/>
+              </a:ext>
+            </a:extLst>
+          </p:cNvPr>
           <p:cNvSpPr/>
           <p:nvPr/>
         </p:nvSpPr>
@@ -18970,7 +19679,13 @@
       </p:sp>
       <p:sp>
         <p:nvSpPr>
-          <p:cNvPr id="8" name="Text 6"/>
+          <p:cNvPr id="8" name="Text 6">
+            <a:extLst>
+              <a:ext uri="{FF2B5EF4-FFF2-40B4-BE49-F238E27FC236}">
+                <a16:creationId xmlns:a16="http://schemas.microsoft.com/office/drawing/2014/main" id="{E4CDB170-DE68-23A0-A7C9-852A2A916CFC}"/>
+              </a:ext>
+            </a:extLst>
+          </p:cNvPr>
           <p:cNvSpPr/>
           <p:nvPr/>
         </p:nvSpPr>
@@ -19009,7 +19724,13 @@
       </p:sp>
       <p:sp>
         <p:nvSpPr>
-          <p:cNvPr id="9" name="Shape 7"/>
+          <p:cNvPr id="9" name="Shape 7">
+            <a:extLst>
+              <a:ext uri="{FF2B5EF4-FFF2-40B4-BE49-F238E27FC236}">
+                <a16:creationId xmlns:a16="http://schemas.microsoft.com/office/drawing/2014/main" id="{5BF63631-6BA1-5486-4C87-EDA05D10F7AC}"/>
+              </a:ext>
+            </a:extLst>
+          </p:cNvPr>
           <p:cNvSpPr/>
           <p:nvPr/>
         </p:nvSpPr>
@@ -19041,7 +19762,13 @@
       </p:sp>
       <p:sp>
         <p:nvSpPr>
-          <p:cNvPr id="10" name="Text 8"/>
+          <p:cNvPr id="10" name="Text 8">
+            <a:extLst>
+              <a:ext uri="{FF2B5EF4-FFF2-40B4-BE49-F238E27FC236}">
+                <a16:creationId xmlns:a16="http://schemas.microsoft.com/office/drawing/2014/main" id="{6B189B34-2FC8-4A9A-182A-841B99B56F36}"/>
+              </a:ext>
+            </a:extLst>
+          </p:cNvPr>
           <p:cNvSpPr/>
           <p:nvPr/>
         </p:nvSpPr>
@@ -19080,7 +19807,13 @@
       </p:sp>
       <p:sp>
         <p:nvSpPr>
-          <p:cNvPr id="11" name="Shape 9"/>
+          <p:cNvPr id="11" name="Shape 9">
+            <a:extLst>
+              <a:ext uri="{FF2B5EF4-FFF2-40B4-BE49-F238E27FC236}">
+                <a16:creationId xmlns:a16="http://schemas.microsoft.com/office/drawing/2014/main" id="{892EABF7-182A-851C-BFE6-A5FCD3CAD8DB}"/>
+              </a:ext>
+            </a:extLst>
+          </p:cNvPr>
           <p:cNvSpPr/>
           <p:nvPr/>
         </p:nvSpPr>
@@ -19112,7 +19845,13 @@
       </p:sp>
       <p:sp>
         <p:nvSpPr>
-          <p:cNvPr id="12" name="Text 10"/>
+          <p:cNvPr id="12" name="Text 10">
+            <a:extLst>
+              <a:ext uri="{FF2B5EF4-FFF2-40B4-BE49-F238E27FC236}">
+                <a16:creationId xmlns:a16="http://schemas.microsoft.com/office/drawing/2014/main" id="{AC91B6BB-C2F2-2C80-86D7-B2777008D195}"/>
+              </a:ext>
+            </a:extLst>
+          </p:cNvPr>
           <p:cNvSpPr/>
           <p:nvPr/>
         </p:nvSpPr>
@@ -19151,7 +19890,13 @@
       </p:sp>
       <p:sp>
         <p:nvSpPr>
-          <p:cNvPr id="13" name="Shape 11"/>
+          <p:cNvPr id="13" name="Shape 11">
+            <a:extLst>
+              <a:ext uri="{FF2B5EF4-FFF2-40B4-BE49-F238E27FC236}">
+                <a16:creationId xmlns:a16="http://schemas.microsoft.com/office/drawing/2014/main" id="{FB5AE822-46A8-1EC4-C443-327B14C869F9}"/>
+              </a:ext>
+            </a:extLst>
+          </p:cNvPr>
           <p:cNvSpPr/>
           <p:nvPr/>
         </p:nvSpPr>
@@ -19183,7 +19928,13 @@
       </p:sp>
       <p:sp>
         <p:nvSpPr>
-          <p:cNvPr id="14" name="Text 12"/>
+          <p:cNvPr id="14" name="Text 12">
+            <a:extLst>
+              <a:ext uri="{FF2B5EF4-FFF2-40B4-BE49-F238E27FC236}">
+                <a16:creationId xmlns:a16="http://schemas.microsoft.com/office/drawing/2014/main" id="{BD1039B5-8817-360E-3354-2076C2F3E322}"/>
+              </a:ext>
+            </a:extLst>
+          </p:cNvPr>
           <p:cNvSpPr/>
           <p:nvPr/>
         </p:nvSpPr>
@@ -19222,7 +19973,13 @@
       </p:sp>
       <p:sp>
         <p:nvSpPr>
-          <p:cNvPr id="15" name="Shape 13"/>
+          <p:cNvPr id="15" name="Shape 13">
+            <a:extLst>
+              <a:ext uri="{FF2B5EF4-FFF2-40B4-BE49-F238E27FC236}">
+                <a16:creationId xmlns:a16="http://schemas.microsoft.com/office/drawing/2014/main" id="{1348B190-B64A-7F32-3A66-BF4D4CA65B15}"/>
+              </a:ext>
+            </a:extLst>
+          </p:cNvPr>
           <p:cNvSpPr/>
           <p:nvPr/>
         </p:nvSpPr>
@@ -19254,7 +20011,13 @@
       </p:sp>
       <p:sp>
         <p:nvSpPr>
-          <p:cNvPr id="16" name="Text 14"/>
+          <p:cNvPr id="16" name="Text 14">
+            <a:extLst>
+              <a:ext uri="{FF2B5EF4-FFF2-40B4-BE49-F238E27FC236}">
+                <a16:creationId xmlns:a16="http://schemas.microsoft.com/office/drawing/2014/main" id="{BCA64E0E-ABFC-0D24-9C01-E849DB565779}"/>
+              </a:ext>
+            </a:extLst>
+          </p:cNvPr>
           <p:cNvSpPr/>
           <p:nvPr/>
         </p:nvSpPr>
@@ -19293,7 +20056,13 @@
       </p:sp>
       <p:sp>
         <p:nvSpPr>
-          <p:cNvPr id="17" name="Shape 15"/>
+          <p:cNvPr id="17" name="Shape 15">
+            <a:extLst>
+              <a:ext uri="{FF2B5EF4-FFF2-40B4-BE49-F238E27FC236}">
+                <a16:creationId xmlns:a16="http://schemas.microsoft.com/office/drawing/2014/main" id="{76A2A700-66EC-143B-A9C0-E43E3A127666}"/>
+              </a:ext>
+            </a:extLst>
+          </p:cNvPr>
           <p:cNvSpPr/>
           <p:nvPr/>
         </p:nvSpPr>
@@ -19319,13 +20088,19 @@
           <a:bodyPr/>
           <a:lstStyle/>
           <a:p>
-            <a:endParaRPr lang="en-US"/>
-          </a:p>
-        </p:txBody>
-      </p:sp>
-      <p:sp>
-        <p:nvSpPr>
-          <p:cNvPr id="18" name="Text 16"/>
+            <a:endParaRPr lang="en-US" dirty="0"/>
+          </a:p>
+        </p:txBody>
+      </p:sp>
+      <p:sp>
+        <p:nvSpPr>
+          <p:cNvPr id="18" name="Text 16">
+            <a:extLst>
+              <a:ext uri="{FF2B5EF4-FFF2-40B4-BE49-F238E27FC236}">
+                <a16:creationId xmlns:a16="http://schemas.microsoft.com/office/drawing/2014/main" id="{3734F182-17B9-4AD3-E404-7D1E34379637}"/>
+              </a:ext>
+            </a:extLst>
+          </p:cNvPr>
           <p:cNvSpPr/>
           <p:nvPr/>
         </p:nvSpPr>
@@ -19364,7 +20139,13 @@
       </p:sp>
       <p:sp>
         <p:nvSpPr>
-          <p:cNvPr id="19" name="Shape 17"/>
+          <p:cNvPr id="19" name="Shape 17">
+            <a:extLst>
+              <a:ext uri="{FF2B5EF4-FFF2-40B4-BE49-F238E27FC236}">
+                <a16:creationId xmlns:a16="http://schemas.microsoft.com/office/drawing/2014/main" id="{47CCF01D-3BE3-FE7A-40C1-0402B5CB6BCC}"/>
+              </a:ext>
+            </a:extLst>
+          </p:cNvPr>
           <p:cNvSpPr/>
           <p:nvPr/>
         </p:nvSpPr>
@@ -19396,7 +20177,13 @@
       </p:sp>
       <p:sp>
         <p:nvSpPr>
-          <p:cNvPr id="20" name="Text 18"/>
+          <p:cNvPr id="20" name="Text 18">
+            <a:extLst>
+              <a:ext uri="{FF2B5EF4-FFF2-40B4-BE49-F238E27FC236}">
+                <a16:creationId xmlns:a16="http://schemas.microsoft.com/office/drawing/2014/main" id="{42FC7D60-C736-5FA1-133E-428BDD6EB739}"/>
+              </a:ext>
+            </a:extLst>
+          </p:cNvPr>
           <p:cNvSpPr/>
           <p:nvPr/>
         </p:nvSpPr>
@@ -19435,7 +20222,13 @@
       </p:sp>
       <p:sp>
         <p:nvSpPr>
-          <p:cNvPr id="21" name="Shape 19"/>
+          <p:cNvPr id="21" name="Shape 19">
+            <a:extLst>
+              <a:ext uri="{FF2B5EF4-FFF2-40B4-BE49-F238E27FC236}">
+                <a16:creationId xmlns:a16="http://schemas.microsoft.com/office/drawing/2014/main" id="{087E81DB-80F8-4AEF-8725-3E4293F76D50}"/>
+              </a:ext>
+            </a:extLst>
+          </p:cNvPr>
           <p:cNvSpPr/>
           <p:nvPr/>
         </p:nvSpPr>
@@ -19467,7 +20260,13 @@
       </p:sp>
       <p:sp>
         <p:nvSpPr>
-          <p:cNvPr id="22" name="Text 20"/>
+          <p:cNvPr id="22" name="Text 20">
+            <a:extLst>
+              <a:ext uri="{FF2B5EF4-FFF2-40B4-BE49-F238E27FC236}">
+                <a16:creationId xmlns:a16="http://schemas.microsoft.com/office/drawing/2014/main" id="{AE8EEB21-FD03-ACE7-3BEA-57821E66DB29}"/>
+              </a:ext>
+            </a:extLst>
+          </p:cNvPr>
           <p:cNvSpPr/>
           <p:nvPr/>
         </p:nvSpPr>
@@ -19506,7 +20305,13 @@
       </p:sp>
       <p:sp>
         <p:nvSpPr>
-          <p:cNvPr id="23" name="Shape 21"/>
+          <p:cNvPr id="23" name="Shape 21">
+            <a:extLst>
+              <a:ext uri="{FF2B5EF4-FFF2-40B4-BE49-F238E27FC236}">
+                <a16:creationId xmlns:a16="http://schemas.microsoft.com/office/drawing/2014/main" id="{7C4A0032-2C3C-3E85-BB7F-E42DD460F36D}"/>
+              </a:ext>
+            </a:extLst>
+          </p:cNvPr>
           <p:cNvSpPr/>
           <p:nvPr/>
         </p:nvSpPr>
@@ -19538,7 +20343,13 @@
       </p:sp>
       <p:sp>
         <p:nvSpPr>
-          <p:cNvPr id="24" name="Text 22"/>
+          <p:cNvPr id="24" name="Text 22">
+            <a:extLst>
+              <a:ext uri="{FF2B5EF4-FFF2-40B4-BE49-F238E27FC236}">
+                <a16:creationId xmlns:a16="http://schemas.microsoft.com/office/drawing/2014/main" id="{E7EA016A-DD67-31F5-84A6-010B9F09F1D2}"/>
+              </a:ext>
+            </a:extLst>
+          </p:cNvPr>
           <p:cNvSpPr/>
           <p:nvPr/>
         </p:nvSpPr>
@@ -19569,7 +20380,7 @@
                 <a:ea typeface="Calibri" pitchFamily="34" charset="-122"/>
                 <a:cs typeface="Calibri" pitchFamily="34" charset="-120"/>
               </a:rPr>
-              <a:t>~42</a:t>
+              <a:t>~41</a:t>
             </a:r>
             <a:endParaRPr lang="en-US" sz="1100" dirty="0"/>
           </a:p>
@@ -19577,7 +20388,13 @@
       </p:sp>
       <p:sp>
         <p:nvSpPr>
-          <p:cNvPr id="25" name="Shape 23"/>
+          <p:cNvPr id="25" name="Shape 23">
+            <a:extLst>
+              <a:ext uri="{FF2B5EF4-FFF2-40B4-BE49-F238E27FC236}">
+                <a16:creationId xmlns:a16="http://schemas.microsoft.com/office/drawing/2014/main" id="{EB4C742A-83A4-F21F-E654-5400D60EA447}"/>
+              </a:ext>
+            </a:extLst>
+          </p:cNvPr>
           <p:cNvSpPr/>
           <p:nvPr/>
         </p:nvSpPr>
@@ -19609,7 +20426,13 @@
       </p:sp>
       <p:sp>
         <p:nvSpPr>
-          <p:cNvPr id="26" name="Text 24"/>
+          <p:cNvPr id="26" name="Text 24">
+            <a:extLst>
+              <a:ext uri="{FF2B5EF4-FFF2-40B4-BE49-F238E27FC236}">
+                <a16:creationId xmlns:a16="http://schemas.microsoft.com/office/drawing/2014/main" id="{1085EF5D-51C5-B57E-6D89-9CB692C2A7F9}"/>
+              </a:ext>
+            </a:extLst>
+          </p:cNvPr>
           <p:cNvSpPr/>
           <p:nvPr/>
         </p:nvSpPr>
@@ -19640,7 +20463,7 @@
                 <a:ea typeface="Calibri" pitchFamily="34" charset="-122"/>
                 <a:cs typeface="Calibri" pitchFamily="34" charset="-120"/>
               </a:rPr>
-              <a:t>~385</a:t>
+              <a:t>~1183</a:t>
             </a:r>
             <a:endParaRPr lang="en-US" sz="1100" dirty="0"/>
           </a:p>
@@ -19648,7 +20471,13 @@
       </p:sp>
       <p:sp>
         <p:nvSpPr>
-          <p:cNvPr id="27" name="Shape 25"/>
+          <p:cNvPr id="27" name="Shape 25">
+            <a:extLst>
+              <a:ext uri="{FF2B5EF4-FFF2-40B4-BE49-F238E27FC236}">
+                <a16:creationId xmlns:a16="http://schemas.microsoft.com/office/drawing/2014/main" id="{064C7BFB-B546-8923-EFA9-D524D1552D6E}"/>
+              </a:ext>
+            </a:extLst>
+          </p:cNvPr>
           <p:cNvSpPr/>
           <p:nvPr/>
         </p:nvSpPr>
@@ -19680,7 +20509,13 @@
       </p:sp>
       <p:sp>
         <p:nvSpPr>
-          <p:cNvPr id="28" name="Text 26"/>
+          <p:cNvPr id="28" name="Text 26">
+            <a:extLst>
+              <a:ext uri="{FF2B5EF4-FFF2-40B4-BE49-F238E27FC236}">
+                <a16:creationId xmlns:a16="http://schemas.microsoft.com/office/drawing/2014/main" id="{8AE60192-CAB1-8639-378E-4F089805C8CD}"/>
+              </a:ext>
+            </a:extLst>
+          </p:cNvPr>
           <p:cNvSpPr/>
           <p:nvPr/>
         </p:nvSpPr>
@@ -19719,7 +20554,13 @@
       </p:sp>
       <p:sp>
         <p:nvSpPr>
-          <p:cNvPr id="29" name="Shape 27"/>
+          <p:cNvPr id="29" name="Shape 27">
+            <a:extLst>
+              <a:ext uri="{FF2B5EF4-FFF2-40B4-BE49-F238E27FC236}">
+                <a16:creationId xmlns:a16="http://schemas.microsoft.com/office/drawing/2014/main" id="{E5C491C3-0DBA-CB8A-2565-11CF847B1F83}"/>
+              </a:ext>
+            </a:extLst>
+          </p:cNvPr>
           <p:cNvSpPr/>
           <p:nvPr/>
         </p:nvSpPr>
@@ -19751,7 +20592,13 @@
       </p:sp>
       <p:sp>
         <p:nvSpPr>
-          <p:cNvPr id="30" name="Text 28"/>
+          <p:cNvPr id="30" name="Text 28">
+            <a:extLst>
+              <a:ext uri="{FF2B5EF4-FFF2-40B4-BE49-F238E27FC236}">
+                <a16:creationId xmlns:a16="http://schemas.microsoft.com/office/drawing/2014/main" id="{D3B97845-F9FC-BB19-97C8-E7AA8EF8FE7F}"/>
+              </a:ext>
+            </a:extLst>
+          </p:cNvPr>
           <p:cNvSpPr/>
           <p:nvPr/>
         </p:nvSpPr>
@@ -19790,7 +20637,13 @@
       </p:sp>
       <p:sp>
         <p:nvSpPr>
-          <p:cNvPr id="31" name="Shape 29"/>
+          <p:cNvPr id="31" name="Shape 29">
+            <a:extLst>
+              <a:ext uri="{FF2B5EF4-FFF2-40B4-BE49-F238E27FC236}">
+                <a16:creationId xmlns:a16="http://schemas.microsoft.com/office/drawing/2014/main" id="{F82BC4EA-3DC2-ECE5-1BFC-06B15BA7668E}"/>
+              </a:ext>
+            </a:extLst>
+          </p:cNvPr>
           <p:cNvSpPr/>
           <p:nvPr/>
         </p:nvSpPr>
@@ -19822,7 +20675,13 @@
       </p:sp>
       <p:sp>
         <p:nvSpPr>
-          <p:cNvPr id="32" name="Text 30"/>
+          <p:cNvPr id="32" name="Text 30">
+            <a:extLst>
+              <a:ext uri="{FF2B5EF4-FFF2-40B4-BE49-F238E27FC236}">
+                <a16:creationId xmlns:a16="http://schemas.microsoft.com/office/drawing/2014/main" id="{757DECF3-DF72-0B06-AF34-E243CD2EE8AC}"/>
+              </a:ext>
+            </a:extLst>
+          </p:cNvPr>
           <p:cNvSpPr/>
           <p:nvPr/>
         </p:nvSpPr>
@@ -19861,7 +20720,13 @@
       </p:sp>
       <p:sp>
         <p:nvSpPr>
-          <p:cNvPr id="33" name="Shape 31"/>
+          <p:cNvPr id="33" name="Shape 31">
+            <a:extLst>
+              <a:ext uri="{FF2B5EF4-FFF2-40B4-BE49-F238E27FC236}">
+                <a16:creationId xmlns:a16="http://schemas.microsoft.com/office/drawing/2014/main" id="{1D6AE899-5627-FB1E-CCA1-9FA586C4ABC2}"/>
+              </a:ext>
+            </a:extLst>
+          </p:cNvPr>
           <p:cNvSpPr/>
           <p:nvPr/>
         </p:nvSpPr>
@@ -19893,7 +20758,13 @@
       </p:sp>
       <p:sp>
         <p:nvSpPr>
-          <p:cNvPr id="34" name="Text 32"/>
+          <p:cNvPr id="34" name="Text 32">
+            <a:extLst>
+              <a:ext uri="{FF2B5EF4-FFF2-40B4-BE49-F238E27FC236}">
+                <a16:creationId xmlns:a16="http://schemas.microsoft.com/office/drawing/2014/main" id="{26EA325B-442E-26BD-77F4-531111FBE4A9}"/>
+              </a:ext>
+            </a:extLst>
+          </p:cNvPr>
           <p:cNvSpPr/>
           <p:nvPr/>
         </p:nvSpPr>
@@ -19932,7 +20803,13 @@
       </p:sp>
       <p:sp>
         <p:nvSpPr>
-          <p:cNvPr id="35" name="Shape 33"/>
+          <p:cNvPr id="35" name="Shape 33">
+            <a:extLst>
+              <a:ext uri="{FF2B5EF4-FFF2-40B4-BE49-F238E27FC236}">
+                <a16:creationId xmlns:a16="http://schemas.microsoft.com/office/drawing/2014/main" id="{8E6CB626-C3CF-6CE5-8253-001EDA6512C1}"/>
+              </a:ext>
+            </a:extLst>
+          </p:cNvPr>
           <p:cNvSpPr/>
           <p:nvPr/>
         </p:nvSpPr>
@@ -19964,7 +20841,13 @@
       </p:sp>
       <p:sp>
         <p:nvSpPr>
-          <p:cNvPr id="36" name="Text 34"/>
+          <p:cNvPr id="36" name="Text 34">
+            <a:extLst>
+              <a:ext uri="{FF2B5EF4-FFF2-40B4-BE49-F238E27FC236}">
+                <a16:creationId xmlns:a16="http://schemas.microsoft.com/office/drawing/2014/main" id="{1DC43D6D-4880-DBE6-F092-8FDEA2D8BD65}"/>
+              </a:ext>
+            </a:extLst>
+          </p:cNvPr>
           <p:cNvSpPr/>
           <p:nvPr/>
         </p:nvSpPr>
@@ -20003,7 +20886,13 @@
       </p:sp>
       <p:sp>
         <p:nvSpPr>
-          <p:cNvPr id="37" name="Shape 35"/>
+          <p:cNvPr id="37" name="Shape 35">
+            <a:extLst>
+              <a:ext uri="{FF2B5EF4-FFF2-40B4-BE49-F238E27FC236}">
+                <a16:creationId xmlns:a16="http://schemas.microsoft.com/office/drawing/2014/main" id="{4F5794AC-A65E-7C60-056F-720886F26B1D}"/>
+              </a:ext>
+            </a:extLst>
+          </p:cNvPr>
           <p:cNvSpPr/>
           <p:nvPr/>
         </p:nvSpPr>
@@ -20035,7 +20924,13 @@
       </p:sp>
       <p:sp>
         <p:nvSpPr>
-          <p:cNvPr id="38" name="Text 36"/>
+          <p:cNvPr id="38" name="Text 36">
+            <a:extLst>
+              <a:ext uri="{FF2B5EF4-FFF2-40B4-BE49-F238E27FC236}">
+                <a16:creationId xmlns:a16="http://schemas.microsoft.com/office/drawing/2014/main" id="{08FF728B-C7D8-28AC-306F-080A15BC6CA3}"/>
+              </a:ext>
+            </a:extLst>
+          </p:cNvPr>
           <p:cNvSpPr/>
           <p:nvPr/>
         </p:nvSpPr>
@@ -20074,7 +20969,13 @@
       </p:sp>
       <p:sp>
         <p:nvSpPr>
-          <p:cNvPr id="39" name="Shape 37"/>
+          <p:cNvPr id="39" name="Shape 37">
+            <a:extLst>
+              <a:ext uri="{FF2B5EF4-FFF2-40B4-BE49-F238E27FC236}">
+                <a16:creationId xmlns:a16="http://schemas.microsoft.com/office/drawing/2014/main" id="{CA5CA9FF-AAD9-1F95-E1AE-47D9AA57C15B}"/>
+              </a:ext>
+            </a:extLst>
+          </p:cNvPr>
           <p:cNvSpPr/>
           <p:nvPr/>
         </p:nvSpPr>
@@ -20106,7 +21007,13 @@
       </p:sp>
       <p:sp>
         <p:nvSpPr>
-          <p:cNvPr id="40" name="Text 38"/>
+          <p:cNvPr id="40" name="Text 38">
+            <a:extLst>
+              <a:ext uri="{FF2B5EF4-FFF2-40B4-BE49-F238E27FC236}">
+                <a16:creationId xmlns:a16="http://schemas.microsoft.com/office/drawing/2014/main" id="{AB992B1D-69CC-C02F-1014-FD0625C1EDD4}"/>
+              </a:ext>
+            </a:extLst>
+          </p:cNvPr>
           <p:cNvSpPr/>
           <p:nvPr/>
         </p:nvSpPr>
@@ -20145,7 +21052,13 @@
       </p:sp>
       <p:sp>
         <p:nvSpPr>
-          <p:cNvPr id="41" name="Shape 39"/>
+          <p:cNvPr id="41" name="Shape 39">
+            <a:extLst>
+              <a:ext uri="{FF2B5EF4-FFF2-40B4-BE49-F238E27FC236}">
+                <a16:creationId xmlns:a16="http://schemas.microsoft.com/office/drawing/2014/main" id="{1F312746-6448-0297-5D9D-2AD01C693423}"/>
+              </a:ext>
+            </a:extLst>
+          </p:cNvPr>
           <p:cNvSpPr/>
           <p:nvPr/>
         </p:nvSpPr>
@@ -20177,7 +21090,13 @@
       </p:sp>
       <p:sp>
         <p:nvSpPr>
-          <p:cNvPr id="42" name="Text 40"/>
+          <p:cNvPr id="42" name="Text 40">
+            <a:extLst>
+              <a:ext uri="{FF2B5EF4-FFF2-40B4-BE49-F238E27FC236}">
+                <a16:creationId xmlns:a16="http://schemas.microsoft.com/office/drawing/2014/main" id="{0C6A9EAF-6B21-C8A9-A426-CA618CF0F3B3}"/>
+              </a:ext>
+            </a:extLst>
+          </p:cNvPr>
           <p:cNvSpPr/>
           <p:nvPr/>
         </p:nvSpPr>
@@ -20216,7 +21135,13 @@
       </p:sp>
       <p:sp>
         <p:nvSpPr>
-          <p:cNvPr id="43" name="Shape 41"/>
+          <p:cNvPr id="43" name="Shape 41">
+            <a:extLst>
+              <a:ext uri="{FF2B5EF4-FFF2-40B4-BE49-F238E27FC236}">
+                <a16:creationId xmlns:a16="http://schemas.microsoft.com/office/drawing/2014/main" id="{02C46CAF-81BA-E678-19B0-37D4EBB113BD}"/>
+              </a:ext>
+            </a:extLst>
+          </p:cNvPr>
           <p:cNvSpPr/>
           <p:nvPr/>
         </p:nvSpPr>
@@ -20248,7 +21173,13 @@
       </p:sp>
       <p:sp>
         <p:nvSpPr>
-          <p:cNvPr id="44" name="Text 42"/>
+          <p:cNvPr id="44" name="Text 42">
+            <a:extLst>
+              <a:ext uri="{FF2B5EF4-FFF2-40B4-BE49-F238E27FC236}">
+                <a16:creationId xmlns:a16="http://schemas.microsoft.com/office/drawing/2014/main" id="{C5A3B367-EA53-AE28-373C-658BFA3DFAA3}"/>
+              </a:ext>
+            </a:extLst>
+          </p:cNvPr>
           <p:cNvSpPr/>
           <p:nvPr/>
         </p:nvSpPr>
@@ -20267,19 +21198,16 @@
           <a:bodyPr wrap="square" rtlCol="0" anchor="ctr"/>
           <a:lstStyle/>
           <a:p>
-            <a:pPr marL="0" indent="0">
-              <a:buNone/>
-            </a:pPr>
             <a:r>
               <a:rPr lang="en-US" sz="1100" b="1" dirty="0">
                 <a:solidFill>
-                  <a:srgbClr val="B45309"/>
-                </a:solidFill>
-                <a:latin typeface="Calibri" pitchFamily="34" charset="0"/>
-                <a:ea typeface="Calibri" pitchFamily="34" charset="-122"/>
-                <a:cs typeface="Calibri" pitchFamily="34" charset="-120"/>
-              </a:rPr>
-              <a:t>↓ Rare locations</a:t>
+                  <a:srgbClr val="475569"/>
+                </a:solidFill>
+                <a:latin typeface="Calibri" pitchFamily="34" charset="0"/>
+                <a:ea typeface="Calibri" pitchFamily="34" charset="-122"/>
+                <a:cs typeface="Calibri" pitchFamily="34" charset="-120"/>
+              </a:rPr>
+              <a:t>— no pattern</a:t>
             </a:r>
             <a:endParaRPr lang="en-US" sz="1100" dirty="0"/>
           </a:p>
@@ -20287,7 +21215,13 @@
       </p:sp>
       <p:sp>
         <p:nvSpPr>
-          <p:cNvPr id="45" name="Shape 43"/>
+          <p:cNvPr id="45" name="Shape 43">
+            <a:extLst>
+              <a:ext uri="{FF2B5EF4-FFF2-40B4-BE49-F238E27FC236}">
+                <a16:creationId xmlns:a16="http://schemas.microsoft.com/office/drawing/2014/main" id="{6F6C1C5E-A591-B762-3ED3-7C21453238FF}"/>
+              </a:ext>
+            </a:extLst>
+          </p:cNvPr>
           <p:cNvSpPr/>
           <p:nvPr/>
         </p:nvSpPr>
@@ -20319,7 +21253,13 @@
       </p:sp>
       <p:sp>
         <p:nvSpPr>
-          <p:cNvPr id="46" name="Text 44"/>
+          <p:cNvPr id="46" name="Text 44">
+            <a:extLst>
+              <a:ext uri="{FF2B5EF4-FFF2-40B4-BE49-F238E27FC236}">
+                <a16:creationId xmlns:a16="http://schemas.microsoft.com/office/drawing/2014/main" id="{AD8BDACE-12DF-2BAD-A6A6-AA4DCE3C6B81}"/>
+              </a:ext>
+            </a:extLst>
+          </p:cNvPr>
           <p:cNvSpPr/>
           <p:nvPr/>
         </p:nvSpPr>
@@ -20358,7 +21298,13 @@
       </p:sp>
       <p:sp>
         <p:nvSpPr>
-          <p:cNvPr id="47" name="Shape 45"/>
+          <p:cNvPr id="47" name="Shape 45">
+            <a:extLst>
+              <a:ext uri="{FF2B5EF4-FFF2-40B4-BE49-F238E27FC236}">
+                <a16:creationId xmlns:a16="http://schemas.microsoft.com/office/drawing/2014/main" id="{EC195C5E-4AAB-4B01-3B41-3368CF6CF5E4}"/>
+              </a:ext>
+            </a:extLst>
+          </p:cNvPr>
           <p:cNvSpPr/>
           <p:nvPr/>
         </p:nvSpPr>
@@ -20397,7 +21343,13 @@
       </p:sp>
       <p:sp>
         <p:nvSpPr>
-          <p:cNvPr id="48" name="Shape 46"/>
+          <p:cNvPr id="48" name="Shape 46">
+            <a:extLst>
+              <a:ext uri="{FF2B5EF4-FFF2-40B4-BE49-F238E27FC236}">
+                <a16:creationId xmlns:a16="http://schemas.microsoft.com/office/drawing/2014/main" id="{ADFC423B-76D7-A3E0-C6C3-12F3ACF06012}"/>
+              </a:ext>
+            </a:extLst>
+          </p:cNvPr>
           <p:cNvSpPr/>
           <p:nvPr/>
         </p:nvSpPr>
@@ -20429,7 +21381,13 @@
       </p:sp>
       <p:sp>
         <p:nvSpPr>
-          <p:cNvPr id="49" name="Text 47"/>
+          <p:cNvPr id="49" name="Text 47">
+            <a:extLst>
+              <a:ext uri="{FF2B5EF4-FFF2-40B4-BE49-F238E27FC236}">
+                <a16:creationId xmlns:a16="http://schemas.microsoft.com/office/drawing/2014/main" id="{61A6D19A-856D-55CD-5C70-A4240F597129}"/>
+              </a:ext>
+            </a:extLst>
+          </p:cNvPr>
           <p:cNvSpPr/>
           <p:nvPr/>
         </p:nvSpPr>
@@ -20485,7 +21443,13 @@
       </p:sp>
       <p:sp>
         <p:nvSpPr>
-          <p:cNvPr id="50" name="Text 48"/>
+          <p:cNvPr id="50" name="Text 48">
+            <a:extLst>
+              <a:ext uri="{FF2B5EF4-FFF2-40B4-BE49-F238E27FC236}">
+                <a16:creationId xmlns:a16="http://schemas.microsoft.com/office/drawing/2014/main" id="{7F93CD09-E419-043D-A058-D68B9BAF8580}"/>
+              </a:ext>
+            </a:extLst>
+          </p:cNvPr>
           <p:cNvSpPr/>
           <p:nvPr/>
         </p:nvSpPr>
@@ -20639,6 +21603,11 @@
         </p:txBody>
       </p:sp>
     </p:spTree>
+    <p:extLst>
+      <p:ext uri="{BB962C8B-B14F-4D97-AF65-F5344CB8AC3E}">
+        <p14:creationId xmlns:p14="http://schemas.microsoft.com/office/powerpoint/2010/main" val="483128883"/>
+      </p:ext>
+    </p:extLst>
   </p:cSld>
   <p:clrMapOvr>
     <a:masterClrMapping/>
@@ -20646,7 +21615,7 @@
 </p:sld>
 </file>
 
-<file path=ppt/slides/slide22.xml><?xml version="1.0" encoding="utf-8"?>
+<file path=ppt/slides/slide24.xml><?xml version="1.0" encoding="utf-8"?>
 <p:sld xmlns:a="http://schemas.openxmlformats.org/drawingml/2006/main" xmlns:r="http://schemas.openxmlformats.org/officeDocument/2006/relationships" xmlns:p="http://schemas.openxmlformats.org/presentationml/2006/main">
   <p:cSld name="Slide 22">
     <p:bg>
@@ -22663,7 +23632,7 @@
           <a:bodyPr/>
           <a:lstStyle/>
           <a:p>
-            <a:endParaRPr lang="en-US"/>
+            <a:endParaRPr lang="en-US" dirty="0"/>
           </a:p>
         </p:txBody>
       </p:sp>
@@ -22700,7 +23669,18 @@
                 <a:ea typeface="Calibri" pitchFamily="34" charset="-122"/>
                 <a:cs typeface="Calibri" pitchFamily="34" charset="-120"/>
               </a:rPr>
-              <a:t>Problem 1 — False Negatives (Hard Anomalies)</a:t>
+              <a:t>Problem 1 </a:t>
+            </a:r>
+            <a:r>
+              <a:rPr lang="en-US" sz="1250" b="1">
+                <a:solidFill>
+                  <a:srgbClr val="FFFFFF"/>
+                </a:solidFill>
+                <a:latin typeface="Calibri" pitchFamily="34" charset="0"/>
+                <a:ea typeface="Calibri" pitchFamily="34" charset="-122"/>
+                <a:cs typeface="Calibri" pitchFamily="34" charset="-120"/>
+              </a:rPr>
+              <a:t>— False Negatives (Hard Anomalies)</a:t>
             </a:r>
             <a:endParaRPr lang="en-US" sz="1250" dirty="0"/>
           </a:p>
@@ -25494,6 +26474,583 @@
 
 <file path=ppt/slides/slide7.xml><?xml version="1.0" encoding="utf-8"?>
 <p:sld xmlns:a="http://schemas.openxmlformats.org/drawingml/2006/main" xmlns:r="http://schemas.openxmlformats.org/officeDocument/2006/relationships" xmlns:p="http://schemas.openxmlformats.org/presentationml/2006/main">
+  <p:cSld name="Slide 8">
+    <p:bg>
+      <p:bgPr>
+        <a:solidFill>
+          <a:srgbClr val="FFFFFF"/>
+        </a:solidFill>
+        <a:effectLst/>
+      </p:bgPr>
+    </p:bg>
+    <p:spTree>
+      <p:nvGrpSpPr>
+        <p:cNvPr id="1" name=""/>
+        <p:cNvGrpSpPr/>
+        <p:nvPr/>
+      </p:nvGrpSpPr>
+      <p:grpSpPr>
+        <a:xfrm>
+          <a:off x="0" y="0"/>
+          <a:ext cx="0" cy="0"/>
+          <a:chOff x="0" y="0"/>
+          <a:chExt cx="0" cy="0"/>
+        </a:xfrm>
+      </p:grpSpPr>
+      <p:sp>
+        <p:nvSpPr>
+          <p:cNvPr id="2" name="Shape 0"/>
+          <p:cNvSpPr/>
+          <p:nvPr/>
+        </p:nvSpPr>
+        <p:spPr>
+          <a:xfrm>
+            <a:off x="0" y="0"/>
+            <a:ext cx="9144000" cy="64008"/>
+          </a:xfrm>
+          <a:prstGeom prst="rect">
+            <a:avLst/>
+          </a:prstGeom>
+          <a:solidFill>
+            <a:srgbClr val="0D9488"/>
+          </a:solidFill>
+          <a:ln w="12700">
+            <a:solidFill>
+              <a:srgbClr val="0D9488"/>
+            </a:solidFill>
+            <a:prstDash val="solid"/>
+          </a:ln>
+        </p:spPr>
+        <p:txBody>
+          <a:bodyPr/>
+          <a:lstStyle/>
+          <a:p>
+            <a:endParaRPr lang="en-US"/>
+          </a:p>
+        </p:txBody>
+      </p:sp>
+      <p:sp>
+        <p:nvSpPr>
+          <p:cNvPr id="3" name="Text 1"/>
+          <p:cNvSpPr/>
+          <p:nvPr/>
+        </p:nvSpPr>
+        <p:spPr>
+          <a:xfrm>
+            <a:off x="457200" y="182880"/>
+            <a:ext cx="8229600" cy="548640"/>
+          </a:xfrm>
+          <a:prstGeom prst="rect">
+            <a:avLst/>
+          </a:prstGeom>
+          <a:noFill/>
+          <a:ln/>
+        </p:spPr>
+        <p:txBody>
+          <a:bodyPr wrap="square" rtlCol="0" anchor="ctr"/>
+          <a:lstStyle/>
+          <a:p>
+            <a:pPr marL="0" indent="0">
+              <a:buNone/>
+            </a:pPr>
+            <a:r>
+              <a:rPr lang="en-US" sz="2200" b="1" dirty="0">
+                <a:solidFill>
+                  <a:srgbClr val="1B2A4A"/>
+                </a:solidFill>
+                <a:latin typeface="Cambria" pitchFamily="34" charset="0"/>
+                <a:ea typeface="Cambria" pitchFamily="34" charset="-122"/>
+                <a:cs typeface="Cambria" pitchFamily="34" charset="-120"/>
+              </a:rPr>
+              <a:t>CERE — Computation-Efficient Representation Ensemble</a:t>
+            </a:r>
+            <a:endParaRPr lang="en-US" sz="2200" dirty="0"/>
+          </a:p>
+        </p:txBody>
+      </p:sp>
+      <p:sp>
+        <p:nvSpPr>
+          <p:cNvPr id="4" name="Shape 2"/>
+          <p:cNvSpPr/>
+          <p:nvPr/>
+        </p:nvSpPr>
+        <p:spPr>
+          <a:xfrm>
+            <a:off x="457200" y="822960"/>
+            <a:ext cx="8229600" cy="548640"/>
+          </a:xfrm>
+          <a:prstGeom prst="rect">
+            <a:avLst/>
+          </a:prstGeom>
+          <a:solidFill>
+            <a:srgbClr val="FFF7ED"/>
+          </a:solidFill>
+          <a:ln w="12700">
+            <a:solidFill>
+              <a:srgbClr val="FED7AA"/>
+            </a:solidFill>
+            <a:prstDash val="solid"/>
+          </a:ln>
+        </p:spPr>
+        <p:txBody>
+          <a:bodyPr/>
+          <a:lstStyle/>
+          <a:p>
+            <a:endParaRPr lang="en-US"/>
+          </a:p>
+        </p:txBody>
+      </p:sp>
+      <p:sp>
+        <p:nvSpPr>
+          <p:cNvPr id="5" name="Text 3"/>
+          <p:cNvSpPr/>
+          <p:nvPr/>
+        </p:nvSpPr>
+        <p:spPr>
+          <a:xfrm>
+            <a:off x="594360" y="886968"/>
+            <a:ext cx="7955280" cy="420624"/>
+          </a:xfrm>
+          <a:prstGeom prst="rect">
+            <a:avLst/>
+          </a:prstGeom>
+          <a:noFill/>
+          <a:ln/>
+        </p:spPr>
+        <p:txBody>
+          <a:bodyPr wrap="square" rtlCol="0" anchor="ctr"/>
+          <a:lstStyle/>
+          <a:p>
+            <a:pPr marL="0" indent="0">
+              <a:buNone/>
+            </a:pPr>
+            <a:r>
+              <a:rPr lang="en-US" sz="1200" dirty="0">
+                <a:solidFill>
+                  <a:srgbClr val="92400E"/>
+                </a:solidFill>
+                <a:latin typeface="Calibri" pitchFamily="34" charset="0"/>
+                <a:ea typeface="Calibri" pitchFamily="34" charset="-122"/>
+                <a:cs typeface="Calibri" pitchFamily="34" charset="-120"/>
+              </a:rPr>
+              <a:t>NOTE: r separate networks run sequentially → cost scales linearly with r. CERE computes all r representations in a single batched operation.</a:t>
+            </a:r>
+            <a:endParaRPr lang="en-US" sz="1200" dirty="0"/>
+          </a:p>
+        </p:txBody>
+      </p:sp>
+      <p:sp>
+        <p:nvSpPr>
+          <p:cNvPr id="6" name="Text 4"/>
+          <p:cNvSpPr/>
+          <p:nvPr/>
+        </p:nvSpPr>
+        <p:spPr>
+          <a:xfrm>
+            <a:off x="457200" y="1508760"/>
+            <a:ext cx="4114800" cy="310896"/>
+          </a:xfrm>
+          <a:prstGeom prst="rect">
+            <a:avLst/>
+          </a:prstGeom>
+          <a:noFill/>
+          <a:ln/>
+        </p:spPr>
+        <p:txBody>
+          <a:bodyPr wrap="square" rtlCol="0" anchor="ctr"/>
+          <a:lstStyle/>
+          <a:p>
+            <a:pPr marL="0" indent="0">
+              <a:buNone/>
+            </a:pPr>
+            <a:r>
+              <a:rPr lang="en-US" sz="1300" b="1" dirty="0">
+                <a:solidFill>
+                  <a:srgbClr val="0D9488"/>
+                </a:solidFill>
+                <a:latin typeface="Calibri" pitchFamily="34" charset="0"/>
+                <a:ea typeface="Calibri" pitchFamily="34" charset="-122"/>
+                <a:cs typeface="Calibri" pitchFamily="34" charset="-120"/>
+              </a:rPr>
+              <a:t>How CERE Works</a:t>
+            </a:r>
+            <a:endParaRPr lang="en-US" sz="1300" dirty="0"/>
+          </a:p>
+        </p:txBody>
+      </p:sp>
+      <p:sp>
+        <p:nvSpPr>
+          <p:cNvPr id="7" name="Text 5"/>
+          <p:cNvSpPr/>
+          <p:nvPr/>
+        </p:nvSpPr>
+        <p:spPr>
+          <a:xfrm>
+            <a:off x="457200" y="1554480"/>
+            <a:ext cx="4114800" cy="2468880"/>
+          </a:xfrm>
+          <a:prstGeom prst="rect">
+            <a:avLst/>
+          </a:prstGeom>
+          <a:noFill/>
+          <a:ln/>
+        </p:spPr>
+        <p:txBody>
+          <a:bodyPr wrap="square" rtlCol="0" anchor="ctr"/>
+          <a:lstStyle/>
+          <a:p>
+            <a:pPr marL="0" indent="0">
+              <a:buNone/>
+            </a:pPr>
+            <a:r>
+              <a:rPr lang="en-US" sz="1200" dirty="0">
+                <a:solidFill>
+                  <a:srgbClr val="475569"/>
+                </a:solidFill>
+                <a:latin typeface="Calibri" pitchFamily="34" charset="0"/>
+                <a:ea typeface="Calibri" pitchFamily="34" charset="-122"/>
+                <a:cs typeface="Calibri" pitchFamily="34" charset="-120"/>
+              </a:rPr>
+              <a:t>Each ensemble member i shares a base matrix </a:t>
+            </a:r>
+            <a:r>
+              <a:rPr lang="en-US" sz="1200" b="1" dirty="0">
+                <a:solidFill>
+                  <a:srgbClr val="1B2A4A"/>
+                </a:solidFill>
+                <a:latin typeface="Calibri" pitchFamily="34" charset="0"/>
+                <a:ea typeface="Calibri" pitchFamily="34" charset="-122"/>
+                <a:cs typeface="Calibri" pitchFamily="34" charset="-120"/>
+              </a:rPr>
+              <a:t>W₀</a:t>
+            </a:r>
+            <a:r>
+              <a:rPr lang="en-US" sz="1200" dirty="0">
+                <a:solidFill>
+                  <a:srgbClr val="475569"/>
+                </a:solidFill>
+                <a:latin typeface="Calibri" pitchFamily="34" charset="0"/>
+                <a:ea typeface="Calibri" pitchFamily="34" charset="-122"/>
+                <a:cs typeface="Calibri" pitchFamily="34" charset="-120"/>
+              </a:rPr>
+              <a:t>, further diversified by two small random vectors </a:t>
+            </a:r>
+            <a:r>
+              <a:rPr lang="en-US" sz="1200" b="1" dirty="0">
+                <a:solidFill>
+                  <a:srgbClr val="1B2A4A"/>
+                </a:solidFill>
+                <a:latin typeface="Calibri" pitchFamily="34" charset="0"/>
+                <a:ea typeface="Calibri" pitchFamily="34" charset="-122"/>
+                <a:cs typeface="Calibri" pitchFamily="34" charset="-120"/>
+              </a:rPr>
+              <a:t>pᵢ ∈ ℝᵐ</a:t>
+            </a:r>
+            <a:r>
+              <a:rPr lang="en-US" sz="1200" dirty="0">
+                <a:solidFill>
+                  <a:srgbClr val="475569"/>
+                </a:solidFill>
+                <a:latin typeface="Calibri" pitchFamily="34" charset="0"/>
+                <a:ea typeface="Calibri" pitchFamily="34" charset="-122"/>
+                <a:cs typeface="Calibri" pitchFamily="34" charset="-120"/>
+              </a:rPr>
+              <a:t> and </a:t>
+            </a:r>
+            <a:r>
+              <a:rPr lang="en-US" sz="1200" b="1" dirty="0">
+                <a:solidFill>
+                  <a:srgbClr val="1B2A4A"/>
+                </a:solidFill>
+                <a:latin typeface="Calibri" pitchFamily="34" charset="0"/>
+                <a:ea typeface="Calibri" pitchFamily="34" charset="-122"/>
+                <a:cs typeface="Calibri" pitchFamily="34" charset="-120"/>
+              </a:rPr>
+              <a:t>qᵢ ∈ ℝⁿ</a:t>
+            </a:r>
+            <a:r>
+              <a:rPr lang="en-US" sz="1200" dirty="0">
+                <a:solidFill>
+                  <a:srgbClr val="475569"/>
+                </a:solidFill>
+                <a:latin typeface="Calibri" pitchFamily="34" charset="0"/>
+                <a:ea typeface="Calibri" pitchFamily="34" charset="-122"/>
+                <a:cs typeface="Calibri" pitchFamily="34" charset="-120"/>
+              </a:rPr>
+              <a:t>:
+</a:t>
+            </a:r>
+            <a:r>
+              <a:rPr lang="en-US" sz="1500" b="1" dirty="0">
+                <a:solidFill>
+                  <a:srgbClr val="0D9488"/>
+                </a:solidFill>
+                <a:latin typeface="Calibri" pitchFamily="34" charset="0"/>
+                <a:ea typeface="Calibri" pitchFamily="34" charset="-122"/>
+                <a:cs typeface="Calibri" pitchFamily="34" charset="-120"/>
+              </a:rPr>
+              <a:t>     Wᵢ  =  W₀ ∘ (pᵢ qᵢᵀ)</a:t>
+            </a:r>
+            <a:r>
+              <a:rPr lang="en-US" sz="1200" dirty="0">
+                <a:solidFill>
+                  <a:srgbClr val="475569"/>
+                </a:solidFill>
+                <a:latin typeface="Calibri" pitchFamily="34" charset="0"/>
+                <a:ea typeface="Calibri" pitchFamily="34" charset="-122"/>
+                <a:cs typeface="Calibri" pitchFamily="34" charset="-120"/>
+              </a:rPr>
+              <a:t>
+∘ = element-wise Hadamard product
+</a:t>
+            </a:r>
+            <a:r>
+              <a:rPr lang="en-US" sz="1200" b="1" dirty="0">
+                <a:solidFill>
+                  <a:srgbClr val="475569"/>
+                </a:solidFill>
+                <a:latin typeface="Calibri" pitchFamily="34" charset="0"/>
+                <a:ea typeface="Calibri" pitchFamily="34" charset="-122"/>
+                <a:cs typeface="Calibri" pitchFamily="34" charset="-120"/>
+              </a:rPr>
+              <a:t>All r representations are computed as a single parallel batch</a:t>
+            </a:r>
+            <a:r>
+              <a:rPr lang="en-US" sz="1200" dirty="0">
+                <a:solidFill>
+                  <a:srgbClr val="475569"/>
+                </a:solidFill>
+                <a:latin typeface="Calibri" pitchFamily="34" charset="0"/>
+                <a:ea typeface="Calibri" pitchFamily="34" charset="-122"/>
+                <a:cs typeface="Calibri" pitchFamily="34" charset="-120"/>
+              </a:rPr>
+              <a:t> — cost ≈ one forward pass regardless of r.</a:t>
+            </a:r>
+            <a:endParaRPr lang="en-US" sz="1200" dirty="0"/>
+          </a:p>
+        </p:txBody>
+      </p:sp>
+      <p:sp>
+        <p:nvSpPr>
+          <p:cNvPr id="8" name="Shape 6"/>
+          <p:cNvSpPr/>
+          <p:nvPr/>
+        </p:nvSpPr>
+        <p:spPr>
+          <a:xfrm>
+            <a:off x="4846320" y="1508760"/>
+            <a:ext cx="3886200" cy="2093976"/>
+          </a:xfrm>
+          <a:prstGeom prst="rect">
+            <a:avLst/>
+          </a:prstGeom>
+          <a:solidFill>
+            <a:srgbClr val="1B2A4A"/>
+          </a:solidFill>
+          <a:ln w="12700">
+            <a:solidFill>
+              <a:srgbClr val="1B2A4A"/>
+            </a:solidFill>
+            <a:prstDash val="solid"/>
+          </a:ln>
+          <a:effectLst>
+            <a:outerShdw blurRad="101600" dist="38100" dir="8100000" algn="bl" rotWithShape="0">
+              <a:srgbClr val="000000">
+                <a:alpha val="10000"/>
+              </a:srgbClr>
+            </a:outerShdw>
+          </a:effectLst>
+        </p:spPr>
+        <p:txBody>
+          <a:bodyPr/>
+          <a:lstStyle/>
+          <a:p>
+            <a:endParaRPr lang="en-US"/>
+          </a:p>
+        </p:txBody>
+      </p:sp>
+      <p:sp>
+        <p:nvSpPr>
+          <p:cNvPr id="13" name="Shape 11"/>
+          <p:cNvSpPr/>
+          <p:nvPr/>
+        </p:nvSpPr>
+        <p:spPr>
+          <a:xfrm>
+            <a:off x="4937760" y="3116291"/>
+            <a:ext cx="3611880" cy="36576"/>
+          </a:xfrm>
+          <a:prstGeom prst="rect">
+            <a:avLst/>
+          </a:prstGeom>
+          <a:solidFill>
+            <a:srgbClr val="0D9488"/>
+          </a:solidFill>
+          <a:ln w="12700">
+            <a:solidFill>
+              <a:srgbClr val="0D9488"/>
+            </a:solidFill>
+            <a:prstDash val="solid"/>
+          </a:ln>
+        </p:spPr>
+        <p:txBody>
+          <a:bodyPr/>
+          <a:lstStyle/>
+          <a:p>
+            <a:endParaRPr lang="en-US"/>
+          </a:p>
+        </p:txBody>
+      </p:sp>
+      <p:sp>
+        <p:nvSpPr>
+          <p:cNvPr id="14" name="Text 12"/>
+          <p:cNvSpPr/>
+          <p:nvPr/>
+        </p:nvSpPr>
+        <p:spPr>
+          <a:xfrm>
+            <a:off x="4937760" y="3207731"/>
+            <a:ext cx="3611880" cy="201168"/>
+          </a:xfrm>
+          <a:prstGeom prst="rect">
+            <a:avLst/>
+          </a:prstGeom>
+          <a:noFill/>
+          <a:ln/>
+        </p:spPr>
+        <p:txBody>
+          <a:bodyPr wrap="square" rtlCol="0" anchor="ctr"/>
+          <a:lstStyle/>
+          <a:p>
+            <a:pPr marL="0" indent="0" algn="ctr">
+              <a:buNone/>
+            </a:pPr>
+            <a:r>
+              <a:rPr lang="en-US" sz="1150" i="1" dirty="0">
+                <a:solidFill>
+                  <a:srgbClr val="14B8A6"/>
+                </a:solidFill>
+                <a:latin typeface="Calibri" pitchFamily="34" charset="0"/>
+                <a:ea typeface="Calibri" pitchFamily="34" charset="-122"/>
+                <a:cs typeface="Calibri" pitchFamily="34" charset="-120"/>
+              </a:rPr>
+              <a:t>r representations ≈ cost of 1 forward pass</a:t>
+            </a:r>
+            <a:endParaRPr lang="en-US" sz="1150" dirty="0"/>
+          </a:p>
+        </p:txBody>
+      </p:sp>
+      <p:sp>
+        <p:nvSpPr>
+          <p:cNvPr id="15" name="Shape 13"/>
+          <p:cNvSpPr/>
+          <p:nvPr/>
+        </p:nvSpPr>
+        <p:spPr>
+          <a:xfrm>
+            <a:off x="457200" y="4320540"/>
+            <a:ext cx="8229600" cy="438912"/>
+          </a:xfrm>
+          <a:prstGeom prst="rect">
+            <a:avLst/>
+          </a:prstGeom>
+          <a:solidFill>
+            <a:srgbClr val="F8FAFC"/>
+          </a:solidFill>
+          <a:ln w="12700">
+            <a:solidFill>
+              <a:srgbClr val="E2E8F0"/>
+            </a:solidFill>
+            <a:prstDash val="solid"/>
+          </a:ln>
+        </p:spPr>
+        <p:txBody>
+          <a:bodyPr/>
+          <a:lstStyle/>
+          <a:p>
+            <a:endParaRPr lang="en-US"/>
+          </a:p>
+        </p:txBody>
+      </p:sp>
+      <p:sp>
+        <p:nvSpPr>
+          <p:cNvPr id="16" name="Text 14"/>
+          <p:cNvSpPr/>
+          <p:nvPr/>
+        </p:nvSpPr>
+        <p:spPr>
+          <a:xfrm>
+            <a:off x="594360" y="4384548"/>
+            <a:ext cx="7955280" cy="347472"/>
+          </a:xfrm>
+          <a:prstGeom prst="rect">
+            <a:avLst/>
+          </a:prstGeom>
+          <a:noFill/>
+          <a:ln/>
+        </p:spPr>
+        <p:txBody>
+          <a:bodyPr wrap="square" rtlCol="0" anchor="ctr"/>
+          <a:lstStyle/>
+          <a:p>
+            <a:pPr marL="0" indent="0" algn="ctr">
+              <a:buNone/>
+            </a:pPr>
+            <a:r>
+              <a:rPr lang="en-US" sz="1200" b="1" dirty="0">
+                <a:solidFill>
+                  <a:srgbClr val="1E293B"/>
+                </a:solidFill>
+                <a:latin typeface="Calibri" pitchFamily="34" charset="0"/>
+                <a:ea typeface="Calibri" pitchFamily="34" charset="-122"/>
+                <a:cs typeface="Calibri" pitchFamily="34" charset="-120"/>
+              </a:rPr>
+              <a:t>Time complexity: O(N · D · r · t) — linear in data size N, dimensionality D, and ensemble size. Inherits iForest’s scalability.</a:t>
+            </a:r>
+            <a:endParaRPr lang="en-US" sz="1200" dirty="0"/>
+          </a:p>
+        </p:txBody>
+      </p:sp>
+      <p:pic>
+        <p:nvPicPr>
+          <p:cNvPr id="19" name="Picture 18">
+            <a:extLst>
+              <a:ext uri="{FF2B5EF4-FFF2-40B4-BE49-F238E27FC236}">
+                <a16:creationId xmlns:a16="http://schemas.microsoft.com/office/drawing/2014/main" id="{13C5F45B-E0C0-2C01-FFAE-4B6FB60353D4}"/>
+              </a:ext>
+            </a:extLst>
+          </p:cNvPr>
+          <p:cNvPicPr>
+            <a:picLocks noChangeAspect="1"/>
+          </p:cNvPicPr>
+          <p:nvPr/>
+        </p:nvPicPr>
+        <p:blipFill>
+          <a:blip r:embed="rId3"/>
+          <a:stretch>
+            <a:fillRect/>
+          </a:stretch>
+        </p:blipFill>
+        <p:spPr>
+          <a:xfrm>
+            <a:off x="4941714" y="1799711"/>
+            <a:ext cx="3695411" cy="1030593"/>
+          </a:xfrm>
+          <a:prstGeom prst="rect">
+            <a:avLst/>
+          </a:prstGeom>
+        </p:spPr>
+      </p:pic>
+    </p:spTree>
+  </p:cSld>
+  <p:clrMapOvr>
+    <a:masterClrMapping/>
+  </p:clrMapOvr>
+</p:sld>
+</file>
+
+<file path=ppt/slides/slide8.xml><?xml version="1.0" encoding="utf-8"?>
+<p:sld xmlns:a="http://schemas.openxmlformats.org/drawingml/2006/main" xmlns:r="http://schemas.openxmlformats.org/officeDocument/2006/relationships" xmlns:p="http://schemas.openxmlformats.org/presentationml/2006/main">
   <p:cSld name="Slide 7">
     <p:bg>
       <p:bgPr>
@@ -25661,45 +27218,6 @@
       </p:sp>
       <p:sp>
         <p:nvSpPr>
-          <p:cNvPr id="6" name="Text 4"/>
-          <p:cNvSpPr/>
-          <p:nvPr/>
-        </p:nvSpPr>
-        <p:spPr>
-          <a:xfrm>
-            <a:off x="548640" y="1261872"/>
-            <a:ext cx="3931920" cy="502920"/>
-          </a:xfrm>
-          <a:prstGeom prst="rect">
-            <a:avLst/>
-          </a:prstGeom>
-          <a:noFill/>
-          <a:ln/>
-        </p:spPr>
-        <p:txBody>
-          <a:bodyPr wrap="square" rtlCol="0" anchor="ctr"/>
-          <a:lstStyle/>
-          <a:p>
-            <a:pPr marL="0" indent="0" algn="ctr">
-              <a:buNone/>
-            </a:pPr>
-            <a:r>
-              <a:rPr lang="en-US" sz="1600" b="1" dirty="0">
-                <a:solidFill>
-                  <a:srgbClr val="1B2A4A"/>
-                </a:solidFill>
-                <a:latin typeface="Cambria" pitchFamily="34" charset="0"/>
-                <a:ea typeface="Cambria" pitchFamily="34" charset="-122"/>
-                <a:cs typeface="Cambria" pitchFamily="34" charset="-120"/>
-              </a:rPr>
-              <a:t>g(xᵤ|τᵢ) = (1/|p|) Σ |xᵤ⁽ʲᵏ⁾ − ηₖ|</a:t>
-            </a:r>
-            <a:endParaRPr lang="en-US" sz="1600" dirty="0"/>
-          </a:p>
-        </p:txBody>
-      </p:sp>
-      <p:sp>
-        <p:nvSpPr>
           <p:cNvPr id="7" name="Text 5"/>
           <p:cNvSpPr/>
           <p:nvPr/>
@@ -26119,84 +27637,6 @@
       </p:sp>
       <p:sp>
         <p:nvSpPr>
-          <p:cNvPr id="16" name="Text 14"/>
-          <p:cNvSpPr/>
-          <p:nvPr/>
-        </p:nvSpPr>
-        <p:spPr>
-          <a:xfrm>
-            <a:off x="4983480" y="1280160"/>
-            <a:ext cx="3657600" cy="292608"/>
-          </a:xfrm>
-          <a:prstGeom prst="rect">
-            <a:avLst/>
-          </a:prstGeom>
-          <a:noFill/>
-          <a:ln/>
-        </p:spPr>
-        <p:txBody>
-          <a:bodyPr wrap="square" rtlCol="0" anchor="ctr"/>
-          <a:lstStyle/>
-          <a:p>
-            <a:pPr marL="0" indent="0" algn="ctr">
-              <a:buNone/>
-            </a:pPr>
-            <a:r>
-              <a:rPr lang="en-US" sz="1300" dirty="0">
-                <a:solidFill>
-                  <a:srgbClr val="99F6E4"/>
-                </a:solidFill>
-                <a:latin typeface="Cambria" pitchFamily="34" charset="0"/>
-                <a:ea typeface="Cambria" pitchFamily="34" charset="-122"/>
-                <a:cs typeface="Cambria" pitchFamily="34" charset="-120"/>
-              </a:rPr>
-              <a:t>Fᴰᴱᴬₛ(o|T) =</a:t>
-            </a:r>
-            <a:endParaRPr lang="en-US" sz="1300" dirty="0"/>
-          </a:p>
-        </p:txBody>
-      </p:sp>
-      <p:sp>
-        <p:nvSpPr>
-          <p:cNvPr id="17" name="Text 15"/>
-          <p:cNvSpPr/>
-          <p:nvPr/>
-        </p:nvSpPr>
-        <p:spPr>
-          <a:xfrm>
-            <a:off x="4983480" y="1581912"/>
-            <a:ext cx="3657600" cy="457200"/>
-          </a:xfrm>
-          <a:prstGeom prst="rect">
-            <a:avLst/>
-          </a:prstGeom>
-          <a:noFill/>
-          <a:ln/>
-        </p:spPr>
-        <p:txBody>
-          <a:bodyPr wrap="square" rtlCol="0" anchor="ctr"/>
-          <a:lstStyle/>
-          <a:p>
-            <a:pPr marL="0" indent="0" algn="ctr">
-              <a:buNone/>
-            </a:pPr>
-            <a:r>
-              <a:rPr lang="en-US" sz="1500" b="1" dirty="0">
-                <a:solidFill>
-                  <a:srgbClr val="FFFFFF"/>
-                </a:solidFill>
-                <a:latin typeface="Cambria" pitchFamily="34" charset="0"/>
-                <a:ea typeface="Cambria" pitchFamily="34" charset="-122"/>
-                <a:cs typeface="Cambria" pitchFamily="34" charset="-120"/>
-              </a:rPr>
-              <a:t>2⁻ᴹ[|p|]/C(T)   ×   ᴸ[g(xᵤ|τᵢ)]</a:t>
-            </a:r>
-            <a:endParaRPr lang="en-US" sz="1500" dirty="0"/>
-          </a:p>
-        </p:txBody>
-      </p:sp>
-      <p:sp>
-        <p:nvSpPr>
           <p:cNvPr id="18" name="Text 16"/>
           <p:cNvSpPr/>
           <p:nvPr/>
@@ -26312,559 +27752,12 @@
           </a:p>
         </p:txBody>
       </p:sp>
-    </p:spTree>
-  </p:cSld>
-  <p:clrMapOvr>
-    <a:masterClrMapping/>
-  </p:clrMapOvr>
-</p:sld>
-</file>
-
-<file path=ppt/slides/slide8.xml><?xml version="1.0" encoding="utf-8"?>
-<p:sld xmlns:a="http://schemas.openxmlformats.org/drawingml/2006/main" xmlns:r="http://schemas.openxmlformats.org/officeDocument/2006/relationships" xmlns:p="http://schemas.openxmlformats.org/presentationml/2006/main">
-  <p:cSld name="Slide 8">
-    <p:bg>
-      <p:bgPr>
-        <a:solidFill>
-          <a:srgbClr val="FFFFFF"/>
-        </a:solidFill>
-        <a:effectLst/>
-      </p:bgPr>
-    </p:bg>
-    <p:spTree>
-      <p:nvGrpSpPr>
-        <p:cNvPr id="1" name=""/>
-        <p:cNvGrpSpPr/>
-        <p:nvPr/>
-      </p:nvGrpSpPr>
-      <p:grpSpPr>
-        <a:xfrm>
-          <a:off x="0" y="0"/>
-          <a:ext cx="0" cy="0"/>
-          <a:chOff x="0" y="0"/>
-          <a:chExt cx="0" cy="0"/>
-        </a:xfrm>
-      </p:grpSpPr>
-      <p:sp>
-        <p:nvSpPr>
-          <p:cNvPr id="2" name="Shape 0"/>
-          <p:cNvSpPr/>
-          <p:nvPr/>
-        </p:nvSpPr>
-        <p:spPr>
-          <a:xfrm>
-            <a:off x="0" y="0"/>
-            <a:ext cx="9144000" cy="64008"/>
-          </a:xfrm>
-          <a:prstGeom prst="rect">
-            <a:avLst/>
-          </a:prstGeom>
-          <a:solidFill>
-            <a:srgbClr val="0D9488"/>
-          </a:solidFill>
-          <a:ln w="12700">
-            <a:solidFill>
-              <a:srgbClr val="0D9488"/>
-            </a:solidFill>
-            <a:prstDash val="solid"/>
-          </a:ln>
-        </p:spPr>
-        <p:txBody>
-          <a:bodyPr/>
-          <a:lstStyle/>
-          <a:p>
-            <a:endParaRPr lang="en-US"/>
-          </a:p>
-        </p:txBody>
-      </p:sp>
-      <p:sp>
-        <p:nvSpPr>
-          <p:cNvPr id="3" name="Text 1"/>
-          <p:cNvSpPr/>
-          <p:nvPr/>
-        </p:nvSpPr>
-        <p:spPr>
-          <a:xfrm>
-            <a:off x="457200" y="182880"/>
-            <a:ext cx="8229600" cy="548640"/>
-          </a:xfrm>
-          <a:prstGeom prst="rect">
-            <a:avLst/>
-          </a:prstGeom>
-          <a:noFill/>
-          <a:ln/>
-        </p:spPr>
-        <p:txBody>
-          <a:bodyPr wrap="square" rtlCol="0" anchor="ctr"/>
-          <a:lstStyle/>
-          <a:p>
-            <a:pPr marL="0" indent="0">
-              <a:buNone/>
-            </a:pPr>
-            <a:r>
-              <a:rPr lang="en-US" sz="2200" b="1" dirty="0">
-                <a:solidFill>
-                  <a:srgbClr val="1B2A4A"/>
-                </a:solidFill>
-                <a:latin typeface="Cambria" pitchFamily="34" charset="0"/>
-                <a:ea typeface="Cambria" pitchFamily="34" charset="-122"/>
-                <a:cs typeface="Cambria" pitchFamily="34" charset="-120"/>
-              </a:rPr>
-              <a:t>CERE — Computation-Efficient Representation Ensemble</a:t>
-            </a:r>
-            <a:endParaRPr lang="en-US" sz="2200" dirty="0"/>
-          </a:p>
-        </p:txBody>
-      </p:sp>
-      <p:sp>
-        <p:nvSpPr>
-          <p:cNvPr id="4" name="Shape 2"/>
-          <p:cNvSpPr/>
-          <p:nvPr/>
-        </p:nvSpPr>
-        <p:spPr>
-          <a:xfrm>
-            <a:off x="457200" y="822960"/>
-            <a:ext cx="8229600" cy="548640"/>
-          </a:xfrm>
-          <a:prstGeom prst="rect">
-            <a:avLst/>
-          </a:prstGeom>
-          <a:solidFill>
-            <a:srgbClr val="FFF7ED"/>
-          </a:solidFill>
-          <a:ln w="12700">
-            <a:solidFill>
-              <a:srgbClr val="FED7AA"/>
-            </a:solidFill>
-            <a:prstDash val="solid"/>
-          </a:ln>
-        </p:spPr>
-        <p:txBody>
-          <a:bodyPr/>
-          <a:lstStyle/>
-          <a:p>
-            <a:endParaRPr lang="en-US"/>
-          </a:p>
-        </p:txBody>
-      </p:sp>
-      <p:sp>
-        <p:nvSpPr>
-          <p:cNvPr id="5" name="Text 3"/>
-          <p:cNvSpPr/>
-          <p:nvPr/>
-        </p:nvSpPr>
-        <p:spPr>
-          <a:xfrm>
-            <a:off x="594360" y="886968"/>
-            <a:ext cx="7955280" cy="420624"/>
-          </a:xfrm>
-          <a:prstGeom prst="rect">
-            <a:avLst/>
-          </a:prstGeom>
-          <a:noFill/>
-          <a:ln/>
-        </p:spPr>
-        <p:txBody>
-          <a:bodyPr wrap="square" rtlCol="0" anchor="ctr"/>
-          <a:lstStyle/>
-          <a:p>
-            <a:pPr marL="0" indent="0">
-              <a:buNone/>
-            </a:pPr>
-            <a:r>
-              <a:rPr lang="en-US" sz="1200" dirty="0">
-                <a:solidFill>
-                  <a:srgbClr val="92400E"/>
-                </a:solidFill>
-                <a:latin typeface="Calibri" pitchFamily="34" charset="0"/>
-                <a:ea typeface="Calibri" pitchFamily="34" charset="-122"/>
-                <a:cs typeface="Calibri" pitchFamily="34" charset="-120"/>
-              </a:rPr>
-              <a:t>NOTE: r separate networks run sequentially → cost scales linearly with r. CERE computes all r representations in a single batched operation.</a:t>
-            </a:r>
-            <a:endParaRPr lang="en-US" sz="1200" dirty="0"/>
-          </a:p>
-        </p:txBody>
-      </p:sp>
-      <p:sp>
-        <p:nvSpPr>
-          <p:cNvPr id="6" name="Text 4"/>
-          <p:cNvSpPr/>
-          <p:nvPr/>
-        </p:nvSpPr>
-        <p:spPr>
-          <a:xfrm>
-            <a:off x="457200" y="1508760"/>
-            <a:ext cx="4114800" cy="310896"/>
-          </a:xfrm>
-          <a:prstGeom prst="rect">
-            <a:avLst/>
-          </a:prstGeom>
-          <a:noFill/>
-          <a:ln/>
-        </p:spPr>
-        <p:txBody>
-          <a:bodyPr wrap="square" rtlCol="0" anchor="ctr"/>
-          <a:lstStyle/>
-          <a:p>
-            <a:pPr marL="0" indent="0">
-              <a:buNone/>
-            </a:pPr>
-            <a:r>
-              <a:rPr lang="en-US" sz="1300" b="1" dirty="0">
-                <a:solidFill>
-                  <a:srgbClr val="0D9488"/>
-                </a:solidFill>
-                <a:latin typeface="Calibri" pitchFamily="34" charset="0"/>
-                <a:ea typeface="Calibri" pitchFamily="34" charset="-122"/>
-                <a:cs typeface="Calibri" pitchFamily="34" charset="-120"/>
-              </a:rPr>
-              <a:t>How CERE Works</a:t>
-            </a:r>
-            <a:endParaRPr lang="en-US" sz="1300" dirty="0"/>
-          </a:p>
-        </p:txBody>
-      </p:sp>
-      <p:sp>
-        <p:nvSpPr>
-          <p:cNvPr id="7" name="Text 5"/>
-          <p:cNvSpPr/>
-          <p:nvPr/>
-        </p:nvSpPr>
-        <p:spPr>
-          <a:xfrm>
-            <a:off x="457200" y="1554480"/>
-            <a:ext cx="4114800" cy="2468880"/>
-          </a:xfrm>
-          <a:prstGeom prst="rect">
-            <a:avLst/>
-          </a:prstGeom>
-          <a:noFill/>
-          <a:ln/>
-        </p:spPr>
-        <p:txBody>
-          <a:bodyPr wrap="square" rtlCol="0" anchor="ctr"/>
-          <a:lstStyle/>
-          <a:p>
-            <a:pPr marL="0" indent="0">
-              <a:buNone/>
-            </a:pPr>
-            <a:r>
-              <a:rPr lang="en-US" sz="1200" dirty="0">
-                <a:solidFill>
-                  <a:srgbClr val="475569"/>
-                </a:solidFill>
-                <a:latin typeface="Calibri" pitchFamily="34" charset="0"/>
-                <a:ea typeface="Calibri" pitchFamily="34" charset="-122"/>
-                <a:cs typeface="Calibri" pitchFamily="34" charset="-120"/>
-              </a:rPr>
-              <a:t>Each ensemble member i shares a base matrix </a:t>
-            </a:r>
-            <a:r>
-              <a:rPr lang="en-US" sz="1200" b="1" dirty="0">
-                <a:solidFill>
-                  <a:srgbClr val="1B2A4A"/>
-                </a:solidFill>
-                <a:latin typeface="Calibri" pitchFamily="34" charset="0"/>
-                <a:ea typeface="Calibri" pitchFamily="34" charset="-122"/>
-                <a:cs typeface="Calibri" pitchFamily="34" charset="-120"/>
-              </a:rPr>
-              <a:t>W₀</a:t>
-            </a:r>
-            <a:r>
-              <a:rPr lang="en-US" sz="1200" dirty="0">
-                <a:solidFill>
-                  <a:srgbClr val="475569"/>
-                </a:solidFill>
-                <a:latin typeface="Calibri" pitchFamily="34" charset="0"/>
-                <a:ea typeface="Calibri" pitchFamily="34" charset="-122"/>
-                <a:cs typeface="Calibri" pitchFamily="34" charset="-120"/>
-              </a:rPr>
-              <a:t>, further diversified by two small random vectors </a:t>
-            </a:r>
-            <a:r>
-              <a:rPr lang="en-US" sz="1200" b="1" dirty="0">
-                <a:solidFill>
-                  <a:srgbClr val="1B2A4A"/>
-                </a:solidFill>
-                <a:latin typeface="Calibri" pitchFamily="34" charset="0"/>
-                <a:ea typeface="Calibri" pitchFamily="34" charset="-122"/>
-                <a:cs typeface="Calibri" pitchFamily="34" charset="-120"/>
-              </a:rPr>
-              <a:t>pᵢ ∈ ℝᵐ</a:t>
-            </a:r>
-            <a:r>
-              <a:rPr lang="en-US" sz="1200" dirty="0">
-                <a:solidFill>
-                  <a:srgbClr val="475569"/>
-                </a:solidFill>
-                <a:latin typeface="Calibri" pitchFamily="34" charset="0"/>
-                <a:ea typeface="Calibri" pitchFamily="34" charset="-122"/>
-                <a:cs typeface="Calibri" pitchFamily="34" charset="-120"/>
-              </a:rPr>
-              <a:t> and </a:t>
-            </a:r>
-            <a:r>
-              <a:rPr lang="en-US" sz="1200" b="1" dirty="0">
-                <a:solidFill>
-                  <a:srgbClr val="1B2A4A"/>
-                </a:solidFill>
-                <a:latin typeface="Calibri" pitchFamily="34" charset="0"/>
-                <a:ea typeface="Calibri" pitchFamily="34" charset="-122"/>
-                <a:cs typeface="Calibri" pitchFamily="34" charset="-120"/>
-              </a:rPr>
-              <a:t>qᵢ ∈ ℝⁿ</a:t>
-            </a:r>
-            <a:r>
-              <a:rPr lang="en-US" sz="1200" dirty="0">
-                <a:solidFill>
-                  <a:srgbClr val="475569"/>
-                </a:solidFill>
-                <a:latin typeface="Calibri" pitchFamily="34" charset="0"/>
-                <a:ea typeface="Calibri" pitchFamily="34" charset="-122"/>
-                <a:cs typeface="Calibri" pitchFamily="34" charset="-120"/>
-              </a:rPr>
-              <a:t>:
-</a:t>
-            </a:r>
-            <a:r>
-              <a:rPr lang="en-US" sz="1500" b="1" dirty="0">
-                <a:solidFill>
-                  <a:srgbClr val="0D9488"/>
-                </a:solidFill>
-                <a:latin typeface="Calibri" pitchFamily="34" charset="0"/>
-                <a:ea typeface="Calibri" pitchFamily="34" charset="-122"/>
-                <a:cs typeface="Calibri" pitchFamily="34" charset="-120"/>
-              </a:rPr>
-              <a:t>     Wᵢ  =  W₀ ∘ (pᵢ qᵢᵀ)</a:t>
-            </a:r>
-            <a:r>
-              <a:rPr lang="en-US" sz="1200" dirty="0">
-                <a:solidFill>
-                  <a:srgbClr val="475569"/>
-                </a:solidFill>
-                <a:latin typeface="Calibri" pitchFamily="34" charset="0"/>
-                <a:ea typeface="Calibri" pitchFamily="34" charset="-122"/>
-                <a:cs typeface="Calibri" pitchFamily="34" charset="-120"/>
-              </a:rPr>
-              <a:t>
-∘ = element-wise Hadamard product
-</a:t>
-            </a:r>
-            <a:r>
-              <a:rPr lang="en-US" sz="1200" b="1" dirty="0">
-                <a:solidFill>
-                  <a:srgbClr val="475569"/>
-                </a:solidFill>
-                <a:latin typeface="Calibri" pitchFamily="34" charset="0"/>
-                <a:ea typeface="Calibri" pitchFamily="34" charset="-122"/>
-                <a:cs typeface="Calibri" pitchFamily="34" charset="-120"/>
-              </a:rPr>
-              <a:t>All r representations are computed as a single parallel batch</a:t>
-            </a:r>
-            <a:r>
-              <a:rPr lang="en-US" sz="1200" dirty="0">
-                <a:solidFill>
-                  <a:srgbClr val="475569"/>
-                </a:solidFill>
-                <a:latin typeface="Calibri" pitchFamily="34" charset="0"/>
-                <a:ea typeface="Calibri" pitchFamily="34" charset="-122"/>
-                <a:cs typeface="Calibri" pitchFamily="34" charset="-120"/>
-              </a:rPr>
-              <a:t> — cost ≈ one forward pass regardless of r.</a:t>
-            </a:r>
-            <a:endParaRPr lang="en-US" sz="1200" dirty="0"/>
-          </a:p>
-        </p:txBody>
-      </p:sp>
-      <p:sp>
-        <p:nvSpPr>
-          <p:cNvPr id="8" name="Shape 6"/>
-          <p:cNvSpPr/>
-          <p:nvPr/>
-        </p:nvSpPr>
-        <p:spPr>
-          <a:xfrm>
-            <a:off x="4846320" y="1508760"/>
-            <a:ext cx="3886200" cy="2093976"/>
-          </a:xfrm>
-          <a:prstGeom prst="rect">
-            <a:avLst/>
-          </a:prstGeom>
-          <a:solidFill>
-            <a:srgbClr val="1B2A4A"/>
-          </a:solidFill>
-          <a:ln w="12700">
-            <a:solidFill>
-              <a:srgbClr val="1B2A4A"/>
-            </a:solidFill>
-            <a:prstDash val="solid"/>
-          </a:ln>
-          <a:effectLst>
-            <a:outerShdw blurRad="101600" dist="38100" dir="8100000" algn="bl" rotWithShape="0">
-              <a:srgbClr val="000000">
-                <a:alpha val="10000"/>
-              </a:srgbClr>
-            </a:outerShdw>
-          </a:effectLst>
-        </p:spPr>
-        <p:txBody>
-          <a:bodyPr/>
-          <a:lstStyle/>
-          <a:p>
-            <a:endParaRPr lang="en-US"/>
-          </a:p>
-        </p:txBody>
-      </p:sp>
-      <p:sp>
-        <p:nvSpPr>
-          <p:cNvPr id="13" name="Shape 11"/>
-          <p:cNvSpPr/>
-          <p:nvPr/>
-        </p:nvSpPr>
-        <p:spPr>
-          <a:xfrm>
-            <a:off x="4937760" y="3116291"/>
-            <a:ext cx="3611880" cy="36576"/>
-          </a:xfrm>
-          <a:prstGeom prst="rect">
-            <a:avLst/>
-          </a:prstGeom>
-          <a:solidFill>
-            <a:srgbClr val="0D9488"/>
-          </a:solidFill>
-          <a:ln w="12700">
-            <a:solidFill>
-              <a:srgbClr val="0D9488"/>
-            </a:solidFill>
-            <a:prstDash val="solid"/>
-          </a:ln>
-        </p:spPr>
-        <p:txBody>
-          <a:bodyPr/>
-          <a:lstStyle/>
-          <a:p>
-            <a:endParaRPr lang="en-US"/>
-          </a:p>
-        </p:txBody>
-      </p:sp>
-      <p:sp>
-        <p:nvSpPr>
-          <p:cNvPr id="14" name="Text 12"/>
-          <p:cNvSpPr/>
-          <p:nvPr/>
-        </p:nvSpPr>
-        <p:spPr>
-          <a:xfrm>
-            <a:off x="4937760" y="3207731"/>
-            <a:ext cx="3611880" cy="201168"/>
-          </a:xfrm>
-          <a:prstGeom prst="rect">
-            <a:avLst/>
-          </a:prstGeom>
-          <a:noFill/>
-          <a:ln/>
-        </p:spPr>
-        <p:txBody>
-          <a:bodyPr wrap="square" rtlCol="0" anchor="ctr"/>
-          <a:lstStyle/>
-          <a:p>
-            <a:pPr marL="0" indent="0" algn="ctr">
-              <a:buNone/>
-            </a:pPr>
-            <a:r>
-              <a:rPr lang="en-US" sz="1150" i="1" dirty="0">
-                <a:solidFill>
-                  <a:srgbClr val="14B8A6"/>
-                </a:solidFill>
-                <a:latin typeface="Calibri" pitchFamily="34" charset="0"/>
-                <a:ea typeface="Calibri" pitchFamily="34" charset="-122"/>
-                <a:cs typeface="Calibri" pitchFamily="34" charset="-120"/>
-              </a:rPr>
-              <a:t>r representations ≈ cost of 1 forward pass</a:t>
-            </a:r>
-            <a:endParaRPr lang="en-US" sz="1150" dirty="0"/>
-          </a:p>
-        </p:txBody>
-      </p:sp>
-      <p:sp>
-        <p:nvSpPr>
-          <p:cNvPr id="15" name="Shape 13"/>
-          <p:cNvSpPr/>
-          <p:nvPr/>
-        </p:nvSpPr>
-        <p:spPr>
-          <a:xfrm>
-            <a:off x="457200" y="4320540"/>
-            <a:ext cx="8229600" cy="438912"/>
-          </a:xfrm>
-          <a:prstGeom prst="rect">
-            <a:avLst/>
-          </a:prstGeom>
-          <a:solidFill>
-            <a:srgbClr val="F8FAFC"/>
-          </a:solidFill>
-          <a:ln w="12700">
-            <a:solidFill>
-              <a:srgbClr val="E2E8F0"/>
-            </a:solidFill>
-            <a:prstDash val="solid"/>
-          </a:ln>
-        </p:spPr>
-        <p:txBody>
-          <a:bodyPr/>
-          <a:lstStyle/>
-          <a:p>
-            <a:endParaRPr lang="en-US"/>
-          </a:p>
-        </p:txBody>
-      </p:sp>
-      <p:sp>
-        <p:nvSpPr>
-          <p:cNvPr id="16" name="Text 14"/>
-          <p:cNvSpPr/>
-          <p:nvPr/>
-        </p:nvSpPr>
-        <p:spPr>
-          <a:xfrm>
-            <a:off x="594360" y="4384548"/>
-            <a:ext cx="7955280" cy="347472"/>
-          </a:xfrm>
-          <a:prstGeom prst="rect">
-            <a:avLst/>
-          </a:prstGeom>
-          <a:noFill/>
-          <a:ln/>
-        </p:spPr>
-        <p:txBody>
-          <a:bodyPr wrap="square" rtlCol="0" anchor="ctr"/>
-          <a:lstStyle/>
-          <a:p>
-            <a:pPr marL="0" indent="0" algn="ctr">
-              <a:buNone/>
-            </a:pPr>
-            <a:r>
-              <a:rPr lang="en-US" sz="1200" b="1" dirty="0">
-                <a:solidFill>
-                  <a:srgbClr val="1E293B"/>
-                </a:solidFill>
-                <a:latin typeface="Calibri" pitchFamily="34" charset="0"/>
-                <a:ea typeface="Calibri" pitchFamily="34" charset="-122"/>
-                <a:cs typeface="Calibri" pitchFamily="34" charset="-120"/>
-              </a:rPr>
-              <a:t>Time complexity: O(N · D · r · t) — linear in data size N, dimensionality D, and ensemble size. Inherits iForest’s scalability.</a:t>
-            </a:r>
-            <a:endParaRPr lang="en-US" sz="1200" dirty="0"/>
-          </a:p>
-        </p:txBody>
-      </p:sp>
       <p:pic>
         <p:nvPicPr>
-          <p:cNvPr id="19" name="Picture 18">
+          <p:cNvPr id="24" name="Picture 23">
             <a:extLst>
               <a:ext uri="{FF2B5EF4-FFF2-40B4-BE49-F238E27FC236}">
-                <a16:creationId xmlns:a16="http://schemas.microsoft.com/office/drawing/2014/main" id="{13C5F45B-E0C0-2C01-FFAE-4B6FB60353D4}"/>
+                <a16:creationId xmlns:a16="http://schemas.microsoft.com/office/drawing/2014/main" id="{BF2E2F32-059B-A963-3D2E-C2B5798C29BA}"/>
               </a:ext>
             </a:extLst>
           </p:cNvPr>
@@ -26881,8 +27774,38 @@
         </p:blipFill>
         <p:spPr>
           <a:xfrm>
-            <a:off x="4941714" y="1799711"/>
-            <a:ext cx="3695411" cy="1030593"/>
+            <a:off x="5064752" y="1425822"/>
+            <a:ext cx="3530608" cy="348755"/>
+          </a:xfrm>
+          <a:prstGeom prst="rect">
+            <a:avLst/>
+          </a:prstGeom>
+        </p:spPr>
+      </p:pic>
+      <p:pic>
+        <p:nvPicPr>
+          <p:cNvPr id="26" name="Picture 25">
+            <a:extLst>
+              <a:ext uri="{FF2B5EF4-FFF2-40B4-BE49-F238E27FC236}">
+                <a16:creationId xmlns:a16="http://schemas.microsoft.com/office/drawing/2014/main" id="{3851B572-D9E8-3A8B-D55B-EA1EFB4F1203}"/>
+              </a:ext>
+            </a:extLst>
+          </p:cNvPr>
+          <p:cNvPicPr>
+            <a:picLocks noChangeAspect="1"/>
+          </p:cNvPicPr>
+          <p:nvPr/>
+        </p:nvPicPr>
+        <p:blipFill>
+          <a:blip r:embed="rId4"/>
+          <a:stretch>
+            <a:fillRect/>
+          </a:stretch>
+        </p:blipFill>
+        <p:spPr>
+          <a:xfrm>
+            <a:off x="1124494" y="1261872"/>
+            <a:ext cx="2963092" cy="549732"/>
           </a:xfrm>
           <a:prstGeom prst="rect">
             <a:avLst/>

--- a/Summary/training_review.pptx
+++ b/Summary/training_review.pptx
@@ -133,6 +133,64 @@
     </p:ext>
   </p:extLst>
 </p:presentation>
+</file>
+
+<file path=ppt/authors.xml><?xml version="1.0" encoding="utf-8"?>
+<p188:authorLst xmlns:a="http://schemas.openxmlformats.org/drawingml/2006/main" xmlns:r="http://schemas.openxmlformats.org/officeDocument/2006/relationships" xmlns:p188="http://schemas.microsoft.com/office/powerpoint/2018/8/main">
+  <p188:author id="{ADDC1805-C575-522E-8777-9E1DA016861C}" name="Aman Jalan" initials="AJ" userId="bf43d9433e811258" providerId="Windows Live"/>
+</p188:authorLst>
+</file>
+
+<file path=ppt/comments/modernComment_101_0.xml><?xml version="1.0" encoding="utf-8"?>
+<p188:cmLst xmlns:a="http://schemas.openxmlformats.org/drawingml/2006/main" xmlns:r="http://schemas.openxmlformats.org/officeDocument/2006/relationships" xmlns:p188="http://schemas.microsoft.com/office/powerpoint/2018/8/main">
+  <p188:cm id="{840DF4CD-DE00-5D46-A2B1-F03536443233}" authorId="{ADDC1805-C575-522E-8777-9E1DA016861C}" created="2026-06-11T09:09:07.951">
+    <ac:txMkLst xmlns:ac="http://schemas.microsoft.com/office/drawing/2013/main/command">
+      <pc:docMk xmlns:pc="http://schemas.microsoft.com/office/powerpoint/2013/main/command"/>
+      <pc:sldMk xmlns:pc="http://schemas.microsoft.com/office/powerpoint/2013/main/command" cId="0" sldId="257"/>
+      <ac:spMk id="8" creationId="{00000000-0000-0000-0000-000000000000}"/>
+      <ac:txMk cp="6" len="3">
+        <ac:context len="10" hash="88407680"/>
+      </ac:txMk>
+    </ac:txMkLst>
+    <p188:pos x="2419773" y="459458"/>
+    <p188:txBody>
+      <a:bodyPr/>
+      <a:lstStyle/>
+      <a:p>
+        <a:r>
+          <a:rPr lang="en-US"/>
+          <a:t>rewrite</a:t>
+        </a:r>
+      </a:p>
+    </p188:txBody>
+  </p188:cm>
+</p188:cmLst>
+</file>
+
+<file path=ppt/comments/modernComment_107_0.xml><?xml version="1.0" encoding="utf-8"?>
+<p188:cmLst xmlns:a="http://schemas.openxmlformats.org/drawingml/2006/main" xmlns:r="http://schemas.openxmlformats.org/officeDocument/2006/relationships" xmlns:p188="http://schemas.microsoft.com/office/powerpoint/2018/8/main">
+  <p188:cm id="{CAF872E0-D961-2549-B366-82541E2EFE33}" authorId="{ADDC1805-C575-522E-8777-9E1DA016861C}" created="2026-06-11T09:38:41.795">
+    <ac:txMkLst xmlns:ac="http://schemas.microsoft.com/office/drawing/2013/main/command">
+      <pc:docMk xmlns:pc="http://schemas.microsoft.com/office/powerpoint/2013/main/command"/>
+      <pc:sldMk xmlns:pc="http://schemas.microsoft.com/office/powerpoint/2013/main/command" cId="0" sldId="263"/>
+      <ac:spMk id="3" creationId="{00000000-0000-0000-0000-000000000000}"/>
+      <ac:txMk cp="7" len="45">
+        <ac:context len="53" hash="164944107"/>
+      </ac:txMk>
+    </ac:txMkLst>
+    <p188:pos x="7402286" y="492034"/>
+    <p188:txBody>
+      <a:bodyPr/>
+      <a:lstStyle/>
+      <a:p>
+        <a:r>
+          <a:rPr lang="en-US"/>
+          <a:t>handwritten exercise</a:t>
+        </a:r>
+      </a:p>
+    </p188:txBody>
+  </p188:cm>
+</p188:cmLst>
 </file>
 
 <file path=ppt/notesMasters/notesMaster1.xml><?xml version="1.0" encoding="utf-8"?>
@@ -14345,7 +14403,7 @@
                 <a:ea typeface="Calibri" pitchFamily="34" charset="-122"/>
                 <a:cs typeface="Calibri" pitchFamily="34" charset="-120"/>
               </a:rPr>
-              <a:t>Identify points that deviate structurally from the majority, not just statistically (Anomalies).</a:t>
+              <a:t>Identify points that deviate structurally from the majority (Anomalies).</a:t>
             </a:r>
             <a:endParaRPr lang="en-US" sz="1250" dirty="0"/>
           </a:p>
@@ -14462,7 +14520,18 @@
                 <a:ea typeface="Cambria" pitchFamily="34" charset="-122"/>
                 <a:cs typeface="Cambria" pitchFamily="34" charset="-120"/>
               </a:rPr>
-              <a:t>f : D → ℝᴿ</a:t>
+              <a:t>f : D → </a:t>
+            </a:r>
+            <a:r>
+              <a:rPr lang="en-US" sz="2200" b="1" dirty="0" err="1">
+                <a:solidFill>
+                  <a:srgbClr val="1B2A4A"/>
+                </a:solidFill>
+                <a:latin typeface="Cambria" pitchFamily="34" charset="0"/>
+                <a:ea typeface="Cambria" pitchFamily="34" charset="-122"/>
+                <a:cs typeface="Cambria" pitchFamily="34" charset="-120"/>
+              </a:rPr>
+              <a:t>ℝ</a:t>
             </a:r>
             <a:endParaRPr lang="en-US" sz="2200" dirty="0"/>
           </a:p>
@@ -14501,7 +14570,7 @@
                 <a:ea typeface="Calibri" pitchFamily="34" charset="-122"/>
                 <a:cs typeface="Calibri" pitchFamily="34" charset="-120"/>
               </a:rPr>
-              <a:t>D = {o₁, …, oₙ}   ·   Higher score = more anomalous</a:t>
+              <a:t>D E {o₁, …, oₙ}   Higher score = more anomalous</a:t>
             </a:r>
             <a:endParaRPr lang="en-US" sz="1100" dirty="0"/>
           </a:p>
@@ -14902,6 +14971,11 @@
   <p:clrMapOvr>
     <a:masterClrMapping/>
   </p:clrMapOvr>
+  <p:extLst>
+    <p:ext uri="{6950BFC3-D8DA-4A85-94F7-54DA5524770B}">
+      <p188:commentRel xmlns:p188="http://schemas.microsoft.com/office/powerpoint/2018/8/main" r:id="rId3"/>
+    </p:ext>
+  </p:extLst>
 </p:sld>
 </file>
 
@@ -27026,7 +27100,7 @@
           <p:nvPr/>
         </p:nvPicPr>
         <p:blipFill>
-          <a:blip r:embed="rId3"/>
+          <a:blip r:embed="rId4"/>
           <a:stretch>
             <a:fillRect/>
           </a:stretch>
@@ -27046,6 +27120,11 @@
   <p:clrMapOvr>
     <a:masterClrMapping/>
   </p:clrMapOvr>
+  <p:extLst>
+    <p:ext uri="{6950BFC3-D8DA-4A85-94F7-54DA5524770B}">
+      <p188:commentRel xmlns:p188="http://schemas.microsoft.com/office/powerpoint/2018/8/main" r:id="rId3"/>
+    </p:ext>
+  </p:extLst>
 </p:sld>
 </file>
 

--- a/Summary/training_review.pptx
+++ b/Summary/training_review.pptx
@@ -5,7 +5,7 @@
     <p:sldMasterId id="2147483648" r:id="rId1"/>
   </p:sldMasterIdLst>
   <p:notesMasterIdLst>
-    <p:notesMasterId r:id="rId29"/>
+    <p:notesMasterId r:id="rId28"/>
   </p:notesMasterIdLst>
   <p:sldIdLst>
     <p:sldId id="256" r:id="rId2"/>
@@ -17,24 +17,23 @@
     <p:sldId id="261" r:id="rId8"/>
     <p:sldId id="263" r:id="rId9"/>
     <p:sldId id="262" r:id="rId10"/>
-    <p:sldId id="264" r:id="rId11"/>
-    <p:sldId id="266" r:id="rId12"/>
-    <p:sldId id="267" r:id="rId13"/>
-    <p:sldId id="268" r:id="rId14"/>
-    <p:sldId id="270" r:id="rId15"/>
-    <p:sldId id="271" r:id="rId16"/>
-    <p:sldId id="272" r:id="rId17"/>
-    <p:sldId id="278" r:id="rId18"/>
-    <p:sldId id="273" r:id="rId19"/>
-    <p:sldId id="282" r:id="rId20"/>
-    <p:sldId id="284" r:id="rId21"/>
-    <p:sldId id="283" r:id="rId22"/>
-    <p:sldId id="275" r:id="rId23"/>
-    <p:sldId id="285" r:id="rId24"/>
-    <p:sldId id="276" r:id="rId25"/>
-    <p:sldId id="287" r:id="rId26"/>
-    <p:sldId id="279" r:id="rId27"/>
-    <p:sldId id="277" r:id="rId28"/>
+    <p:sldId id="266" r:id="rId11"/>
+    <p:sldId id="267" r:id="rId12"/>
+    <p:sldId id="268" r:id="rId13"/>
+    <p:sldId id="270" r:id="rId14"/>
+    <p:sldId id="271" r:id="rId15"/>
+    <p:sldId id="272" r:id="rId16"/>
+    <p:sldId id="278" r:id="rId17"/>
+    <p:sldId id="273" r:id="rId18"/>
+    <p:sldId id="282" r:id="rId19"/>
+    <p:sldId id="284" r:id="rId20"/>
+    <p:sldId id="283" r:id="rId21"/>
+    <p:sldId id="275" r:id="rId22"/>
+    <p:sldId id="285" r:id="rId23"/>
+    <p:sldId id="276" r:id="rId24"/>
+    <p:sldId id="287" r:id="rId25"/>
+    <p:sldId id="279" r:id="rId26"/>
+    <p:sldId id="277" r:id="rId27"/>
   </p:sldIdLst>
   <p:sldSz cx="9144000" cy="5143500" type="screen16x9"/>
   <p:notesSz cx="5143500" cy="9144000"/>
@@ -142,31 +141,6 @@
 <p188:authorLst xmlns:a="http://schemas.openxmlformats.org/drawingml/2006/main" xmlns:r="http://schemas.openxmlformats.org/officeDocument/2006/relationships" xmlns:p188="http://schemas.microsoft.com/office/powerpoint/2018/8/main">
   <p188:author id="{ADDC1805-C575-522E-8777-9E1DA016861C}" name="Aman Jalan" initials="AJ" userId="bf43d9433e811258" providerId="Windows Live"/>
 </p188:authorLst>
-</file>
-
-<file path=ppt/comments/modernComment_101_0.xml><?xml version="1.0" encoding="utf-8"?>
-<p188:cmLst xmlns:a="http://schemas.openxmlformats.org/drawingml/2006/main" xmlns:r="http://schemas.openxmlformats.org/officeDocument/2006/relationships" xmlns:p188="http://schemas.microsoft.com/office/powerpoint/2018/8/main">
-  <p188:cm id="{840DF4CD-DE00-5D46-A2B1-F03536443233}" authorId="{ADDC1805-C575-522E-8777-9E1DA016861C}" status="resolved" created="2026-06-11T09:09:07.951" complete="100000">
-    <ac:txMkLst xmlns:ac="http://schemas.microsoft.com/office/drawing/2013/main/command">
-      <pc:docMk xmlns:pc="http://schemas.microsoft.com/office/powerpoint/2013/main/command"/>
-      <pc:sldMk xmlns:pc="http://schemas.microsoft.com/office/powerpoint/2013/main/command" cId="0" sldId="257"/>
-      <ac:spMk id="8" creationId="{00000000-0000-0000-0000-000000000000}"/>
-      <ac:txMk cp="6" len="3">
-        <ac:context len="10" hash="88407680"/>
-      </ac:txMk>
-    </ac:txMkLst>
-    <p188:txBody>
-      <a:bodyPr/>
-      <a:lstStyle/>
-      <a:p>
-        <a:r>
-          <a:rPr lang="en-US"/>
-          <a:t>rewrite</a:t>
-        </a:r>
-      </a:p>
-    </p188:txBody>
-  </p188:cm>
-</p188:cmLst>
 </file>
 
 <file path=ppt/notesMasters/notesMaster1.xml><?xml version="1.0" encoding="utf-8"?>
@@ -887,90 +861,6 @@
   <p:cSld>
     <p:spTree>
       <p:nvGrpSpPr>
-        <p:cNvPr id="1" name=""/>
-        <p:cNvGrpSpPr/>
-        <p:nvPr/>
-      </p:nvGrpSpPr>
-      <p:grpSpPr>
-        <a:xfrm>
-          <a:off x="0" y="0"/>
-          <a:ext cx="0" cy="0"/>
-          <a:chOff x="0" y="0"/>
-          <a:chExt cx="0" cy="0"/>
-        </a:xfrm>
-      </p:grpSpPr>
-      <p:sp>
-        <p:nvSpPr>
-          <p:cNvPr id="2" name="Slide Image Placeholder 1"/>
-          <p:cNvSpPr>
-            <a:spLocks noGrp="1" noRot="1" noChangeAspect="1"/>
-          </p:cNvSpPr>
-          <p:nvPr>
-            <p:ph type="sldImg"/>
-          </p:nvPr>
-        </p:nvSpPr>
-        <p:spPr/>
-      </p:sp>
-      <p:sp>
-        <p:nvSpPr>
-          <p:cNvPr id="3" name="Notes Placeholder 2"/>
-          <p:cNvSpPr>
-            <a:spLocks noGrp="1"/>
-          </p:cNvSpPr>
-          <p:nvPr>
-            <p:ph type="body" idx="1"/>
-          </p:nvPr>
-        </p:nvSpPr>
-        <p:spPr/>
-        <p:txBody>
-          <a:bodyPr/>
-          <a:lstStyle/>
-          <a:p>
-            <a:endParaRPr lang="en-US" dirty="0"/>
-          </a:p>
-        </p:txBody>
-      </p:sp>
-      <p:sp>
-        <p:nvSpPr>
-          <p:cNvPr id="4" name="Slide Number Placeholder 3"/>
-          <p:cNvSpPr>
-            <a:spLocks noGrp="1"/>
-          </p:cNvSpPr>
-          <p:nvPr>
-            <p:ph type="sldNum" sz="quarter" idx="10"/>
-          </p:nvPr>
-        </p:nvSpPr>
-        <p:spPr/>
-        <p:txBody>
-          <a:bodyPr/>
-          <a:lstStyle/>
-          <a:p>
-            <a:fld id="{F7021451-1387-4CA6-816F-3879F97B5CBC}" type="slidenum">
-              <a:rPr lang="en-US"/>
-              <a:t>16</a:t>
-            </a:fld>
-            <a:endParaRPr lang="en-US"/>
-          </a:p>
-        </p:txBody>
-      </p:sp>
-    </p:spTree>
-    <p:extLst>
-      <p:ext uri="{BB962C8B-B14F-4D97-AF65-F5344CB8AC3E}">
-        <p14:creationId xmlns:p14="http://schemas.microsoft.com/office/powerpoint/2010/main" val="1024086991"/>
-      </p:ext>
-    </p:extLst>
-  </p:cSld>
-  <p:clrMapOvr>
-    <a:masterClrMapping/>
-  </p:clrMapOvr>
-</p:notes>
-</file>
-
-<file path=ppt/notesSlides/notesSlide17.xml><?xml version="1.0" encoding="utf-8"?>
-<p:notes xmlns:a="http://schemas.openxmlformats.org/drawingml/2006/main" xmlns:r="http://schemas.openxmlformats.org/officeDocument/2006/relationships" xmlns:p="http://schemas.openxmlformats.org/presentationml/2006/main">
-  <p:cSld>
-    <p:spTree>
-      <p:nvGrpSpPr>
         <p:cNvPr id="1" name="">
           <a:extLst>
             <a:ext uri="{FF2B5EF4-FFF2-40B4-BE49-F238E27FC236}">
@@ -1055,7 +945,7 @@
           <a:p>
             <a:fld id="{F7021451-1387-4CA6-816F-3879F97B5CBC}" type="slidenum">
               <a:rPr lang="en-US"/>
-              <a:t>17</a:t>
+              <a:t>16</a:t>
             </a:fld>
             <a:endParaRPr lang="en-US"/>
           </a:p>
@@ -1074,7 +964,7 @@
 </p:notes>
 </file>
 
-<file path=ppt/notesSlides/notesSlide18.xml><?xml version="1.0" encoding="utf-8"?>
+<file path=ppt/notesSlides/notesSlide17.xml><?xml version="1.0" encoding="utf-8"?>
 <p:notes xmlns:a="http://schemas.openxmlformats.org/drawingml/2006/main" xmlns:r="http://schemas.openxmlformats.org/officeDocument/2006/relationships" xmlns:p="http://schemas.openxmlformats.org/presentationml/2006/main">
   <p:cSld>
     <p:spTree>
@@ -1139,7 +1029,7 @@
           <a:p>
             <a:fld id="{F7021451-1387-4CA6-816F-3879F97B5CBC}" type="slidenum">
               <a:rPr lang="en-US"/>
-              <a:t>18</a:t>
+              <a:t>17</a:t>
             </a:fld>
             <a:endParaRPr lang="en-US"/>
           </a:p>
@@ -1158,7 +1048,7 @@
 </p:notes>
 </file>
 
-<file path=ppt/notesSlides/notesSlide19.xml><?xml version="1.0" encoding="utf-8"?>
+<file path=ppt/notesSlides/notesSlide18.xml><?xml version="1.0" encoding="utf-8"?>
 <p:notes xmlns:a="http://schemas.openxmlformats.org/drawingml/2006/main" xmlns:r="http://schemas.openxmlformats.org/officeDocument/2006/relationships" xmlns:p="http://schemas.openxmlformats.org/presentationml/2006/main">
   <p:cSld>
     <p:spTree>
@@ -1247,7 +1137,7 @@
           <a:p>
             <a:fld id="{F7021451-1387-4CA6-816F-3879F97B5CBC}" type="slidenum">
               <a:rPr lang="en-US"/>
-              <a:t>19</a:t>
+              <a:t>18</a:t>
             </a:fld>
             <a:endParaRPr lang="en-US"/>
           </a:p>
@@ -1257,6 +1147,114 @@
     <p:extLst>
       <p:ext uri="{BB962C8B-B14F-4D97-AF65-F5344CB8AC3E}">
         <p14:creationId xmlns:p14="http://schemas.microsoft.com/office/powerpoint/2010/main" val="1657076231"/>
+      </p:ext>
+    </p:extLst>
+  </p:cSld>
+  <p:clrMapOvr>
+    <a:masterClrMapping/>
+  </p:clrMapOvr>
+</p:notes>
+</file>
+
+<file path=ppt/notesSlides/notesSlide19.xml><?xml version="1.0" encoding="utf-8"?>
+<p:notes xmlns:a="http://schemas.openxmlformats.org/drawingml/2006/main" xmlns:r="http://schemas.openxmlformats.org/officeDocument/2006/relationships" xmlns:p="http://schemas.openxmlformats.org/presentationml/2006/main">
+  <p:cSld>
+    <p:spTree>
+      <p:nvGrpSpPr>
+        <p:cNvPr id="1" name="">
+          <a:extLst>
+            <a:ext uri="{FF2B5EF4-FFF2-40B4-BE49-F238E27FC236}">
+              <a16:creationId xmlns:a16="http://schemas.microsoft.com/office/drawing/2014/main" id="{0F5799C7-1AF3-0E26-7CC6-65E0DDD686F8}"/>
+            </a:ext>
+          </a:extLst>
+        </p:cNvPr>
+        <p:cNvGrpSpPr/>
+        <p:nvPr/>
+      </p:nvGrpSpPr>
+      <p:grpSpPr>
+        <a:xfrm>
+          <a:off x="0" y="0"/>
+          <a:ext cx="0" cy="0"/>
+          <a:chOff x="0" y="0"/>
+          <a:chExt cx="0" cy="0"/>
+        </a:xfrm>
+      </p:grpSpPr>
+      <p:sp>
+        <p:nvSpPr>
+          <p:cNvPr id="2" name="Slide Image Placeholder 1">
+            <a:extLst>
+              <a:ext uri="{FF2B5EF4-FFF2-40B4-BE49-F238E27FC236}">
+                <a16:creationId xmlns:a16="http://schemas.microsoft.com/office/drawing/2014/main" id="{690A5FBA-E47E-3696-32C5-8760FC1A9FB2}"/>
+              </a:ext>
+            </a:extLst>
+          </p:cNvPr>
+          <p:cNvSpPr>
+            <a:spLocks noGrp="1" noRot="1" noChangeAspect="1"/>
+          </p:cNvSpPr>
+          <p:nvPr>
+            <p:ph type="sldImg"/>
+          </p:nvPr>
+        </p:nvSpPr>
+        <p:spPr/>
+      </p:sp>
+      <p:sp>
+        <p:nvSpPr>
+          <p:cNvPr id="3" name="Notes Placeholder 2">
+            <a:extLst>
+              <a:ext uri="{FF2B5EF4-FFF2-40B4-BE49-F238E27FC236}">
+                <a16:creationId xmlns:a16="http://schemas.microsoft.com/office/drawing/2014/main" id="{3B760FB6-035C-73C2-63B6-6D1637A3CAEC}"/>
+              </a:ext>
+            </a:extLst>
+          </p:cNvPr>
+          <p:cNvSpPr>
+            <a:spLocks noGrp="1"/>
+          </p:cNvSpPr>
+          <p:nvPr>
+            <p:ph type="body" idx="1"/>
+          </p:nvPr>
+        </p:nvSpPr>
+        <p:spPr/>
+        <p:txBody>
+          <a:bodyPr/>
+          <a:lstStyle/>
+          <a:p>
+            <a:endParaRPr lang="en-US" dirty="0"/>
+          </a:p>
+        </p:txBody>
+      </p:sp>
+      <p:sp>
+        <p:nvSpPr>
+          <p:cNvPr id="4" name="Slide Number Placeholder 3">
+            <a:extLst>
+              <a:ext uri="{FF2B5EF4-FFF2-40B4-BE49-F238E27FC236}">
+                <a16:creationId xmlns:a16="http://schemas.microsoft.com/office/drawing/2014/main" id="{6593E460-6FB9-C31F-C3E3-254BF3CC0662}"/>
+              </a:ext>
+            </a:extLst>
+          </p:cNvPr>
+          <p:cNvSpPr>
+            <a:spLocks noGrp="1"/>
+          </p:cNvSpPr>
+          <p:nvPr>
+            <p:ph type="sldNum" sz="quarter" idx="10"/>
+          </p:nvPr>
+        </p:nvSpPr>
+        <p:spPr/>
+        <p:txBody>
+          <a:bodyPr/>
+          <a:lstStyle/>
+          <a:p>
+            <a:fld id="{F7021451-1387-4CA6-816F-3879F97B5CBC}" type="slidenum">
+              <a:rPr lang="en-US"/>
+              <a:t>19</a:t>
+            </a:fld>
+            <a:endParaRPr lang="en-US"/>
+          </a:p>
+        </p:txBody>
+      </p:sp>
+    </p:spTree>
+    <p:extLst>
+      <p:ext uri="{BB962C8B-B14F-4D97-AF65-F5344CB8AC3E}">
+        <p14:creationId xmlns:p14="http://schemas.microsoft.com/office/powerpoint/2010/main" val="843778226"/>
       </p:ext>
     </p:extLst>
   </p:cSld>
@@ -1358,114 +1356,6 @@
         <p:cNvPr id="1" name="">
           <a:extLst>
             <a:ext uri="{FF2B5EF4-FFF2-40B4-BE49-F238E27FC236}">
-              <a16:creationId xmlns:a16="http://schemas.microsoft.com/office/drawing/2014/main" id="{0F5799C7-1AF3-0E26-7CC6-65E0DDD686F8}"/>
-            </a:ext>
-          </a:extLst>
-        </p:cNvPr>
-        <p:cNvGrpSpPr/>
-        <p:nvPr/>
-      </p:nvGrpSpPr>
-      <p:grpSpPr>
-        <a:xfrm>
-          <a:off x="0" y="0"/>
-          <a:ext cx="0" cy="0"/>
-          <a:chOff x="0" y="0"/>
-          <a:chExt cx="0" cy="0"/>
-        </a:xfrm>
-      </p:grpSpPr>
-      <p:sp>
-        <p:nvSpPr>
-          <p:cNvPr id="2" name="Slide Image Placeholder 1">
-            <a:extLst>
-              <a:ext uri="{FF2B5EF4-FFF2-40B4-BE49-F238E27FC236}">
-                <a16:creationId xmlns:a16="http://schemas.microsoft.com/office/drawing/2014/main" id="{690A5FBA-E47E-3696-32C5-8760FC1A9FB2}"/>
-              </a:ext>
-            </a:extLst>
-          </p:cNvPr>
-          <p:cNvSpPr>
-            <a:spLocks noGrp="1" noRot="1" noChangeAspect="1"/>
-          </p:cNvSpPr>
-          <p:nvPr>
-            <p:ph type="sldImg"/>
-          </p:nvPr>
-        </p:nvSpPr>
-        <p:spPr/>
-      </p:sp>
-      <p:sp>
-        <p:nvSpPr>
-          <p:cNvPr id="3" name="Notes Placeholder 2">
-            <a:extLst>
-              <a:ext uri="{FF2B5EF4-FFF2-40B4-BE49-F238E27FC236}">
-                <a16:creationId xmlns:a16="http://schemas.microsoft.com/office/drawing/2014/main" id="{3B760FB6-035C-73C2-63B6-6D1637A3CAEC}"/>
-              </a:ext>
-            </a:extLst>
-          </p:cNvPr>
-          <p:cNvSpPr>
-            <a:spLocks noGrp="1"/>
-          </p:cNvSpPr>
-          <p:nvPr>
-            <p:ph type="body" idx="1"/>
-          </p:nvPr>
-        </p:nvSpPr>
-        <p:spPr/>
-        <p:txBody>
-          <a:bodyPr/>
-          <a:lstStyle/>
-          <a:p>
-            <a:endParaRPr lang="en-US" dirty="0"/>
-          </a:p>
-        </p:txBody>
-      </p:sp>
-      <p:sp>
-        <p:nvSpPr>
-          <p:cNvPr id="4" name="Slide Number Placeholder 3">
-            <a:extLst>
-              <a:ext uri="{FF2B5EF4-FFF2-40B4-BE49-F238E27FC236}">
-                <a16:creationId xmlns:a16="http://schemas.microsoft.com/office/drawing/2014/main" id="{6593E460-6FB9-C31F-C3E3-254BF3CC0662}"/>
-              </a:ext>
-            </a:extLst>
-          </p:cNvPr>
-          <p:cNvSpPr>
-            <a:spLocks noGrp="1"/>
-          </p:cNvSpPr>
-          <p:nvPr>
-            <p:ph type="sldNum" sz="quarter" idx="10"/>
-          </p:nvPr>
-        </p:nvSpPr>
-        <p:spPr/>
-        <p:txBody>
-          <a:bodyPr/>
-          <a:lstStyle/>
-          <a:p>
-            <a:fld id="{F7021451-1387-4CA6-816F-3879F97B5CBC}" type="slidenum">
-              <a:rPr lang="en-US"/>
-              <a:t>20</a:t>
-            </a:fld>
-            <a:endParaRPr lang="en-US"/>
-          </a:p>
-        </p:txBody>
-      </p:sp>
-    </p:spTree>
-    <p:extLst>
-      <p:ext uri="{BB962C8B-B14F-4D97-AF65-F5344CB8AC3E}">
-        <p14:creationId xmlns:p14="http://schemas.microsoft.com/office/powerpoint/2010/main" val="843778226"/>
-      </p:ext>
-    </p:extLst>
-  </p:cSld>
-  <p:clrMapOvr>
-    <a:masterClrMapping/>
-  </p:clrMapOvr>
-</p:notes>
-</file>
-
-<file path=ppt/notesSlides/notesSlide21.xml><?xml version="1.0" encoding="utf-8"?>
-<p:notes xmlns:a="http://schemas.openxmlformats.org/drawingml/2006/main" xmlns:r="http://schemas.openxmlformats.org/officeDocument/2006/relationships" xmlns:p="http://schemas.openxmlformats.org/presentationml/2006/main">
-  <p:cSld>
-    <p:spTree>
-      <p:nvGrpSpPr>
-        <p:cNvPr id="1" name="">
-          <a:extLst>
-            <a:ext uri="{FF2B5EF4-FFF2-40B4-BE49-F238E27FC236}">
               <a16:creationId xmlns:a16="http://schemas.microsoft.com/office/drawing/2014/main" id="{048AA290-0E0D-4C9D-1E7A-CBDECCD3C817}"/>
             </a:ext>
           </a:extLst>
@@ -1547,7 +1437,7 @@
           <a:p>
             <a:fld id="{F7021451-1387-4CA6-816F-3879F97B5CBC}" type="slidenum">
               <a:rPr lang="en-US"/>
-              <a:t>21</a:t>
+              <a:t>20</a:t>
             </a:fld>
             <a:endParaRPr lang="en-US"/>
           </a:p>
@@ -1566,7 +1456,7 @@
 </p:notes>
 </file>
 
-<file path=ppt/notesSlides/notesSlide22.xml><?xml version="1.0" encoding="utf-8"?>
+<file path=ppt/notesSlides/notesSlide21.xml><?xml version="1.0" encoding="utf-8"?>
 <p:notes xmlns:a="http://schemas.openxmlformats.org/drawingml/2006/main" xmlns:r="http://schemas.openxmlformats.org/officeDocument/2006/relationships" xmlns:p="http://schemas.openxmlformats.org/presentationml/2006/main">
   <p:cSld>
     <p:spTree>
@@ -1631,7 +1521,7 @@
           <a:p>
             <a:fld id="{F7021451-1387-4CA6-816F-3879F97B5CBC}" type="slidenum">
               <a:rPr lang="en-US"/>
-              <a:t>22</a:t>
+              <a:t>21</a:t>
             </a:fld>
             <a:endParaRPr lang="en-US"/>
           </a:p>
@@ -1650,7 +1540,7 @@
 </p:notes>
 </file>
 
-<file path=ppt/notesSlides/notesSlide23.xml><?xml version="1.0" encoding="utf-8"?>
+<file path=ppt/notesSlides/notesSlide22.xml><?xml version="1.0" encoding="utf-8"?>
 <p:notes xmlns:a="http://schemas.openxmlformats.org/drawingml/2006/main" xmlns:r="http://schemas.openxmlformats.org/officeDocument/2006/relationships" xmlns:p="http://schemas.openxmlformats.org/presentationml/2006/main">
   <p:cSld>
     <p:spTree>
@@ -1739,7 +1629,7 @@
           <a:p>
             <a:fld id="{F7021451-1387-4CA6-816F-3879F97B5CBC}" type="slidenum">
               <a:rPr lang="en-US"/>
-              <a:t>23</a:t>
+              <a:t>22</a:t>
             </a:fld>
             <a:endParaRPr lang="en-US"/>
           </a:p>
@@ -1758,7 +1648,7 @@
 </p:notes>
 </file>
 
-<file path=ppt/notesSlides/notesSlide24.xml><?xml version="1.0" encoding="utf-8"?>
+<file path=ppt/notesSlides/notesSlide23.xml><?xml version="1.0" encoding="utf-8"?>
 <p:notes xmlns:a="http://schemas.openxmlformats.org/drawingml/2006/main" xmlns:r="http://schemas.openxmlformats.org/officeDocument/2006/relationships" xmlns:p="http://schemas.openxmlformats.org/presentationml/2006/main">
   <p:cSld>
     <p:spTree>
@@ -1823,7 +1713,7 @@
           <a:p>
             <a:fld id="{F7021451-1387-4CA6-816F-3879F97B5CBC}" type="slidenum">
               <a:rPr lang="en-US"/>
-              <a:t>24</a:t>
+              <a:t>23</a:t>
             </a:fld>
             <a:endParaRPr lang="en-US"/>
           </a:p>
@@ -1842,7 +1732,7 @@
 </p:notes>
 </file>
 
-<file path=ppt/notesSlides/notesSlide25.xml><?xml version="1.0" encoding="utf-8"?>
+<file path=ppt/notesSlides/notesSlide24.xml><?xml version="1.0" encoding="utf-8"?>
 <p:notes xmlns:a="http://schemas.openxmlformats.org/drawingml/2006/main" xmlns:r="http://schemas.openxmlformats.org/officeDocument/2006/relationships" xmlns:p="http://schemas.openxmlformats.org/presentationml/2006/main">
   <p:cSld>
     <p:spTree>
@@ -1931,7 +1821,7 @@
           <a:p>
             <a:fld id="{F7021451-1387-4CA6-816F-3879F97B5CBC}" type="slidenum">
               <a:rPr lang="en-US"/>
-              <a:t>25</a:t>
+              <a:t>24</a:t>
             </a:fld>
             <a:endParaRPr lang="en-US"/>
           </a:p>
@@ -1950,7 +1840,7 @@
 </p:notes>
 </file>
 
-<file path=ppt/notesSlides/notesSlide26.xml><?xml version="1.0" encoding="utf-8"?>
+<file path=ppt/notesSlides/notesSlide25.xml><?xml version="1.0" encoding="utf-8"?>
 <p:notes xmlns:a="http://schemas.openxmlformats.org/drawingml/2006/main" xmlns:r="http://schemas.openxmlformats.org/officeDocument/2006/relationships" xmlns:p="http://schemas.openxmlformats.org/presentationml/2006/main">
   <p:cSld>
     <p:spTree>
@@ -2039,7 +1929,7 @@
           <a:p>
             <a:fld id="{F7021451-1387-4CA6-816F-3879F97B5CBC}" type="slidenum">
               <a:rPr lang="en-US"/>
-              <a:t>26</a:t>
+              <a:t>25</a:t>
             </a:fld>
             <a:endParaRPr lang="en-US"/>
           </a:p>
@@ -2058,7 +1948,7 @@
 </p:notes>
 </file>
 
-<file path=ppt/notesSlides/notesSlide27.xml><?xml version="1.0" encoding="utf-8"?>
+<file path=ppt/notesSlides/notesSlide26.xml><?xml version="1.0" encoding="utf-8"?>
 <p:notes xmlns:a="http://schemas.openxmlformats.org/drawingml/2006/main" xmlns:r="http://schemas.openxmlformats.org/officeDocument/2006/relationships" xmlns:p="http://schemas.openxmlformats.org/presentationml/2006/main">
   <p:cSld>
     <p:spTree>
@@ -2123,7 +2013,7 @@
           <a:p>
             <a:fld id="{F7021451-1387-4CA6-816F-3879F97B5CBC}" type="slidenum">
               <a:rPr lang="en-US"/>
-              <a:t>27</a:t>
+              <a:t>26</a:t>
             </a:fld>
             <a:endParaRPr lang="en-US"/>
           </a:p>
@@ -3289,1011 +3179,6 @@
 
 <file path=ppt/slides/slide10.xml><?xml version="1.0" encoding="utf-8"?>
 <p:sld xmlns:a="http://schemas.openxmlformats.org/drawingml/2006/main" xmlns:r="http://schemas.openxmlformats.org/officeDocument/2006/relationships" xmlns:p="http://schemas.openxmlformats.org/presentationml/2006/main">
-  <p:cSld name="Slide 9">
-    <p:bg>
-      <p:bgPr>
-        <a:solidFill>
-          <a:srgbClr val="FFFFFF"/>
-        </a:solidFill>
-        <a:effectLst/>
-      </p:bgPr>
-    </p:bg>
-    <p:spTree>
-      <p:nvGrpSpPr>
-        <p:cNvPr id="1" name=""/>
-        <p:cNvGrpSpPr/>
-        <p:nvPr/>
-      </p:nvGrpSpPr>
-      <p:grpSpPr>
-        <a:xfrm>
-          <a:off x="0" y="0"/>
-          <a:ext cx="0" cy="0"/>
-          <a:chOff x="0" y="0"/>
-          <a:chExt cx="0" cy="0"/>
-        </a:xfrm>
-      </p:grpSpPr>
-      <p:sp>
-        <p:nvSpPr>
-          <p:cNvPr id="2" name="Shape 0"/>
-          <p:cNvSpPr/>
-          <p:nvPr/>
-        </p:nvSpPr>
-        <p:spPr>
-          <a:xfrm>
-            <a:off x="0" y="0"/>
-            <a:ext cx="9144000" cy="64008"/>
-          </a:xfrm>
-          <a:prstGeom prst="rect">
-            <a:avLst/>
-          </a:prstGeom>
-          <a:solidFill>
-            <a:srgbClr val="0D9488"/>
-          </a:solidFill>
-          <a:ln w="12700">
-            <a:solidFill>
-              <a:srgbClr val="0D9488"/>
-            </a:solidFill>
-            <a:prstDash val="solid"/>
-          </a:ln>
-        </p:spPr>
-        <p:txBody>
-          <a:bodyPr/>
-          <a:lstStyle/>
-          <a:p>
-            <a:endParaRPr lang="en-US"/>
-          </a:p>
-        </p:txBody>
-      </p:sp>
-      <p:sp>
-        <p:nvSpPr>
-          <p:cNvPr id="3" name="Text 1"/>
-          <p:cNvSpPr/>
-          <p:nvPr/>
-        </p:nvSpPr>
-        <p:spPr>
-          <a:xfrm>
-            <a:off x="457200" y="182880"/>
-            <a:ext cx="8229600" cy="548640"/>
-          </a:xfrm>
-          <a:prstGeom prst="rect">
-            <a:avLst/>
-          </a:prstGeom>
-          <a:noFill/>
-          <a:ln/>
-        </p:spPr>
-        <p:txBody>
-          <a:bodyPr wrap="square" rtlCol="0" anchor="ctr"/>
-          <a:lstStyle/>
-          <a:p>
-            <a:pPr marL="0" indent="0">
-              <a:buNone/>
-            </a:pPr>
-            <a:r>
-              <a:rPr lang="en-US" sz="2400" b="1" dirty="0">
-                <a:solidFill>
-                  <a:srgbClr val="1B2A4A"/>
-                </a:solidFill>
-                <a:latin typeface="Cambria" pitchFamily="34" charset="0"/>
-                <a:ea typeface="Cambria" pitchFamily="34" charset="-122"/>
-                <a:cs typeface="Cambria" pitchFamily="34" charset="-120"/>
-              </a:rPr>
-              <a:t>Why Random (Not Trained) Representations?</a:t>
-            </a:r>
-            <a:endParaRPr lang="en-US" sz="2400" dirty="0"/>
-          </a:p>
-        </p:txBody>
-      </p:sp>
-      <p:sp>
-        <p:nvSpPr>
-          <p:cNvPr id="4" name="Text 2"/>
-          <p:cNvSpPr/>
-          <p:nvPr/>
-        </p:nvSpPr>
-        <p:spPr>
-          <a:xfrm>
-            <a:off x="457200" y="749808"/>
-            <a:ext cx="8229600" cy="320040"/>
-          </a:xfrm>
-          <a:prstGeom prst="rect">
-            <a:avLst/>
-          </a:prstGeom>
-          <a:noFill/>
-          <a:ln/>
-        </p:spPr>
-        <p:txBody>
-          <a:bodyPr wrap="square" rtlCol="0" anchor="ctr"/>
-          <a:lstStyle/>
-          <a:p>
-            <a:pPr marL="0" indent="0">
-              <a:buNone/>
-            </a:pPr>
-            <a:r>
-              <a:rPr lang="en-US" sz="1300" i="1" dirty="0">
-                <a:solidFill>
-                  <a:srgbClr val="475569"/>
-                </a:solidFill>
-                <a:latin typeface="Calibri" pitchFamily="34" charset="0"/>
-                <a:ea typeface="Calibri" pitchFamily="34" charset="-122"/>
-                <a:cs typeface="Calibri" pitchFamily="34" charset="-120"/>
-              </a:rPr>
-              <a:t>The most counterintuitive design choice — and the most important.</a:t>
-            </a:r>
-            <a:endParaRPr lang="en-US" sz="1300" dirty="0"/>
-          </a:p>
-        </p:txBody>
-      </p:sp>
-      <p:sp>
-        <p:nvSpPr>
-          <p:cNvPr id="5" name="Shape 3"/>
-          <p:cNvSpPr/>
-          <p:nvPr/>
-        </p:nvSpPr>
-        <p:spPr>
-          <a:xfrm>
-            <a:off x="365760" y="1188720"/>
-            <a:ext cx="4114800" cy="1298448"/>
-          </a:xfrm>
-          <a:prstGeom prst="rect">
-            <a:avLst/>
-          </a:prstGeom>
-          <a:solidFill>
-            <a:srgbClr val="FFF5F5"/>
-          </a:solidFill>
-          <a:ln w="12700">
-            <a:solidFill>
-              <a:srgbClr val="FCA5A5"/>
-            </a:solidFill>
-            <a:prstDash val="solid"/>
-          </a:ln>
-          <a:effectLst>
-            <a:outerShdw blurRad="101600" dist="38100" dir="8100000" algn="bl" rotWithShape="0">
-              <a:srgbClr val="000000">
-                <a:alpha val="10000"/>
-              </a:srgbClr>
-            </a:outerShdw>
-          </a:effectLst>
-        </p:spPr>
-        <p:txBody>
-          <a:bodyPr/>
-          <a:lstStyle/>
-          <a:p>
-            <a:endParaRPr lang="en-US"/>
-          </a:p>
-        </p:txBody>
-      </p:sp>
-      <p:sp>
-        <p:nvSpPr>
-          <p:cNvPr id="6" name="Shape 4"/>
-          <p:cNvSpPr/>
-          <p:nvPr/>
-        </p:nvSpPr>
-        <p:spPr>
-          <a:xfrm>
-            <a:off x="457200" y="1252728"/>
-            <a:ext cx="402336" cy="402336"/>
-          </a:xfrm>
-          <a:prstGeom prst="ellipse">
-            <a:avLst/>
-          </a:prstGeom>
-          <a:solidFill>
-            <a:srgbClr val="C0392B"/>
-          </a:solidFill>
-          <a:ln w="12700">
-            <a:solidFill>
-              <a:srgbClr val="C0392B"/>
-            </a:solidFill>
-            <a:prstDash val="solid"/>
-          </a:ln>
-        </p:spPr>
-        <p:txBody>
-          <a:bodyPr/>
-          <a:lstStyle/>
-          <a:p>
-            <a:endParaRPr lang="en-US"/>
-          </a:p>
-        </p:txBody>
-      </p:sp>
-      <p:sp>
-        <p:nvSpPr>
-          <p:cNvPr id="7" name="Text 5"/>
-          <p:cNvSpPr/>
-          <p:nvPr/>
-        </p:nvSpPr>
-        <p:spPr>
-          <a:xfrm>
-            <a:off x="457200" y="1252728"/>
-            <a:ext cx="402336" cy="393192"/>
-          </a:xfrm>
-          <a:prstGeom prst="rect">
-            <a:avLst/>
-          </a:prstGeom>
-          <a:noFill/>
-          <a:ln/>
-        </p:spPr>
-        <p:txBody>
-          <a:bodyPr wrap="square" rtlCol="0" anchor="ctr"/>
-          <a:lstStyle/>
-          <a:p>
-            <a:pPr marL="0" indent="0" algn="ctr">
-              <a:buNone/>
-            </a:pPr>
-            <a:r>
-              <a:rPr lang="en-US" sz="1400" b="1" dirty="0">
-                <a:solidFill>
-                  <a:srgbClr val="FFFFFF"/>
-                </a:solidFill>
-                <a:latin typeface="Cambria" pitchFamily="34" charset="0"/>
-                <a:ea typeface="Cambria" pitchFamily="34" charset="-122"/>
-                <a:cs typeface="Cambria" pitchFamily="34" charset="-120"/>
-              </a:rPr>
-              <a:t>1</a:t>
-            </a:r>
-            <a:endParaRPr lang="en-US" sz="1400" dirty="0"/>
-          </a:p>
-        </p:txBody>
-      </p:sp>
-      <p:sp>
-        <p:nvSpPr>
-          <p:cNvPr id="8" name="Text 6"/>
-          <p:cNvSpPr/>
-          <p:nvPr/>
-        </p:nvSpPr>
-        <p:spPr>
-          <a:xfrm>
-            <a:off x="960120" y="1280160"/>
-            <a:ext cx="3383280" cy="329184"/>
-          </a:xfrm>
-          <a:prstGeom prst="rect">
-            <a:avLst/>
-          </a:prstGeom>
-          <a:noFill/>
-          <a:ln/>
-        </p:spPr>
-        <p:txBody>
-          <a:bodyPr wrap="square" rtlCol="0" anchor="ctr"/>
-          <a:lstStyle/>
-          <a:p>
-            <a:pPr marL="0" indent="0">
-              <a:buNone/>
-            </a:pPr>
-            <a:r>
-              <a:rPr lang="en-US" sz="1250" b="1" dirty="0">
-                <a:solidFill>
-                  <a:srgbClr val="991B1B"/>
-                </a:solidFill>
-                <a:latin typeface="Calibri" pitchFamily="34" charset="0"/>
-                <a:ea typeface="Calibri" pitchFamily="34" charset="-122"/>
-                <a:cs typeface="Calibri" pitchFamily="34" charset="-120"/>
-              </a:rPr>
-              <a:t>Loss functions are not universal</a:t>
-            </a:r>
-            <a:endParaRPr lang="en-US" sz="1250" dirty="0"/>
-          </a:p>
-        </p:txBody>
-      </p:sp>
-      <p:sp>
-        <p:nvSpPr>
-          <p:cNvPr id="9" name="Text 7"/>
-          <p:cNvSpPr/>
-          <p:nvPr/>
-        </p:nvSpPr>
-        <p:spPr>
-          <a:xfrm>
-            <a:off x="502920" y="1664208"/>
-            <a:ext cx="3840480" cy="749808"/>
-          </a:xfrm>
-          <a:prstGeom prst="rect">
-            <a:avLst/>
-          </a:prstGeom>
-          <a:noFill/>
-          <a:ln/>
-        </p:spPr>
-        <p:txBody>
-          <a:bodyPr wrap="square" rtlCol="0" anchor="ctr"/>
-          <a:lstStyle/>
-          <a:p>
-            <a:pPr marL="0" indent="0">
-              <a:buNone/>
-            </a:pPr>
-            <a:r>
-              <a:rPr lang="en-US" sz="1100" dirty="0">
-                <a:solidFill>
-                  <a:srgbClr val="475569"/>
-                </a:solidFill>
-                <a:latin typeface="Calibri" pitchFamily="34" charset="0"/>
-                <a:ea typeface="Calibri" pitchFamily="34" charset="-122"/>
-                <a:cs typeface="Calibri" pitchFamily="34" charset="-120"/>
-              </a:rPr>
-              <a:t>A loss optimised for one dataset’s anomaly structure is a poor fit for another. There is no single supervised objective that generalises across diverse anomaly types — trained representations are inherently dataset-biased.</a:t>
-            </a:r>
-            <a:endParaRPr lang="en-US" sz="1100" dirty="0"/>
-          </a:p>
-        </p:txBody>
-      </p:sp>
-      <p:sp>
-        <p:nvSpPr>
-          <p:cNvPr id="10" name="Shape 8"/>
-          <p:cNvSpPr/>
-          <p:nvPr/>
-        </p:nvSpPr>
-        <p:spPr>
-          <a:xfrm>
-            <a:off x="365760" y="2606040"/>
-            <a:ext cx="4114800" cy="1298448"/>
-          </a:xfrm>
-          <a:prstGeom prst="rect">
-            <a:avLst/>
-          </a:prstGeom>
-          <a:solidFill>
-            <a:srgbClr val="FFF5F5"/>
-          </a:solidFill>
-          <a:ln w="12700">
-            <a:solidFill>
-              <a:srgbClr val="FCA5A5"/>
-            </a:solidFill>
-            <a:prstDash val="solid"/>
-          </a:ln>
-          <a:effectLst>
-            <a:outerShdw blurRad="101600" dist="38100" dir="8100000" algn="bl" rotWithShape="0">
-              <a:srgbClr val="000000">
-                <a:alpha val="10000"/>
-              </a:srgbClr>
-            </a:outerShdw>
-          </a:effectLst>
-        </p:spPr>
-        <p:txBody>
-          <a:bodyPr/>
-          <a:lstStyle/>
-          <a:p>
-            <a:endParaRPr lang="en-US"/>
-          </a:p>
-        </p:txBody>
-      </p:sp>
-      <p:sp>
-        <p:nvSpPr>
-          <p:cNvPr id="11" name="Shape 9"/>
-          <p:cNvSpPr/>
-          <p:nvPr/>
-        </p:nvSpPr>
-        <p:spPr>
-          <a:xfrm>
-            <a:off x="457200" y="2670048"/>
-            <a:ext cx="402336" cy="402336"/>
-          </a:xfrm>
-          <a:prstGeom prst="ellipse">
-            <a:avLst/>
-          </a:prstGeom>
-          <a:solidFill>
-            <a:srgbClr val="C0392B"/>
-          </a:solidFill>
-          <a:ln w="12700">
-            <a:solidFill>
-              <a:srgbClr val="C0392B"/>
-            </a:solidFill>
-            <a:prstDash val="solid"/>
-          </a:ln>
-        </p:spPr>
-        <p:txBody>
-          <a:bodyPr/>
-          <a:lstStyle/>
-          <a:p>
-            <a:endParaRPr lang="en-US"/>
-          </a:p>
-        </p:txBody>
-      </p:sp>
-      <p:sp>
-        <p:nvSpPr>
-          <p:cNvPr id="12" name="Text 10"/>
-          <p:cNvSpPr/>
-          <p:nvPr/>
-        </p:nvSpPr>
-        <p:spPr>
-          <a:xfrm>
-            <a:off x="457200" y="2670048"/>
-            <a:ext cx="402336" cy="393192"/>
-          </a:xfrm>
-          <a:prstGeom prst="rect">
-            <a:avLst/>
-          </a:prstGeom>
-          <a:noFill/>
-          <a:ln/>
-        </p:spPr>
-        <p:txBody>
-          <a:bodyPr wrap="square" rtlCol="0" anchor="ctr"/>
-          <a:lstStyle/>
-          <a:p>
-            <a:pPr marL="0" indent="0" algn="ctr">
-              <a:buNone/>
-            </a:pPr>
-            <a:r>
-              <a:rPr lang="en-US" sz="1400" b="1" dirty="0">
-                <a:solidFill>
-                  <a:srgbClr val="FFFFFF"/>
-                </a:solidFill>
-                <a:latin typeface="Cambria" pitchFamily="34" charset="0"/>
-                <a:ea typeface="Cambria" pitchFamily="34" charset="-122"/>
-                <a:cs typeface="Cambria" pitchFamily="34" charset="-120"/>
-              </a:rPr>
-              <a:t>2</a:t>
-            </a:r>
-            <a:endParaRPr lang="en-US" sz="1400" dirty="0"/>
-          </a:p>
-        </p:txBody>
-      </p:sp>
-      <p:sp>
-        <p:nvSpPr>
-          <p:cNvPr id="13" name="Text 11"/>
-          <p:cNvSpPr/>
-          <p:nvPr/>
-        </p:nvSpPr>
-        <p:spPr>
-          <a:xfrm>
-            <a:off x="960120" y="2697480"/>
-            <a:ext cx="3383280" cy="329184"/>
-          </a:xfrm>
-          <a:prstGeom prst="rect">
-            <a:avLst/>
-          </a:prstGeom>
-          <a:noFill/>
-          <a:ln/>
-        </p:spPr>
-        <p:txBody>
-          <a:bodyPr wrap="square" rtlCol="0" anchor="ctr"/>
-          <a:lstStyle/>
-          <a:p>
-            <a:pPr marL="0" indent="0">
-              <a:buNone/>
-            </a:pPr>
-            <a:r>
-              <a:rPr lang="en-US" sz="1250" b="1" dirty="0">
-                <a:solidFill>
-                  <a:srgbClr val="991B1B"/>
-                </a:solidFill>
-                <a:latin typeface="Calibri" pitchFamily="34" charset="0"/>
-                <a:ea typeface="Calibri" pitchFamily="34" charset="-122"/>
-                <a:cs typeface="Calibri" pitchFamily="34" charset="-120"/>
-              </a:rPr>
-              <a:t>Optimisation kills diversity</a:t>
-            </a:r>
-            <a:endParaRPr lang="en-US" sz="1250" dirty="0"/>
-          </a:p>
-        </p:txBody>
-      </p:sp>
-      <p:sp>
-        <p:nvSpPr>
-          <p:cNvPr id="14" name="Text 12"/>
-          <p:cNvSpPr/>
-          <p:nvPr/>
-        </p:nvSpPr>
-        <p:spPr>
-          <a:xfrm>
-            <a:off x="502920" y="3081528"/>
-            <a:ext cx="3840480" cy="749808"/>
-          </a:xfrm>
-          <a:prstGeom prst="rect">
-            <a:avLst/>
-          </a:prstGeom>
-          <a:noFill/>
-          <a:ln/>
-        </p:spPr>
-        <p:txBody>
-          <a:bodyPr wrap="square" rtlCol="0" anchor="ctr"/>
-          <a:lstStyle/>
-          <a:p>
-            <a:pPr marL="0" indent="0">
-              <a:buNone/>
-            </a:pPr>
-            <a:r>
-              <a:rPr lang="en-US" sz="1100" dirty="0">
-                <a:solidFill>
-                  <a:srgbClr val="475569"/>
-                </a:solidFill>
-                <a:latin typeface="Calibri" pitchFamily="34" charset="0"/>
-                <a:ea typeface="Calibri" pitchFamily="34" charset="-122"/>
-                <a:cs typeface="Calibri" pitchFamily="34" charset="-120"/>
-              </a:rPr>
-              <a:t>Isolation scoring works because the ensemble covers many different views. Optimising all representations toward the same objective causes convergence — the ensemble collapses into a single view, destroying the benefit of ensembling entirely.</a:t>
-            </a:r>
-            <a:endParaRPr lang="en-US" sz="1100" dirty="0"/>
-          </a:p>
-        </p:txBody>
-      </p:sp>
-      <p:sp>
-        <p:nvSpPr>
-          <p:cNvPr id="15" name="Text 13"/>
-          <p:cNvSpPr/>
-          <p:nvPr/>
-        </p:nvSpPr>
-        <p:spPr>
-          <a:xfrm>
-            <a:off x="4754880" y="1188720"/>
-            <a:ext cx="4023360" cy="320040"/>
-          </a:xfrm>
-          <a:prstGeom prst="rect">
-            <a:avLst/>
-          </a:prstGeom>
-          <a:noFill/>
-          <a:ln/>
-        </p:spPr>
-        <p:txBody>
-          <a:bodyPr wrap="square" rtlCol="0" anchor="ctr"/>
-          <a:lstStyle/>
-          <a:p>
-            <a:pPr marL="0" indent="0">
-              <a:buNone/>
-            </a:pPr>
-            <a:r>
-              <a:rPr lang="en-US" sz="1300" b="1" dirty="0">
-                <a:solidFill>
-                  <a:srgbClr val="0D9488"/>
-                </a:solidFill>
-                <a:latin typeface="Calibri" pitchFamily="34" charset="0"/>
-                <a:ea typeface="Calibri" pitchFamily="34" charset="-122"/>
-                <a:cs typeface="Calibri" pitchFamily="34" charset="-120"/>
-              </a:rPr>
-              <a:t>Why random works instead</a:t>
-            </a:r>
-            <a:endParaRPr lang="en-US" sz="1300" dirty="0"/>
-          </a:p>
-        </p:txBody>
-      </p:sp>
-      <p:sp>
-        <p:nvSpPr>
-          <p:cNvPr id="16" name="Shape 14"/>
-          <p:cNvSpPr/>
-          <p:nvPr/>
-        </p:nvSpPr>
-        <p:spPr>
-          <a:xfrm>
-            <a:off x="4754880" y="1554480"/>
-            <a:ext cx="4023360" cy="914400"/>
-          </a:xfrm>
-          <a:prstGeom prst="rect">
-            <a:avLst/>
-          </a:prstGeom>
-          <a:solidFill>
-            <a:srgbClr val="F0FDF4"/>
-          </a:solidFill>
-          <a:ln w="12700">
-            <a:solidFill>
-              <a:srgbClr val="BBF7D0"/>
-            </a:solidFill>
-            <a:prstDash val="solid"/>
-          </a:ln>
-          <a:effectLst>
-            <a:outerShdw blurRad="101600" dist="38100" dir="8100000" algn="bl" rotWithShape="0">
-              <a:srgbClr val="000000">
-                <a:alpha val="10000"/>
-              </a:srgbClr>
-            </a:outerShdw>
-          </a:effectLst>
-        </p:spPr>
-        <p:txBody>
-          <a:bodyPr/>
-          <a:lstStyle/>
-          <a:p>
-            <a:endParaRPr lang="en-US"/>
-          </a:p>
-        </p:txBody>
-      </p:sp>
-      <p:sp>
-        <p:nvSpPr>
-          <p:cNvPr id="17" name="Shape 15"/>
-          <p:cNvSpPr/>
-          <p:nvPr/>
-        </p:nvSpPr>
-        <p:spPr>
-          <a:xfrm>
-            <a:off x="4754880" y="1554480"/>
-            <a:ext cx="64008" cy="914400"/>
-          </a:xfrm>
-          <a:prstGeom prst="rect">
-            <a:avLst/>
-          </a:prstGeom>
-          <a:solidFill>
-            <a:srgbClr val="0D9488"/>
-          </a:solidFill>
-          <a:ln w="12700">
-            <a:solidFill>
-              <a:srgbClr val="0D9488"/>
-            </a:solidFill>
-            <a:prstDash val="solid"/>
-          </a:ln>
-        </p:spPr>
-        <p:txBody>
-          <a:bodyPr/>
-          <a:lstStyle/>
-          <a:p>
-            <a:endParaRPr lang="en-US"/>
-          </a:p>
-        </p:txBody>
-      </p:sp>
-      <p:sp>
-        <p:nvSpPr>
-          <p:cNvPr id="18" name="Text 16"/>
-          <p:cNvSpPr/>
-          <p:nvPr/>
-        </p:nvSpPr>
-        <p:spPr>
-          <a:xfrm>
-            <a:off x="4919472" y="1627632"/>
-            <a:ext cx="3749040" cy="292608"/>
-          </a:xfrm>
-          <a:prstGeom prst="rect">
-            <a:avLst/>
-          </a:prstGeom>
-          <a:noFill/>
-          <a:ln/>
-        </p:spPr>
-        <p:txBody>
-          <a:bodyPr wrap="square" rtlCol="0" anchor="ctr"/>
-          <a:lstStyle/>
-          <a:p>
-            <a:pPr marL="0" indent="0">
-              <a:buNone/>
-            </a:pPr>
-            <a:r>
-              <a:rPr lang="en-US" sz="1250" b="1" dirty="0">
-                <a:solidFill>
-                  <a:srgbClr val="14532D"/>
-                </a:solidFill>
-                <a:latin typeface="Calibri" pitchFamily="34" charset="0"/>
-                <a:ea typeface="Calibri" pitchFamily="34" charset="-122"/>
-                <a:cs typeface="Calibri" pitchFamily="34" charset="-120"/>
-              </a:rPr>
-              <a:t>Diverse projections</a:t>
-            </a:r>
-            <a:endParaRPr lang="en-US" sz="1250" dirty="0"/>
-          </a:p>
-        </p:txBody>
-      </p:sp>
-      <p:sp>
-        <p:nvSpPr>
-          <p:cNvPr id="19" name="Text 17"/>
-          <p:cNvSpPr/>
-          <p:nvPr/>
-        </p:nvSpPr>
-        <p:spPr>
-          <a:xfrm>
-            <a:off x="4919472" y="1938528"/>
-            <a:ext cx="3749040" cy="457200"/>
-          </a:xfrm>
-          <a:prstGeom prst="rect">
-            <a:avLst/>
-          </a:prstGeom>
-          <a:noFill/>
-          <a:ln/>
-        </p:spPr>
-        <p:txBody>
-          <a:bodyPr wrap="square" rtlCol="0" anchor="ctr"/>
-          <a:lstStyle/>
-          <a:p>
-            <a:pPr marL="0" indent="0">
-              <a:buNone/>
-            </a:pPr>
-            <a:r>
-              <a:rPr lang="en-US" sz="1100" dirty="0">
-                <a:solidFill>
-                  <a:srgbClr val="475569"/>
-                </a:solidFill>
-                <a:latin typeface="Calibri" pitchFamily="34" charset="0"/>
-                <a:ea typeface="Calibri" pitchFamily="34" charset="-122"/>
-                <a:cs typeface="Calibri" pitchFamily="34" charset="-120"/>
-              </a:rPr>
-              <a:t>Different random weights fold the data space differently — no two networks produce the same view.</a:t>
-            </a:r>
-            <a:endParaRPr lang="en-US" sz="1100" dirty="0"/>
-          </a:p>
-        </p:txBody>
-      </p:sp>
-      <p:sp>
-        <p:nvSpPr>
-          <p:cNvPr id="20" name="Shape 18"/>
-          <p:cNvSpPr/>
-          <p:nvPr/>
-        </p:nvSpPr>
-        <p:spPr>
-          <a:xfrm>
-            <a:off x="4754880" y="2578608"/>
-            <a:ext cx="4023360" cy="914400"/>
-          </a:xfrm>
-          <a:prstGeom prst="rect">
-            <a:avLst/>
-          </a:prstGeom>
-          <a:solidFill>
-            <a:srgbClr val="F0FDF4"/>
-          </a:solidFill>
-          <a:ln w="12700">
-            <a:solidFill>
-              <a:srgbClr val="BBF7D0"/>
-            </a:solidFill>
-            <a:prstDash val="solid"/>
-          </a:ln>
-          <a:effectLst>
-            <a:outerShdw blurRad="101600" dist="38100" dir="8100000" algn="bl" rotWithShape="0">
-              <a:srgbClr val="000000">
-                <a:alpha val="10000"/>
-              </a:srgbClr>
-            </a:outerShdw>
-          </a:effectLst>
-        </p:spPr>
-        <p:txBody>
-          <a:bodyPr/>
-          <a:lstStyle/>
-          <a:p>
-            <a:endParaRPr lang="en-US"/>
-          </a:p>
-        </p:txBody>
-      </p:sp>
-      <p:sp>
-        <p:nvSpPr>
-          <p:cNvPr id="21" name="Shape 19"/>
-          <p:cNvSpPr/>
-          <p:nvPr/>
-        </p:nvSpPr>
-        <p:spPr>
-          <a:xfrm>
-            <a:off x="4754880" y="2578608"/>
-            <a:ext cx="64008" cy="914400"/>
-          </a:xfrm>
-          <a:prstGeom prst="rect">
-            <a:avLst/>
-          </a:prstGeom>
-          <a:solidFill>
-            <a:srgbClr val="0D9488"/>
-          </a:solidFill>
-          <a:ln w="12700">
-            <a:solidFill>
-              <a:srgbClr val="0D9488"/>
-            </a:solidFill>
-            <a:prstDash val="solid"/>
-          </a:ln>
-        </p:spPr>
-        <p:txBody>
-          <a:bodyPr/>
-          <a:lstStyle/>
-          <a:p>
-            <a:endParaRPr lang="en-US"/>
-          </a:p>
-        </p:txBody>
-      </p:sp>
-      <p:sp>
-        <p:nvSpPr>
-          <p:cNvPr id="22" name="Text 20"/>
-          <p:cNvSpPr/>
-          <p:nvPr/>
-        </p:nvSpPr>
-        <p:spPr>
-          <a:xfrm>
-            <a:off x="4919472" y="2651760"/>
-            <a:ext cx="3749040" cy="292608"/>
-          </a:xfrm>
-          <a:prstGeom prst="rect">
-            <a:avLst/>
-          </a:prstGeom>
-          <a:noFill/>
-          <a:ln/>
-        </p:spPr>
-        <p:txBody>
-          <a:bodyPr wrap="square" rtlCol="0" anchor="ctr"/>
-          <a:lstStyle/>
-          <a:p>
-            <a:pPr marL="0" indent="0">
-              <a:buNone/>
-            </a:pPr>
-            <a:r>
-              <a:rPr lang="en-US" sz="1250" b="1" dirty="0">
-                <a:solidFill>
-                  <a:srgbClr val="14532D"/>
-                </a:solidFill>
-                <a:latin typeface="Calibri" pitchFamily="34" charset="0"/>
-                <a:ea typeface="Calibri" pitchFamily="34" charset="-122"/>
-                <a:cs typeface="Calibri" pitchFamily="34" charset="-120"/>
-              </a:rPr>
-              <a:t>Non-linear activations</a:t>
-            </a:r>
-            <a:endParaRPr lang="en-US" sz="1250" dirty="0"/>
-          </a:p>
-        </p:txBody>
-      </p:sp>
-      <p:sp>
-        <p:nvSpPr>
-          <p:cNvPr id="23" name="Text 21"/>
-          <p:cNvSpPr/>
-          <p:nvPr/>
-        </p:nvSpPr>
-        <p:spPr>
-          <a:xfrm>
-            <a:off x="4919472" y="2962656"/>
-            <a:ext cx="3749040" cy="457200"/>
-          </a:xfrm>
-          <a:prstGeom prst="rect">
-            <a:avLst/>
-          </a:prstGeom>
-          <a:noFill/>
-          <a:ln/>
-        </p:spPr>
-        <p:txBody>
-          <a:bodyPr wrap="square" rtlCol="0" anchor="ctr"/>
-          <a:lstStyle/>
-          <a:p>
-            <a:pPr marL="0" indent="0">
-              <a:buNone/>
-            </a:pPr>
-            <a:r>
-              <a:rPr lang="en-US" sz="1100" dirty="0">
-                <a:solidFill>
-                  <a:srgbClr val="475569"/>
-                </a:solidFill>
-                <a:latin typeface="Calibri" pitchFamily="34" charset="0"/>
-                <a:ea typeface="Calibri" pitchFamily="34" charset="-122"/>
-                <a:cs typeface="Calibri" pitchFamily="34" charset="-120"/>
-              </a:rPr>
-              <a:t>ReLU, Tanh etc. bend space even without training — creating genuinely non-linear transformation surfaces.</a:t>
-            </a:r>
-            <a:endParaRPr lang="en-US" sz="1100" dirty="0"/>
-          </a:p>
-        </p:txBody>
-      </p:sp>
-      <p:sp>
-        <p:nvSpPr>
-          <p:cNvPr id="24" name="Shape 22"/>
-          <p:cNvSpPr/>
-          <p:nvPr/>
-        </p:nvSpPr>
-        <p:spPr>
-          <a:xfrm>
-            <a:off x="4754880" y="3602736"/>
-            <a:ext cx="4023360" cy="914400"/>
-          </a:xfrm>
-          <a:prstGeom prst="rect">
-            <a:avLst/>
-          </a:prstGeom>
-          <a:solidFill>
-            <a:srgbClr val="F0FDF4"/>
-          </a:solidFill>
-          <a:ln w="12700">
-            <a:solidFill>
-              <a:srgbClr val="BBF7D0"/>
-            </a:solidFill>
-            <a:prstDash val="solid"/>
-          </a:ln>
-          <a:effectLst>
-            <a:outerShdw blurRad="101600" dist="38100" dir="8100000" algn="bl" rotWithShape="0">
-              <a:srgbClr val="000000">
-                <a:alpha val="10000"/>
-              </a:srgbClr>
-            </a:outerShdw>
-          </a:effectLst>
-        </p:spPr>
-        <p:txBody>
-          <a:bodyPr/>
-          <a:lstStyle/>
-          <a:p>
-            <a:endParaRPr lang="en-US"/>
-          </a:p>
-        </p:txBody>
-      </p:sp>
-      <p:sp>
-        <p:nvSpPr>
-          <p:cNvPr id="25" name="Shape 23"/>
-          <p:cNvSpPr/>
-          <p:nvPr/>
-        </p:nvSpPr>
-        <p:spPr>
-          <a:xfrm>
-            <a:off x="4754880" y="3602736"/>
-            <a:ext cx="64008" cy="914400"/>
-          </a:xfrm>
-          <a:prstGeom prst="rect">
-            <a:avLst/>
-          </a:prstGeom>
-          <a:solidFill>
-            <a:srgbClr val="0D9488"/>
-          </a:solidFill>
-          <a:ln w="12700">
-            <a:solidFill>
-              <a:srgbClr val="0D9488"/>
-            </a:solidFill>
-            <a:prstDash val="solid"/>
-          </a:ln>
-        </p:spPr>
-        <p:txBody>
-          <a:bodyPr/>
-          <a:lstStyle/>
-          <a:p>
-            <a:endParaRPr lang="en-US"/>
-          </a:p>
-        </p:txBody>
-      </p:sp>
-      <p:sp>
-        <p:nvSpPr>
-          <p:cNvPr id="26" name="Text 24"/>
-          <p:cNvSpPr/>
-          <p:nvPr/>
-        </p:nvSpPr>
-        <p:spPr>
-          <a:xfrm>
-            <a:off x="4919472" y="3675888"/>
-            <a:ext cx="3749040" cy="292608"/>
-          </a:xfrm>
-          <a:prstGeom prst="rect">
-            <a:avLst/>
-          </a:prstGeom>
-          <a:noFill/>
-          <a:ln/>
-        </p:spPr>
-        <p:txBody>
-          <a:bodyPr wrap="square" rtlCol="0" anchor="ctr"/>
-          <a:lstStyle/>
-          <a:p>
-            <a:pPr marL="0" indent="0">
-              <a:buNone/>
-            </a:pPr>
-            <a:r>
-              <a:rPr lang="en-US" sz="1250" b="1" dirty="0">
-                <a:solidFill>
-                  <a:srgbClr val="14532D"/>
-                </a:solidFill>
-                <a:latin typeface="Calibri" pitchFamily="34" charset="0"/>
-                <a:ea typeface="Calibri" pitchFamily="34" charset="-122"/>
-                <a:cs typeface="Calibri" pitchFamily="34" charset="-120"/>
-              </a:rPr>
-              <a:t>Exposure through ensemble</a:t>
-            </a:r>
-            <a:endParaRPr lang="en-US" sz="1250" dirty="0"/>
-          </a:p>
-        </p:txBody>
-      </p:sp>
-      <p:sp>
-        <p:nvSpPr>
-          <p:cNvPr id="27" name="Text 25"/>
-          <p:cNvSpPr/>
-          <p:nvPr/>
-        </p:nvSpPr>
-        <p:spPr>
-          <a:xfrm>
-            <a:off x="4919472" y="3986784"/>
-            <a:ext cx="3749040" cy="457200"/>
-          </a:xfrm>
-          <a:prstGeom prst="rect">
-            <a:avLst/>
-          </a:prstGeom>
-          <a:noFill/>
-          <a:ln/>
-        </p:spPr>
-        <p:txBody>
-          <a:bodyPr wrap="square" rtlCol="0" anchor="ctr"/>
-          <a:lstStyle/>
-          <a:p>
-            <a:pPr marL="0" indent="0">
-              <a:buNone/>
-            </a:pPr>
-            <a:r>
-              <a:rPr lang="en-US" sz="1100" dirty="0">
-                <a:solidFill>
-                  <a:srgbClr val="475569"/>
-                </a:solidFill>
-                <a:latin typeface="Calibri" pitchFamily="34" charset="0"/>
-                <a:ea typeface="Calibri" pitchFamily="34" charset="-122"/>
-                <a:cs typeface="Calibri" pitchFamily="34" charset="-120"/>
-              </a:rPr>
-              <a:t>Hard anomalies inseparable in original space are isolated in at least some projected spaces; averaging surfaces them.</a:t>
-            </a:r>
-            <a:endParaRPr lang="en-US" sz="1100" dirty="0"/>
-          </a:p>
-        </p:txBody>
-      </p:sp>
-    </p:spTree>
-  </p:cSld>
-  <p:clrMapOvr>
-    <a:masterClrMapping/>
-  </p:clrMapOvr>
-</p:sld>
-</file>
-
-<file path=ppt/slides/slide11.xml><?xml version="1.0" encoding="utf-8"?>
-<p:sld xmlns:a="http://schemas.openxmlformats.org/drawingml/2006/main" xmlns:r="http://schemas.openxmlformats.org/officeDocument/2006/relationships" xmlns:p="http://schemas.openxmlformats.org/presentationml/2006/main">
   <p:cSld name="Slide 11">
     <p:bg>
       <p:bgPr>
@@ -4547,7 +3432,7 @@
 </p:sld>
 </file>
 
-<file path=ppt/slides/slide12.xml><?xml version="1.0" encoding="utf-8"?>
+<file path=ppt/slides/slide11.xml><?xml version="1.0" encoding="utf-8"?>
 <p:sld xmlns:a="http://schemas.openxmlformats.org/drawingml/2006/main" xmlns:r="http://schemas.openxmlformats.org/officeDocument/2006/relationships" xmlns:p="http://schemas.openxmlformats.org/presentationml/2006/main">
   <p:cSld name="Slide 12">
     <p:bg>
@@ -4982,45 +3867,6 @@
       </p:sp>
       <p:sp>
         <p:nvSpPr>
-          <p:cNvPr id="13" name="Text 11"/>
-          <p:cNvSpPr/>
-          <p:nvPr/>
-        </p:nvSpPr>
-        <p:spPr>
-          <a:xfrm>
-            <a:off x="1024128" y="2368020"/>
-            <a:ext cx="3429000" cy="292608"/>
-          </a:xfrm>
-          <a:prstGeom prst="rect">
-            <a:avLst/>
-          </a:prstGeom>
-          <a:noFill/>
-          <a:ln/>
-        </p:spPr>
-        <p:txBody>
-          <a:bodyPr wrap="square" rtlCol="0" anchor="ctr"/>
-          <a:lstStyle/>
-          <a:p>
-            <a:pPr marL="0" indent="0">
-              <a:buNone/>
-            </a:pPr>
-            <a:r>
-              <a:rPr lang="en-US" sz="1100" dirty="0">
-                <a:solidFill>
-                  <a:srgbClr val="475569"/>
-                </a:solidFill>
-                <a:latin typeface="Calibri" pitchFamily="34" charset="0"/>
-                <a:ea typeface="Calibri" pitchFamily="34" charset="-122"/>
-                <a:cs typeface="Calibri" pitchFamily="34" charset="-120"/>
-              </a:rPr>
-              <a:t>O(Nrb) memory consumed before any trees are built</a:t>
-            </a:r>
-            <a:endParaRPr lang="en-US" sz="1100" dirty="0"/>
-          </a:p>
-        </p:txBody>
-      </p:sp>
-      <p:sp>
-        <p:nvSpPr>
           <p:cNvPr id="14" name="Shape 12"/>
           <p:cNvSpPr/>
           <p:nvPr/>
@@ -5882,7 +4728,7 @@
 </p:sld>
 </file>
 
-<file path=ppt/slides/slide13.xml><?xml version="1.0" encoding="utf-8"?>
+<file path=ppt/slides/slide12.xml><?xml version="1.0" encoding="utf-8"?>
 <p:sld xmlns:a="http://schemas.openxmlformats.org/drawingml/2006/main" xmlns:r="http://schemas.openxmlformats.org/officeDocument/2006/relationships" xmlns:p="http://schemas.openxmlformats.org/presentationml/2006/main">
   <p:cSld name="Slide 13">
     <p:bg>
@@ -7049,7 +5895,7 @@
 </p:sld>
 </file>
 
-<file path=ppt/slides/slide14.xml><?xml version="1.0" encoding="utf-8"?>
+<file path=ppt/slides/slide13.xml><?xml version="1.0" encoding="utf-8"?>
 <p:sld xmlns:a="http://schemas.openxmlformats.org/drawingml/2006/main" xmlns:r="http://schemas.openxmlformats.org/officeDocument/2006/relationships" xmlns:p="http://schemas.openxmlformats.org/presentationml/2006/main">
   <p:cSld name="Slide 15">
     <p:bg>
@@ -7382,7 +6228,7 @@
 </p:sld>
 </file>
 
-<file path=ppt/slides/slide15.xml><?xml version="1.0" encoding="utf-8"?>
+<file path=ppt/slides/slide14.xml><?xml version="1.0" encoding="utf-8"?>
 <p:sld xmlns:a="http://schemas.openxmlformats.org/drawingml/2006/main" xmlns:r="http://schemas.openxmlformats.org/officeDocument/2006/relationships" xmlns:p="http://schemas.openxmlformats.org/presentationml/2006/main">
   <p:cSld name="Slide 16">
     <p:bg>
@@ -8690,7 +7536,7 @@
 </p:sld>
 </file>
 
-<file path=ppt/slides/slide16.xml><?xml version="1.0" encoding="utf-8"?>
+<file path=ppt/slides/slide15.xml><?xml version="1.0" encoding="utf-8"?>
 <p:sld xmlns:a="http://schemas.openxmlformats.org/drawingml/2006/main" xmlns:r="http://schemas.openxmlformats.org/officeDocument/2006/relationships" xmlns:p="http://schemas.openxmlformats.org/presentationml/2006/main">
   <p:cSld name="Slide 17">
     <p:bg>
@@ -9204,7 +8050,7 @@
                 <a:ea typeface="Calibri" pitchFamily="34" charset="-122"/>
                 <a:cs typeface="Calibri" pitchFamily="34" charset="-120"/>
               </a:rPr>
-              <a:t>Pearson Correlation  |r| &gt; 0.85</a:t>
+              <a:t>Correlation  |r| &gt; 0.85</a:t>
             </a:r>
             <a:endParaRPr lang="en-US" sz="1300" dirty="0"/>
           </a:p>
@@ -9522,7 +8368,7 @@
 </p:sld>
 </file>
 
-<file path=ppt/slides/slide17.xml><?xml version="1.0" encoding="utf-8"?>
+<file path=ppt/slides/slide16.xml><?xml version="1.0" encoding="utf-8"?>
 <p:sld xmlns:a="http://schemas.openxmlformats.org/drawingml/2006/main" xmlns:r="http://schemas.openxmlformats.org/officeDocument/2006/relationships" xmlns:p="http://schemas.openxmlformats.org/presentationml/2006/main">
   <p:cSld>
     <p:bg>
@@ -9820,7 +8666,7 @@
 </p:sld>
 </file>
 
-<file path=ppt/slides/slide18.xml><?xml version="1.0" encoding="utf-8"?>
+<file path=ppt/slides/slide17.xml><?xml version="1.0" encoding="utf-8"?>
 <p:sld xmlns:a="http://schemas.openxmlformats.org/drawingml/2006/main" xmlns:r="http://schemas.openxmlformats.org/officeDocument/2006/relationships" xmlns:p="http://schemas.openxmlformats.org/presentationml/2006/main">
   <p:cSld name="Slide 18">
     <p:bg>
@@ -11356,7 +10202,7 @@
 </p:sld>
 </file>
 
-<file path=ppt/slides/slide19.xml><?xml version="1.0" encoding="utf-8"?>
+<file path=ppt/slides/slide18.xml><?xml version="1.0" encoding="utf-8"?>
 <p:sld xmlns:a="http://schemas.openxmlformats.org/drawingml/2006/main" xmlns:r="http://schemas.openxmlformats.org/officeDocument/2006/relationships" xmlns:p="http://schemas.openxmlformats.org/presentationml/2006/main">
   <p:cSld>
     <p:bg>
@@ -12929,6 +11775,164 @@
     <p:extLst>
       <p:ext uri="{BB962C8B-B14F-4D97-AF65-F5344CB8AC3E}">
         <p14:creationId xmlns:p14="http://schemas.microsoft.com/office/powerpoint/2010/main" val="3544424980"/>
+      </p:ext>
+    </p:extLst>
+  </p:cSld>
+  <p:clrMapOvr>
+    <a:masterClrMapping/>
+  </p:clrMapOvr>
+</p:sld>
+</file>
+
+<file path=ppt/slides/slide19.xml><?xml version="1.0" encoding="utf-8"?>
+<p:sld xmlns:a="http://schemas.openxmlformats.org/drawingml/2006/main" xmlns:r="http://schemas.openxmlformats.org/officeDocument/2006/relationships" xmlns:p="http://schemas.openxmlformats.org/presentationml/2006/main">
+  <p:cSld>
+    <p:bg>
+      <p:bgPr>
+        <a:solidFill>
+          <a:srgbClr val="FFFFFF"/>
+        </a:solidFill>
+        <a:effectLst/>
+      </p:bgPr>
+    </p:bg>
+    <p:spTree>
+      <p:nvGrpSpPr>
+        <p:cNvPr id="1" name="">
+          <a:extLst>
+            <a:ext uri="{FF2B5EF4-FFF2-40B4-BE49-F238E27FC236}">
+              <a16:creationId xmlns:a16="http://schemas.microsoft.com/office/drawing/2014/main" id="{EC312ECC-9223-1979-73DD-A7A7F8AF3DBA}"/>
+            </a:ext>
+          </a:extLst>
+        </p:cNvPr>
+        <p:cNvGrpSpPr/>
+        <p:nvPr/>
+      </p:nvGrpSpPr>
+      <p:grpSpPr>
+        <a:xfrm>
+          <a:off x="0" y="0"/>
+          <a:ext cx="0" cy="0"/>
+          <a:chOff x="0" y="0"/>
+          <a:chExt cx="0" cy="0"/>
+        </a:xfrm>
+      </p:grpSpPr>
+      <p:sp>
+        <p:nvSpPr>
+          <p:cNvPr id="2" name="Shape 0">
+            <a:extLst>
+              <a:ext uri="{FF2B5EF4-FFF2-40B4-BE49-F238E27FC236}">
+                <a16:creationId xmlns:a16="http://schemas.microsoft.com/office/drawing/2014/main" id="{2B25760B-ADB8-DDE1-F1AD-93A33FAE129B}"/>
+              </a:ext>
+            </a:extLst>
+          </p:cNvPr>
+          <p:cNvSpPr/>
+          <p:nvPr/>
+        </p:nvSpPr>
+        <p:spPr>
+          <a:xfrm>
+            <a:off x="0" y="0"/>
+            <a:ext cx="9144000" cy="64008"/>
+          </a:xfrm>
+          <a:prstGeom prst="rect">
+            <a:avLst/>
+          </a:prstGeom>
+          <a:solidFill>
+            <a:srgbClr val="0D9488"/>
+          </a:solidFill>
+          <a:ln w="12700">
+            <a:solidFill>
+              <a:srgbClr val="0D9488"/>
+            </a:solidFill>
+            <a:prstDash val="solid"/>
+          </a:ln>
+        </p:spPr>
+        <p:txBody>
+          <a:bodyPr/>
+          <a:lstStyle/>
+          <a:p>
+            <a:endParaRPr lang="en-US"/>
+          </a:p>
+        </p:txBody>
+      </p:sp>
+      <p:sp>
+        <p:nvSpPr>
+          <p:cNvPr id="3" name="Text 1">
+            <a:extLst>
+              <a:ext uri="{FF2B5EF4-FFF2-40B4-BE49-F238E27FC236}">
+                <a16:creationId xmlns:a16="http://schemas.microsoft.com/office/drawing/2014/main" id="{B3076E0B-93DE-143E-D5E4-0ADA664009E2}"/>
+              </a:ext>
+            </a:extLst>
+          </p:cNvPr>
+          <p:cNvSpPr/>
+          <p:nvPr/>
+        </p:nvSpPr>
+        <p:spPr>
+          <a:xfrm>
+            <a:off x="457200" y="182880"/>
+            <a:ext cx="8229600" cy="548640"/>
+          </a:xfrm>
+          <a:prstGeom prst="rect">
+            <a:avLst/>
+          </a:prstGeom>
+          <a:noFill/>
+          <a:ln/>
+        </p:spPr>
+        <p:txBody>
+          <a:bodyPr wrap="square" rtlCol="0" anchor="ctr"/>
+          <a:lstStyle/>
+          <a:p>
+            <a:pPr marL="0" indent="0">
+              <a:buNone/>
+            </a:pPr>
+            <a:r>
+              <a:rPr lang="en-US" sz="2600" b="1" dirty="0">
+                <a:solidFill>
+                  <a:srgbClr val="1B2A4A"/>
+                </a:solidFill>
+                <a:latin typeface="Cambria" pitchFamily="34" charset="0"/>
+                <a:ea typeface="Cambria" pitchFamily="34" charset="-122"/>
+                <a:cs typeface="Cambria" pitchFamily="34" charset="-120"/>
+              </a:rPr>
+              <a:t>Coding the updated database</a:t>
+            </a:r>
+            <a:endParaRPr lang="en-US" sz="2600" dirty="0"/>
+          </a:p>
+        </p:txBody>
+      </p:sp>
+      <p:pic>
+        <p:nvPicPr>
+          <p:cNvPr id="7" name="Picture 6">
+            <a:extLst>
+              <a:ext uri="{FF2B5EF4-FFF2-40B4-BE49-F238E27FC236}">
+                <a16:creationId xmlns:a16="http://schemas.microsoft.com/office/drawing/2014/main" id="{41E33CB7-9505-08B3-C6D5-56963F8E973F}"/>
+              </a:ext>
+            </a:extLst>
+          </p:cNvPr>
+          <p:cNvPicPr>
+            <a:picLocks noChangeAspect="1"/>
+          </p:cNvPicPr>
+          <p:nvPr/>
+        </p:nvPicPr>
+        <p:blipFill>
+          <a:blip r:embed="rId3"/>
+          <a:srcRect t="39450"/>
+          <a:stretch>
+            <a:fillRect/>
+          </a:stretch>
+        </p:blipFill>
+        <p:spPr>
+          <a:xfrm>
+            <a:off x="278695" y="1266092"/>
+            <a:ext cx="8586609" cy="1711764"/>
+          </a:xfrm>
+          <a:prstGeom prst="rect">
+            <a:avLst/>
+          </a:prstGeom>
+        </p:spPr>
+      </p:pic>
+    </p:spTree>
+    <p:extLst>
+      <p:ext uri="{BB962C8B-B14F-4D97-AF65-F5344CB8AC3E}">
+        <p14:creationId xmlns:p14="http://schemas.microsoft.com/office/powerpoint/2010/main" val="1354884031"/>
       </p:ext>
     </p:extLst>
   </p:cSld>
@@ -13591,173 +12595,10 @@
   <p:clrMapOvr>
     <a:masterClrMapping/>
   </p:clrMapOvr>
-  <p:extLst>
-    <p:ext uri="{6950BFC3-D8DA-4A85-94F7-54DA5524770B}">
-      <p188:commentRel xmlns:p188="http://schemas.microsoft.com/office/powerpoint/2018/8/main" r:id="rId3"/>
-    </p:ext>
-  </p:extLst>
 </p:sld>
 </file>
 
 <file path=ppt/slides/slide20.xml><?xml version="1.0" encoding="utf-8"?>
-<p:sld xmlns:a="http://schemas.openxmlformats.org/drawingml/2006/main" xmlns:r="http://schemas.openxmlformats.org/officeDocument/2006/relationships" xmlns:p="http://schemas.openxmlformats.org/presentationml/2006/main">
-  <p:cSld>
-    <p:bg>
-      <p:bgPr>
-        <a:solidFill>
-          <a:srgbClr val="FFFFFF"/>
-        </a:solidFill>
-        <a:effectLst/>
-      </p:bgPr>
-    </p:bg>
-    <p:spTree>
-      <p:nvGrpSpPr>
-        <p:cNvPr id="1" name="">
-          <a:extLst>
-            <a:ext uri="{FF2B5EF4-FFF2-40B4-BE49-F238E27FC236}">
-              <a16:creationId xmlns:a16="http://schemas.microsoft.com/office/drawing/2014/main" id="{EC312ECC-9223-1979-73DD-A7A7F8AF3DBA}"/>
-            </a:ext>
-          </a:extLst>
-        </p:cNvPr>
-        <p:cNvGrpSpPr/>
-        <p:nvPr/>
-      </p:nvGrpSpPr>
-      <p:grpSpPr>
-        <a:xfrm>
-          <a:off x="0" y="0"/>
-          <a:ext cx="0" cy="0"/>
-          <a:chOff x="0" y="0"/>
-          <a:chExt cx="0" cy="0"/>
-        </a:xfrm>
-      </p:grpSpPr>
-      <p:sp>
-        <p:nvSpPr>
-          <p:cNvPr id="2" name="Shape 0">
-            <a:extLst>
-              <a:ext uri="{FF2B5EF4-FFF2-40B4-BE49-F238E27FC236}">
-                <a16:creationId xmlns:a16="http://schemas.microsoft.com/office/drawing/2014/main" id="{2B25760B-ADB8-DDE1-F1AD-93A33FAE129B}"/>
-              </a:ext>
-            </a:extLst>
-          </p:cNvPr>
-          <p:cNvSpPr/>
-          <p:nvPr/>
-        </p:nvSpPr>
-        <p:spPr>
-          <a:xfrm>
-            <a:off x="0" y="0"/>
-            <a:ext cx="9144000" cy="64008"/>
-          </a:xfrm>
-          <a:prstGeom prst="rect">
-            <a:avLst/>
-          </a:prstGeom>
-          <a:solidFill>
-            <a:srgbClr val="0D9488"/>
-          </a:solidFill>
-          <a:ln w="12700">
-            <a:solidFill>
-              <a:srgbClr val="0D9488"/>
-            </a:solidFill>
-            <a:prstDash val="solid"/>
-          </a:ln>
-        </p:spPr>
-        <p:txBody>
-          <a:bodyPr/>
-          <a:lstStyle/>
-          <a:p>
-            <a:endParaRPr lang="en-US"/>
-          </a:p>
-        </p:txBody>
-      </p:sp>
-      <p:sp>
-        <p:nvSpPr>
-          <p:cNvPr id="3" name="Text 1">
-            <a:extLst>
-              <a:ext uri="{FF2B5EF4-FFF2-40B4-BE49-F238E27FC236}">
-                <a16:creationId xmlns:a16="http://schemas.microsoft.com/office/drawing/2014/main" id="{B3076E0B-93DE-143E-D5E4-0ADA664009E2}"/>
-              </a:ext>
-            </a:extLst>
-          </p:cNvPr>
-          <p:cNvSpPr/>
-          <p:nvPr/>
-        </p:nvSpPr>
-        <p:spPr>
-          <a:xfrm>
-            <a:off x="457200" y="182880"/>
-            <a:ext cx="8229600" cy="548640"/>
-          </a:xfrm>
-          <a:prstGeom prst="rect">
-            <a:avLst/>
-          </a:prstGeom>
-          <a:noFill/>
-          <a:ln/>
-        </p:spPr>
-        <p:txBody>
-          <a:bodyPr wrap="square" rtlCol="0" anchor="ctr"/>
-          <a:lstStyle/>
-          <a:p>
-            <a:pPr marL="0" indent="0">
-              <a:buNone/>
-            </a:pPr>
-            <a:r>
-              <a:rPr lang="en-US" sz="2600" b="1" dirty="0">
-                <a:solidFill>
-                  <a:srgbClr val="1B2A4A"/>
-                </a:solidFill>
-                <a:latin typeface="Cambria" pitchFamily="34" charset="0"/>
-                <a:ea typeface="Cambria" pitchFamily="34" charset="-122"/>
-                <a:cs typeface="Cambria" pitchFamily="34" charset="-120"/>
-              </a:rPr>
-              <a:t>Coding the updated database</a:t>
-            </a:r>
-            <a:endParaRPr lang="en-US" sz="2600" dirty="0"/>
-          </a:p>
-        </p:txBody>
-      </p:sp>
-      <p:pic>
-        <p:nvPicPr>
-          <p:cNvPr id="7" name="Picture 6">
-            <a:extLst>
-              <a:ext uri="{FF2B5EF4-FFF2-40B4-BE49-F238E27FC236}">
-                <a16:creationId xmlns:a16="http://schemas.microsoft.com/office/drawing/2014/main" id="{41E33CB7-9505-08B3-C6D5-56963F8E973F}"/>
-              </a:ext>
-            </a:extLst>
-          </p:cNvPr>
-          <p:cNvPicPr>
-            <a:picLocks noChangeAspect="1"/>
-          </p:cNvPicPr>
-          <p:nvPr/>
-        </p:nvPicPr>
-        <p:blipFill>
-          <a:blip r:embed="rId3"/>
-          <a:srcRect t="39450"/>
-          <a:stretch>
-            <a:fillRect/>
-          </a:stretch>
-        </p:blipFill>
-        <p:spPr>
-          <a:xfrm>
-            <a:off x="278695" y="1266092"/>
-            <a:ext cx="8586609" cy="1711764"/>
-          </a:xfrm>
-          <a:prstGeom prst="rect">
-            <a:avLst/>
-          </a:prstGeom>
-        </p:spPr>
-      </p:pic>
-    </p:spTree>
-    <p:extLst>
-      <p:ext uri="{BB962C8B-B14F-4D97-AF65-F5344CB8AC3E}">
-        <p14:creationId xmlns:p14="http://schemas.microsoft.com/office/powerpoint/2010/main" val="1354884031"/>
-      </p:ext>
-    </p:extLst>
-  </p:cSld>
-  <p:clrMapOvr>
-    <a:masterClrMapping/>
-  </p:clrMapOvr>
-</p:sld>
-</file>
-
-<file path=ppt/slides/slide21.xml><?xml version="1.0" encoding="utf-8"?>
 <p:sld xmlns:a="http://schemas.openxmlformats.org/drawingml/2006/main" xmlns:r="http://schemas.openxmlformats.org/officeDocument/2006/relationships" xmlns:p="http://schemas.openxmlformats.org/presentationml/2006/main">
   <p:cSld>
     <p:bg>
@@ -14092,7 +12933,7 @@
 </p:sld>
 </file>
 
-<file path=ppt/slides/slide22.xml><?xml version="1.0" encoding="utf-8"?>
+<file path=ppt/slides/slide21.xml><?xml version="1.0" encoding="utf-8"?>
 <p:sld xmlns:a="http://schemas.openxmlformats.org/drawingml/2006/main" xmlns:r="http://schemas.openxmlformats.org/officeDocument/2006/relationships" xmlns:p="http://schemas.openxmlformats.org/presentationml/2006/main">
   <p:cSld name="Slide 20">
     <p:bg>
@@ -15317,7 +14158,7 @@
 </p:sld>
 </file>
 
-<file path=ppt/slides/slide23.xml><?xml version="1.0" encoding="utf-8"?>
+<file path=ppt/slides/slide22.xml><?xml version="1.0" encoding="utf-8"?>
 <p:sld xmlns:a="http://schemas.openxmlformats.org/drawingml/2006/main" xmlns:r="http://schemas.openxmlformats.org/officeDocument/2006/relationships" xmlns:p="http://schemas.openxmlformats.org/presentationml/2006/main">
   <p:cSld>
     <p:bg>
@@ -15632,7 +14473,7 @@
 </p:sld>
 </file>
 
-<file path=ppt/slides/slide24.xml><?xml version="1.0" encoding="utf-8"?>
+<file path=ppt/slides/slide23.xml><?xml version="1.0" encoding="utf-8"?>
 <p:sld xmlns:a="http://schemas.openxmlformats.org/drawingml/2006/main" xmlns:r="http://schemas.openxmlformats.org/officeDocument/2006/relationships" xmlns:p="http://schemas.openxmlformats.org/presentationml/2006/main">
   <p:cSld name="Slide 21">
     <p:bg>
@@ -15783,7 +14624,7 @@
 </p:sld>
 </file>
 
-<file path=ppt/slides/slide25.xml><?xml version="1.0" encoding="utf-8"?>
+<file path=ppt/slides/slide24.xml><?xml version="1.0" encoding="utf-8"?>
 <p:sld xmlns:a="http://schemas.openxmlformats.org/drawingml/2006/main" xmlns:r="http://schemas.openxmlformats.org/officeDocument/2006/relationships" xmlns:p="http://schemas.openxmlformats.org/presentationml/2006/main">
   <p:cSld>
     <p:bg>
@@ -16068,7 +14909,7 @@
 </p:sld>
 </file>
 
-<file path=ppt/slides/slide26.xml><?xml version="1.0" encoding="utf-8"?>
+<file path=ppt/slides/slide25.xml><?xml version="1.0" encoding="utf-8"?>
 <p:sld xmlns:a="http://schemas.openxmlformats.org/drawingml/2006/main" xmlns:r="http://schemas.openxmlformats.org/officeDocument/2006/relationships" xmlns:p="http://schemas.openxmlformats.org/presentationml/2006/main">
   <p:cSld>
     <p:bg>
@@ -18249,7 +17090,7 @@
 </p:sld>
 </file>
 
-<file path=ppt/slides/slide27.xml><?xml version="1.0" encoding="utf-8"?>
+<file path=ppt/slides/slide26.xml><?xml version="1.0" encoding="utf-8"?>
 <p:sld xmlns:a="http://schemas.openxmlformats.org/drawingml/2006/main" xmlns:r="http://schemas.openxmlformats.org/officeDocument/2006/relationships" xmlns:p="http://schemas.openxmlformats.org/presentationml/2006/main">
   <p:cSld name="Slide 22">
     <p:bg>
@@ -22460,38 +21301,6 @@
       </p:sp>
       <p:sp>
         <p:nvSpPr>
-          <p:cNvPr id="15" name="Shape 13"/>
-          <p:cNvSpPr/>
-          <p:nvPr/>
-        </p:nvSpPr>
-        <p:spPr>
-          <a:xfrm>
-            <a:off x="438912" y="4133088"/>
-            <a:ext cx="2514600" cy="475488"/>
-          </a:xfrm>
-          <a:prstGeom prst="rect">
-            <a:avLst/>
-          </a:prstGeom>
-          <a:solidFill>
-            <a:srgbClr val="FFFFFF"/>
-          </a:solidFill>
-          <a:ln w="12700">
-            <a:solidFill>
-              <a:srgbClr val="E2E8F0"/>
-            </a:solidFill>
-            <a:prstDash val="solid"/>
-          </a:ln>
-        </p:spPr>
-        <p:txBody>
-          <a:bodyPr/>
-          <a:lstStyle/>
-          <a:p>
-            <a:endParaRPr lang="en-US" dirty="0"/>
-          </a:p>
-        </p:txBody>
-      </p:sp>
-      <p:sp>
-        <p:nvSpPr>
           <p:cNvPr id="17" name="Shape 15"/>
           <p:cNvSpPr/>
           <p:nvPr/>
@@ -23448,42 +22257,12 @@
                 <a:ea typeface="Calibri" pitchFamily="34" charset="-122"/>
                 <a:cs typeface="Calibri" pitchFamily="34" charset="-120"/>
               </a:rPr>
-              <a:t>Score = depth × deviation</a:t>
+              <a:t>Score = path length × deviation</a:t>
             </a:r>
             <a:endParaRPr lang="en-US" sz="1050" dirty="0"/>
           </a:p>
         </p:txBody>
       </p:sp>
-      <p:pic>
-        <p:nvPicPr>
-          <p:cNvPr id="46" name="Picture 45">
-            <a:extLst>
-              <a:ext uri="{FF2B5EF4-FFF2-40B4-BE49-F238E27FC236}">
-                <a16:creationId xmlns:a16="http://schemas.microsoft.com/office/drawing/2014/main" id="{CD06B15F-C618-2DCA-AD36-EAD401A3852E}"/>
-              </a:ext>
-            </a:extLst>
-          </p:cNvPr>
-          <p:cNvPicPr>
-            <a:picLocks noChangeAspect="1"/>
-          </p:cNvPicPr>
-          <p:nvPr/>
-        </p:nvPicPr>
-        <p:blipFill>
-          <a:blip r:embed="rId3"/>
-          <a:stretch>
-            <a:fillRect/>
-          </a:stretch>
-        </p:blipFill>
-        <p:spPr>
-          <a:xfrm>
-            <a:off x="453390" y="4223568"/>
-            <a:ext cx="2495074" cy="312340"/>
-          </a:xfrm>
-          <a:prstGeom prst="rect">
-            <a:avLst/>
-          </a:prstGeom>
-        </p:spPr>
-      </p:pic>
     </p:spTree>
   </p:cSld>
   <p:clrMapOvr>
@@ -23764,7 +22543,7 @@
                 <a:ea typeface="Calibri" pitchFamily="34" charset="-122"/>
                 <a:cs typeface="Calibri" pitchFamily="34" charset="-120"/>
               </a:rPr>
-              <a:t>pᵢ ∈ ℝᵐ</a:t>
+              <a:t>pᵢ</a:t>
             </a:r>
             <a:r>
               <a:rPr lang="en-US" sz="1200" dirty="0">
@@ -23786,7 +22565,7 @@
                 <a:ea typeface="Calibri" pitchFamily="34" charset="-122"/>
                 <a:cs typeface="Calibri" pitchFamily="34" charset="-120"/>
               </a:rPr>
-              <a:t>qᵢ ∈ ℝⁿ</a:t>
+              <a:t>qᵢ</a:t>
             </a:r>
             <a:r>
               <a:rPr lang="en-US" sz="1200" dirty="0">
@@ -24652,7 +23431,7 @@
                 <a:ea typeface="Calibri" pitchFamily="34" charset="-122"/>
                 <a:cs typeface="Calibri" pitchFamily="34" charset="-120"/>
               </a:rPr>
-              <a:t>Depth term   ×   Deviation term</a:t>
+              <a:t>Path length term   ×   Deviation term</a:t>
             </a:r>
             <a:endParaRPr lang="en-US" sz="1050" dirty="0"/>
           </a:p>
